--- a/docs/architecture-deck.pptx
+++ b/docs/architecture-deck.pptx
@@ -113,37 +113,37 @@
   <p:extLst>
     <p:ext uri="{521415D9-36F7-43E2-AB2F-B90AF26B5E84}">
       <p14:sectionLst xmlns:p14="http://schemas.microsoft.com/office/powerpoint/2010/main">
-        <p14:section name="Overview" id="{b3f48f09-44e5-7a4c-0d10-1c216ca4be99}">
+        <p14:section name="Overview" id="{b0c47147-e2a2-34e3-5f7f-18dbb4b5fc23}">
           <p14:sldIdLst>
             <p14:sldId id="256"/>
           </p14:sldIdLst>
         </p14:section>
-        <p14:section name="Architecture" id="{dd4d777a-b73d-59a9-98dc-2a741ff9f7c4}">
+        <p14:section name="Architecture" id="{5db22196-5980-70fd-3f4f-66f753af741e}">
           <p14:sldIdLst>
             <p14:sldId id="257"/>
           </p14:sldIdLst>
         </p14:section>
-        <p14:section name="Application flow" id="{d0df32d4-3302-eca3-090f-189f7095b03e}">
+        <p14:section name="Application flow" id="{5f9d2555-b3f4-334e-2f61-569f41ff298c}">
           <p14:sldIdLst>
             <p14:sldId id="258"/>
           </p14:sldIdLst>
         </p14:section>
-        <p14:section name="Components" id="{624dd53c-68b7-9c05-b2f3-2122b21d6886}">
+        <p14:section name="Components" id="{fc9c831b-f5cf-bbd2-0aca-84c72019ed8d}">
           <p14:sldIdLst>
             <p14:sldId id="259"/>
           </p14:sldIdLst>
         </p14:section>
-        <p14:section name="Deployment" id="{365aebcc-29e1-cbb0-b751-ae4327bcd1ad}">
+        <p14:section name="Deployment" id="{5fd707d8-c64d-7c40-d66b-45383c85c320}">
           <p14:sldIdLst>
             <p14:sldId id="260"/>
           </p14:sldIdLst>
         </p14:section>
-        <p14:section name="Data model" id="{26cc606b-0962-a890-0a4a-fd7e5a8c24c3}">
+        <p14:section name="Data model" id="{aba7288b-78ee-f5f5-2b1d-bec3c1747ac3}">
           <p14:sldIdLst>
             <p14:sldId id="261"/>
           </p14:sldIdLst>
         </p14:section>
-        <p14:section name="Lifecycle" id="{1aa64589-807e-8b33-d5cb-64f672d4edb3}">
+        <p14:section name="Lifecycle" id="{7750e60c-146d-8370-f562-8014bba70216}">
           <p14:sldIdLst>
             <p14:sldId id="262"/>
           </p14:sldIdLst>
@@ -9463,7 +9463,7 @@
                   <a:srgbClr val="5C6B64"/>
                 </a:solidFill>
               </a:rPr>
-              <a:t>A second front end onto the same ten tools.</a:t>
+              <a:t>A second front end onto the same ten tools; its calls arrive as text.</a:t>
             </a:r>
             <a:endParaRPr lang="en-US" sz="1100" dirty="0"/>
           </a:p>
@@ -9499,7 +9499,7 @@
                   <a:srgbClr val="5C6B64"/>
                 </a:solidFill>
               </a:rPr>
-              <a:t>6 of 6 question classes</a:t>
+              <a:t>tools run 18/18 · answers 3/18</a:t>
             </a:r>
             <a:endParaRPr lang="en-US" sz="1000" dirty="0"/>
           </a:p>

--- a/docs/architecture-deck.pptx
+++ b/docs/architecture-deck.pptx
@@ -113,37 +113,37 @@
   <p:extLst>
     <p:ext uri="{521415D9-36F7-43E2-AB2F-B90AF26B5E84}">
       <p14:sectionLst xmlns:p14="http://schemas.microsoft.com/office/powerpoint/2010/main">
-        <p14:section name="Overview" id="{b0c47147-e2a2-34e3-5f7f-18dbb4b5fc23}">
+        <p14:section name="Overview" id="{b5469768-56bd-f9f2-0761-843d6290ddd0}">
           <p14:sldIdLst>
             <p14:sldId id="256"/>
           </p14:sldIdLst>
         </p14:section>
-        <p14:section name="Architecture" id="{5db22196-5980-70fd-3f4f-66f753af741e}">
+        <p14:section name="Architecture" id="{c33dcb23-6997-0e4e-4092-7c58dd2a80b4}">
           <p14:sldIdLst>
             <p14:sldId id="257"/>
           </p14:sldIdLst>
         </p14:section>
-        <p14:section name="Application flow" id="{5f9d2555-b3f4-334e-2f61-569f41ff298c}">
+        <p14:section name="Application flow" id="{33e1ae12-3fee-9c65-afdb-82b5956f019b}">
           <p14:sldIdLst>
             <p14:sldId id="258"/>
           </p14:sldIdLst>
         </p14:section>
-        <p14:section name="Components" id="{fc9c831b-f5cf-bbd2-0aca-84c72019ed8d}">
+        <p14:section name="Components" id="{1c800442-9b41-5e30-5d35-7a7fdd408146}">
           <p14:sldIdLst>
             <p14:sldId id="259"/>
           </p14:sldIdLst>
         </p14:section>
-        <p14:section name="Deployment" id="{5fd707d8-c64d-7c40-d66b-45383c85c320}">
+        <p14:section name="Deployment" id="{32ee63e6-ba1f-283c-e16a-4139ff13b3de}">
           <p14:sldIdLst>
             <p14:sldId id="260"/>
           </p14:sldIdLst>
         </p14:section>
-        <p14:section name="Data model" id="{aba7288b-78ee-f5f5-2b1d-bec3c1747ac3}">
+        <p14:section name="Data model" id="{c0554a48-1909-2373-f1f1-5b5de235cd04}">
           <p14:sldIdLst>
             <p14:sldId id="261"/>
           </p14:sldIdLst>
         </p14:section>
-        <p14:section name="Lifecycle" id="{7750e60c-146d-8370-f562-8014bba70216}">
+        <p14:section name="Lifecycle" id="{53e5e271-ee25-bfc1-b41a-cd3820c7c919}">
           <p14:sldIdLst>
             <p14:sldId id="262"/>
           </p14:sldIdLst>
@@ -4739,7 +4739,7 @@
       </p:sp>
       <p:sp>
         <p:nvSpPr>
-          <p:cNvPr id="85" name="lane-10 typed tools"/>
+          <p:cNvPr id="85" name="lane-11 typed tools"/>
           <p:cNvSpPr/>
           <p:nvPr/>
         </p:nvSpPr>
@@ -4795,7 +4795,7 @@
                   <a:srgbClr val="14302A"/>
                 </a:solidFill>
               </a:rPr>
-              <a:t>10 typed tools</a:t>
+              <a:t>11 typed tools</a:t>
             </a:r>
             <a:endParaRPr lang="en-US" sz="1100" dirty="0"/>
           </a:p>
@@ -7830,7 +7830,7 @@
                   <a:srgbClr val="5C6B64"/>
                 </a:solidFill>
               </a:rPr>
-              <a:t>routes 24 of 24 with no model</a:t>
+              <a:t>routes 30 of 30 with no model</a:t>
             </a:r>
             <a:endParaRPr lang="en-US" sz="1200" dirty="0"/>
           </a:p>
@@ -9463,7 +9463,7 @@
                   <a:srgbClr val="5C6B64"/>
                 </a:solidFill>
               </a:rPr>
-              <a:t>A second front end onto the same ten tools; its calls arrive as text.</a:t>
+              <a:t>A second front end onto the same eleven tools; its calls arrive as text.</a:t>
             </a:r>
             <a:endParaRPr lang="en-US" sz="1100" dirty="0"/>
           </a:p>

--- a/docs/architecture-deck.pptx
+++ b/docs/architecture-deck.pptx
@@ -113,37 +113,37 @@
   <p:extLst>
     <p:ext uri="{521415D9-36F7-43E2-AB2F-B90AF26B5E84}">
       <p14:sectionLst xmlns:p14="http://schemas.microsoft.com/office/powerpoint/2010/main">
-        <p14:section name="Overview" id="{b5469768-56bd-f9f2-0761-843d6290ddd0}">
+        <p14:section name="Overview" id="{2de35776-11ad-5eb2-1d62-6637e77d7df0}">
           <p14:sldIdLst>
             <p14:sldId id="256"/>
           </p14:sldIdLst>
         </p14:section>
-        <p14:section name="Architecture" id="{c33dcb23-6997-0e4e-4092-7c58dd2a80b4}">
+        <p14:section name="Architecture" id="{894bfa33-335e-7fb9-b407-b0129f536c1d}">
           <p14:sldIdLst>
             <p14:sldId id="257"/>
           </p14:sldIdLst>
         </p14:section>
-        <p14:section name="Application flow" id="{33e1ae12-3fee-9c65-afdb-82b5956f019b}">
+        <p14:section name="Application flow" id="{5575d325-79c6-62a1-2ac7-9a3c34abb47e}">
           <p14:sldIdLst>
             <p14:sldId id="258"/>
           </p14:sldIdLst>
         </p14:section>
-        <p14:section name="Components" id="{1c800442-9b41-5e30-5d35-7a7fdd408146}">
+        <p14:section name="Components" id="{0c342713-ec23-2cd4-8091-f508117dbfcb}">
           <p14:sldIdLst>
             <p14:sldId id="259"/>
           </p14:sldIdLst>
         </p14:section>
-        <p14:section name="Deployment" id="{32ee63e6-ba1f-283c-e16a-4139ff13b3de}">
+        <p14:section name="Deployment" id="{1df7d20e-adea-0275-5604-75877997d81d}">
           <p14:sldIdLst>
             <p14:sldId id="260"/>
           </p14:sldIdLst>
         </p14:section>
-        <p14:section name="Data model" id="{c0554a48-1909-2373-f1f1-5b5de235cd04}">
+        <p14:section name="Data model" id="{d827cc5a-8859-11d5-c1c1-bed0a894a704}">
           <p14:sldIdLst>
             <p14:sldId id="261"/>
           </p14:sldIdLst>
         </p14:section>
-        <p14:section name="Lifecycle" id="{53e5e271-ee25-bfc1-b41a-cd3820c7c919}">
+        <p14:section name="Lifecycle" id="{178946c4-f3d5-b42a-43f8-36bb62c42a2b}">
           <p14:sldIdLst>
             <p14:sldId id="262"/>
           </p14:sldIdLst>
@@ -7830,7 +7830,7 @@
                   <a:srgbClr val="5C6B64"/>
                 </a:solidFill>
               </a:rPr>
-              <a:t>routes 30 of 30 with no model</a:t>
+              <a:t>routes 37 of 37 with no model</a:t>
             </a:r>
             <a:endParaRPr lang="en-US" sz="1200" dirty="0"/>
           </a:p>

--- a/docs/architecture-deck.pptx
+++ b/docs/architecture-deck.pptx
@@ -113,37 +113,37 @@
   <p:extLst>
     <p:ext uri="{521415D9-36F7-43E2-AB2F-B90AF26B5E84}">
       <p14:sectionLst xmlns:p14="http://schemas.microsoft.com/office/powerpoint/2010/main">
-        <p14:section name="Overview" id="{2de35776-11ad-5eb2-1d62-6637e77d7df0}">
+        <p14:section name="Overview" id="{abf5eeb5-7323-90d6-65de-088894cfcdc8}">
           <p14:sldIdLst>
             <p14:sldId id="256"/>
           </p14:sldIdLst>
         </p14:section>
-        <p14:section name="Architecture" id="{894bfa33-335e-7fb9-b407-b0129f536c1d}">
+        <p14:section name="Architecture" id="{a81490dc-c9eb-8960-d70a-f8583d67454a}">
           <p14:sldIdLst>
             <p14:sldId id="257"/>
           </p14:sldIdLst>
         </p14:section>
-        <p14:section name="Application flow" id="{5575d325-79c6-62a1-2ac7-9a3c34abb47e}">
+        <p14:section name="Application flow" id="{ae9bcbb1-94e9-680d-f862-121c9a08c151}">
           <p14:sldIdLst>
             <p14:sldId id="258"/>
           </p14:sldIdLst>
         </p14:section>
-        <p14:section name="Components" id="{0c342713-ec23-2cd4-8091-f508117dbfcb}">
+        <p14:section name="Components" id="{974b707b-3153-0402-0106-eb081fa7c7dc}">
           <p14:sldIdLst>
             <p14:sldId id="259"/>
           </p14:sldIdLst>
         </p14:section>
-        <p14:section name="Deployment" id="{1df7d20e-adea-0275-5604-75877997d81d}">
+        <p14:section name="Deployment" id="{417e6906-6846-e1e2-79ef-1746b7ab86a2}">
           <p14:sldIdLst>
             <p14:sldId id="260"/>
           </p14:sldIdLst>
         </p14:section>
-        <p14:section name="Data model" id="{d827cc5a-8859-11d5-c1c1-bed0a894a704}">
+        <p14:section name="Data model" id="{c70a8954-01e6-b699-ac84-d5429953b86b}">
           <p14:sldIdLst>
             <p14:sldId id="261"/>
           </p14:sldIdLst>
         </p14:section>
-        <p14:section name="Lifecycle" id="{178946c4-f3d5-b42a-43f8-36bb62c42a2b}">
+        <p14:section name="Lifecycle" id="{22f2c83a-6dbe-4da0-7752-ed5ca3280e00}">
           <p14:sldIdLst>
             <p14:sldId id="262"/>
           </p14:sldIdLst>
@@ -9814,7 +9814,7 @@
                   <a:srgbClr val="5C6B64"/>
                 </a:solidFill>
               </a:rPr>
-              <a:t>Six measures as BYOB benchmarks, run over run.</a:t>
+              <a:t>Seven BYOB benchmarks, run over run.</a:t>
             </a:r>
             <a:endParaRPr lang="en-US" sz="1100" dirty="0"/>
           </a:p>

--- a/docs/architecture-deck.pptx
+++ b/docs/architecture-deck.pptx
@@ -12,9 +12,11 @@
     <p:sldId id="260" r:id="rId6"/>
     <p:sldId id="261" r:id="rId7"/>
     <p:sldId id="262" r:id="rId8"/>
+    <p:sldId id="263" r:id="rId9"/>
+    <p:sldId id="264" r:id="rId10"/>
   </p:sldIdLst>
   <p:notesMasterIdLst>
-    <p:notesMasterId r:id="rId9"/>
+    <p:notesMasterId r:id="rId11"/>
   </p:notesMasterIdLst>
   <p:sldSz cx="12192000" cy="6858000"/>
   <p:notesSz cx="6858000" cy="12192000"/>
@@ -113,39 +115,45 @@
   <p:extLst>
     <p:ext uri="{521415D9-36F7-43E2-AB2F-B90AF26B5E84}">
       <p14:sectionLst xmlns:p14="http://schemas.microsoft.com/office/powerpoint/2010/main">
-        <p14:section name="Overview" id="{abf5eeb5-7323-90d6-65de-088894cfcdc8}">
+        <p14:section name="Overview" id="{89330760-eeb3-569e-7b54-6692e5fab8c0}">
           <p14:sldIdLst>
             <p14:sldId id="256"/>
           </p14:sldIdLst>
         </p14:section>
-        <p14:section name="Architecture" id="{a81490dc-c9eb-8960-d70a-f8583d67454a}">
+        <p14:section name="Architecture" id="{8b0cbe7b-3c66-63df-6b5b-c122551b0f6c}">
           <p14:sldIdLst>
             <p14:sldId id="257"/>
           </p14:sldIdLst>
         </p14:section>
-        <p14:section name="Application flow" id="{ae9bcbb1-94e9-680d-f862-121c9a08c151}">
+        <p14:section name="Application flow" id="{3acb2bc4-19d5-3212-63a5-67a73a3f0cd4}">
           <p14:sldIdLst>
             <p14:sldId id="258"/>
           </p14:sldIdLst>
         </p14:section>
-        <p14:section name="Components" id="{974b707b-3153-0402-0106-eb081fa7c7dc}">
+        <p14:section name="Components" id="{c9e77b0e-c35b-aff1-6a31-a1560db7fc71}">
           <p14:sldIdLst>
             <p14:sldId id="259"/>
           </p14:sldIdLst>
         </p14:section>
-        <p14:section name="Deployment" id="{417e6906-6846-e1e2-79ef-1746b7ab86a2}">
+        <p14:section name="Deployment" id="{04cf93c8-fa70-d084-6e96-d05419096c4d}">
           <p14:sldIdLst>
             <p14:sldId id="260"/>
           </p14:sldIdLst>
         </p14:section>
-        <p14:section name="Data model" id="{c70a8954-01e6-b699-ac84-d5429953b86b}">
+        <p14:section name="Data model" id="{725cb8b3-5908-590f-530b-78d815849b63}">
           <p14:sldIdLst>
             <p14:sldId id="261"/>
           </p14:sldIdLst>
         </p14:section>
-        <p14:section name="Lifecycle" id="{22f2c83a-6dbe-4da0-7752-ed5ca3280e00}">
+        <p14:section name="Lifecycle" id="{9b989025-c85f-8743-e383-4d2a04c54c29}">
           <p14:sldIdLst>
             <p14:sldId id="262"/>
+          </p14:sldIdLst>
+        </p14:section>
+        <p14:section name="Usage" id="{36383487-68fd-7584-2b72-75d7d21bf2bb}">
+          <p14:sldIdLst>
+            <p14:sldId id="263"/>
+            <p14:sldId id="264"/>
           </p14:sldIdLst>
         </p14:section>
       </p14:sectionLst>
@@ -1122,6 +1130,182 @@
 </p:notes>
 </file>
 
+<file path=ppt/notesSlides/notesSlide8.xml><?xml version="1.0" encoding="utf-8"?>
+<p:notes xmlns:a="http://schemas.openxmlformats.org/drawingml/2006/main" xmlns:r="http://schemas.openxmlformats.org/officeDocument/2006/relationships" xmlns:p="http://schemas.openxmlformats.org/presentationml/2006/main">
+  <p:cSld>
+    <p:spTree>
+      <p:nvGrpSpPr>
+        <p:cNvPr id="1" name=""/>
+        <p:cNvGrpSpPr/>
+        <p:nvPr/>
+      </p:nvGrpSpPr>
+      <p:grpSpPr>
+        <a:xfrm>
+          <a:off x="0" y="0"/>
+          <a:ext cx="0" cy="0"/>
+          <a:chOff x="0" y="0"/>
+          <a:chExt cx="0" cy="0"/>
+        </a:xfrm>
+      </p:grpSpPr>
+      <p:sp>
+        <p:nvSpPr>
+          <p:cNvPr id="2" name="Slide Image Placeholder 1"/>
+          <p:cNvSpPr>
+            <a:spLocks noGrp="1" noRot="1" noChangeAspect="1"/>
+          </p:cNvSpPr>
+          <p:nvPr>
+            <p:ph type="sldImg"/>
+          </p:nvPr>
+        </p:nvSpPr>
+        <p:spPr/>
+      </p:sp>
+      <p:sp>
+        <p:nvSpPr>
+          <p:cNvPr id="3" name="Notes Placeholder 2"/>
+          <p:cNvSpPr>
+            <a:spLocks noGrp="1"/>
+          </p:cNvSpPr>
+          <p:nvPr>
+            <p:ph type="body" idx="1"/>
+          </p:nvPr>
+        </p:nvSpPr>
+        <p:spPr/>
+        <p:txBody>
+          <a:bodyPr/>
+          <a:lstStyle/>
+          <a:p>
+            <a:r>
+              <a:rPr lang="en-US" dirty="0"/>
+              <a:t>The flow strip is the read path. The four frames are the same run seen from the app, from Grafana, from Prometheus and from the store. 87.5% composed in Python is the project's thesis, and Grafana reports it independently of the eleven timings in docs/EXAMPLES.md.</a:t>
+            </a:r>
+            <a:endParaRPr lang="en-US" dirty="0"/>
+          </a:p>
+        </p:txBody>
+      </p:sp>
+      <p:sp>
+        <p:nvSpPr>
+          <p:cNvPr id="4" name="Slide Number Placeholder 3"/>
+          <p:cNvSpPr>
+            <a:spLocks noGrp="1"/>
+          </p:cNvSpPr>
+          <p:nvPr>
+            <p:ph type="sldNum" sz="quarter" idx="10"/>
+          </p:nvPr>
+        </p:nvSpPr>
+        <p:spPr/>
+        <p:txBody>
+          <a:bodyPr/>
+          <a:lstStyle/>
+          <a:p>
+            <a:fld id="{F7021451-1387-4CA6-816F-3879F97B5CBC}" type="slidenum">
+              <a:rPr lang="en-US"/>
+              <a:t>8</a:t>
+            </a:fld>
+            <a:endParaRPr lang="en-US"/>
+          </a:p>
+        </p:txBody>
+      </p:sp>
+    </p:spTree>
+    <p:extLst>
+      <p:ext uri="{BB962C8B-B14F-4D97-AF65-F5344CB8AC3E}">
+        <p14:creationId xmlns:p14="http://schemas.microsoft.com/office/powerpoint/2010/main" val="1024086991"/>
+      </p:ext>
+    </p:extLst>
+  </p:cSld>
+  <p:clrMapOvr>
+    <a:masterClrMapping/>
+  </p:clrMapOvr>
+</p:notes>
+</file>
+
+<file path=ppt/notesSlides/notesSlide9.xml><?xml version="1.0" encoding="utf-8"?>
+<p:notes xmlns:a="http://schemas.openxmlformats.org/drawingml/2006/main" xmlns:r="http://schemas.openxmlformats.org/officeDocument/2006/relationships" xmlns:p="http://schemas.openxmlformats.org/presentationml/2006/main">
+  <p:cSld>
+    <p:spTree>
+      <p:nvGrpSpPr>
+        <p:cNvPr id="1" name=""/>
+        <p:cNvGrpSpPr/>
+        <p:nvPr/>
+      </p:nvGrpSpPr>
+      <p:grpSpPr>
+        <a:xfrm>
+          <a:off x="0" y="0"/>
+          <a:ext cx="0" cy="0"/>
+          <a:chOff x="0" y="0"/>
+          <a:chExt cx="0" cy="0"/>
+        </a:xfrm>
+      </p:grpSpPr>
+      <p:sp>
+        <p:nvSpPr>
+          <p:cNvPr id="2" name="Slide Image Placeholder 1"/>
+          <p:cNvSpPr>
+            <a:spLocks noGrp="1" noRot="1" noChangeAspect="1"/>
+          </p:cNvSpPr>
+          <p:nvPr>
+            <p:ph type="sldImg"/>
+          </p:nvPr>
+        </p:nvSpPr>
+        <p:spPr/>
+      </p:sp>
+      <p:sp>
+        <p:nvSpPr>
+          <p:cNvPr id="3" name="Notes Placeholder 2"/>
+          <p:cNvSpPr>
+            <a:spLocks noGrp="1"/>
+          </p:cNvSpPr>
+          <p:nvPr>
+            <p:ph type="body" idx="1"/>
+          </p:nvPr>
+        </p:nvSpPr>
+        <p:spPr/>
+        <p:txBody>
+          <a:bodyPr/>
+          <a:lstStyle/>
+          <a:p>
+            <a:r>
+              <a:rPr lang="en-US" dirty="0"/>
+              <a:t>Nothing here needs a GPU except the voice leg and the semantic tab. The store consoles are deliberately outside the advisor's UI.</a:t>
+            </a:r>
+            <a:endParaRPr lang="en-US" dirty="0"/>
+          </a:p>
+        </p:txBody>
+      </p:sp>
+      <p:sp>
+        <p:nvSpPr>
+          <p:cNvPr id="4" name="Slide Number Placeholder 3"/>
+          <p:cNvSpPr>
+            <a:spLocks noGrp="1"/>
+          </p:cNvSpPr>
+          <p:nvPr>
+            <p:ph type="sldNum" sz="quarter" idx="10"/>
+          </p:nvPr>
+        </p:nvSpPr>
+        <p:spPr/>
+        <p:txBody>
+          <a:bodyPr/>
+          <a:lstStyle/>
+          <a:p>
+            <a:fld id="{F7021451-1387-4CA6-816F-3879F97B5CBC}" type="slidenum">
+              <a:rPr lang="en-US"/>
+              <a:t>9</a:t>
+            </a:fld>
+            <a:endParaRPr lang="en-US"/>
+          </a:p>
+        </p:txBody>
+      </p:sp>
+    </p:spTree>
+    <p:extLst>
+      <p:ext uri="{BB962C8B-B14F-4D97-AF65-F5344CB8AC3E}">
+        <p14:creationId xmlns:p14="http://schemas.microsoft.com/office/powerpoint/2010/main" val="1024086991"/>
+      </p:ext>
+    </p:extLst>
+  </p:cSld>
+  <p:clrMapOvr>
+    <a:masterClrMapping/>
+  </p:clrMapOvr>
+</p:notes>
+</file>
+
 <file path=ppt/slideLayouts/slideLayout1.xml><?xml version="1.0" encoding="utf-8"?>
 <p:sldLayout xmlns:a="http://schemas.openxmlformats.org/drawingml/2006/main" xmlns:r="http://schemas.openxmlformats.org/officeDocument/2006/relationships" xmlns:p="http://schemas.openxmlformats.org/presentationml/2006/main" preserve="1">
   <p:cSld name="DEFAULT">
@@ -15112,6 +15296,2307 @@
                 </a:solidFill>
               </a:rPr>
               <a:t>Amber marks the two blocking states; green marks the terminal one. The second row flows right to left, so every arrow drawn here is a transition the engine actually allows.</a:t>
+            </a:r>
+            <a:endParaRPr lang="en-US" sz="1000" dirty="0"/>
+          </a:p>
+        </p:txBody>
+      </p:sp>
+    </p:spTree>
+  </p:cSld>
+  <p:clrMapOvr>
+    <a:masterClrMapping/>
+  </p:clrMapOvr>
+</p:sld>
+</file>
+
+<file path=ppt/slides/slide8.xml><?xml version="1.0" encoding="utf-8"?>
+<p:sld xmlns:a="http://schemas.openxmlformats.org/drawingml/2006/main" xmlns:r="http://schemas.openxmlformats.org/officeDocument/2006/relationships" xmlns:p="http://schemas.openxmlformats.org/presentationml/2006/main">
+  <p:cSld name="Slide 8">
+    <p:spTree>
+      <p:nvGrpSpPr>
+        <p:cNvPr id="1" name=""/>
+        <p:cNvGrpSpPr/>
+        <p:nvPr/>
+      </p:nvGrpSpPr>
+      <p:grpSpPr>
+        <a:xfrm>
+          <a:off x="0" y="0"/>
+          <a:ext cx="0" cy="0"/>
+          <a:chOff x="0" y="0"/>
+          <a:chExt cx="0" cy="0"/>
+        </a:xfrm>
+      </p:grpSpPr>
+      <p:sp>
+        <p:nvSpPr>
+          <p:cNvPr id="2" name="Text 0"/>
+          <p:cNvSpPr txBox="1"/>
+          <p:nvPr/>
+        </p:nvSpPr>
+        <p:spPr>
+          <a:xfrm>
+            <a:off x="502920" y="237744"/>
+            <a:ext cx="11185855" cy="402336"/>
+          </a:xfrm>
+          <a:prstGeom prst="rect">
+            <a:avLst/>
+          </a:prstGeom>
+          <a:noFill/>
+          <a:ln/>
+        </p:spPr>
+        <p:txBody>
+          <a:bodyPr wrap="square" lIns="0" tIns="0" rIns="0" bIns="0" rtlCol="0" anchor="ctr"/>
+          <a:lstStyle/>
+          <a:p>
+            <a:pPr indent="0" marL="0">
+              <a:buNone/>
+            </a:pPr>
+            <a:r>
+              <a:rPr lang="en-US" sz="2600" b="1" dirty="0">
+                <a:solidFill>
+                  <a:srgbClr val="14302A"/>
+                </a:solidFill>
+                <a:latin typeface="Arial" pitchFamily="34" charset="0"/>
+                <a:ea typeface="Arial" pitchFamily="34" charset="-122"/>
+                <a:cs typeface="Arial" pitchFamily="34" charset="-120"/>
+              </a:rPr>
+              <a:t>What it looks like in use</a:t>
+            </a:r>
+            <a:endParaRPr lang="en-US" sz="2600" dirty="0"/>
+          </a:p>
+        </p:txBody>
+      </p:sp>
+      <p:sp>
+        <p:nvSpPr>
+          <p:cNvPr id="3" name="Text 1"/>
+          <p:cNvSpPr txBox="1"/>
+          <p:nvPr/>
+        </p:nvSpPr>
+        <p:spPr>
+          <a:xfrm>
+            <a:off x="502920" y="676656"/>
+            <a:ext cx="11185855" cy="310896"/>
+          </a:xfrm>
+          <a:prstGeom prst="rect">
+            <a:avLst/>
+          </a:prstGeom>
+          <a:noFill/>
+          <a:ln/>
+        </p:spPr>
+        <p:txBody>
+          <a:bodyPr wrap="square" lIns="0" tIns="0" rIns="0" bIns="0" rtlCol="0" anchor="ctr"/>
+          <a:lstStyle/>
+          <a:p>
+            <a:pPr indent="0" marL="0">
+              <a:buNone/>
+            </a:pPr>
+            <a:r>
+              <a:rPr lang="en-US" sz="1150" dirty="0">
+                <a:solidFill>
+                  <a:srgbClr val="5C6B64"/>
+                </a:solidFill>
+              </a:rPr>
+              <a:t>One question, end to end — and the three consoles that show it happened. Captured from a live run on the L40S, all three NIMs local.</a:t>
+            </a:r>
+            <a:endParaRPr lang="en-US" sz="1150" dirty="0"/>
+          </a:p>
+        </p:txBody>
+      </p:sp>
+      <p:sp>
+        <p:nvSpPr>
+          <p:cNvPr id="4" name="card-Question"/>
+          <p:cNvSpPr/>
+          <p:nvPr/>
+        </p:nvSpPr>
+        <p:spPr>
+          <a:xfrm>
+            <a:off x="502920" y="1024128"/>
+            <a:ext cx="1635709" cy="658368"/>
+          </a:xfrm>
+          <a:prstGeom prst="rect">
+            <a:avLst/>
+          </a:prstGeom>
+          <a:solidFill>
+            <a:srgbClr val="FFFFFF"/>
+          </a:solidFill>
+          <a:ln w="12700">
+            <a:solidFill>
+              <a:srgbClr val="C3CCC0"/>
+            </a:solidFill>
+            <a:prstDash val="solid"/>
+          </a:ln>
+        </p:spPr>
+      </p:sp>
+      <p:sp>
+        <p:nvSpPr>
+          <p:cNvPr id="5" name="Text 3"/>
+          <p:cNvSpPr txBox="1"/>
+          <p:nvPr/>
+        </p:nvSpPr>
+        <p:spPr>
+          <a:xfrm>
+            <a:off x="566928" y="1060704"/>
+            <a:ext cx="1507693" cy="585216"/>
+          </a:xfrm>
+          <a:prstGeom prst="rect">
+            <a:avLst/>
+          </a:prstGeom>
+          <a:noFill/>
+          <a:ln/>
+        </p:spPr>
+        <p:txBody>
+          <a:bodyPr wrap="square" lIns="0" tIns="0" rIns="0" bIns="0" rtlCol="0" anchor="t"/>
+          <a:lstStyle/>
+          <a:p>
+            <a:pPr algn="l" indent="0" marL="0">
+              <a:lnSpc>
+                <a:spcPct val="92000"/>
+              </a:lnSpc>
+              <a:buNone/>
+            </a:pPr>
+            <a:r>
+              <a:rPr lang="en-US" sz="1100" b="1" dirty="0">
+                <a:solidFill>
+                  <a:srgbClr val="14302A"/>
+                </a:solidFill>
+              </a:rPr>
+              <a:t>Question</a:t>
+            </a:r>
+            <a:endParaRPr lang="en-US" sz="1100" dirty="0"/>
+          </a:p>
+          <a:p>
+            <a:pPr algn="l" indent="0" marL="0">
+              <a:lnSpc>
+                <a:spcPct val="92000"/>
+              </a:lnSpc>
+              <a:buNone/>
+            </a:pPr>
+            <a:r>
+              <a:rPr lang="en-US" sz="1000" dirty="0">
+                <a:solidFill>
+                  <a:srgbClr val="5C6B64"/>
+                </a:solidFill>
+              </a:rPr>
+              <a:t>typed or spoken</a:t>
+            </a:r>
+            <a:endParaRPr lang="en-US" sz="1100" dirty="0"/>
+          </a:p>
+        </p:txBody>
+      </p:sp>
+      <p:sp>
+        <p:nvSpPr>
+          <p:cNvPr id="6" name="Shape 4"/>
+          <p:cNvSpPr/>
+          <p:nvPr/>
+        </p:nvSpPr>
+        <p:spPr>
+          <a:xfrm>
+            <a:off x="2175205" y="1225296"/>
+            <a:ext cx="201168" cy="201168"/>
+          </a:xfrm>
+          <a:prstGeom prst="rightArrow">
+            <a:avLst/>
+          </a:prstGeom>
+          <a:solidFill>
+            <a:srgbClr val="76B900"/>
+          </a:solidFill>
+          <a:ln w="12700">
+            <a:solidFill>
+              <a:srgbClr val="76B900"/>
+            </a:solidFill>
+            <a:prstDash val="solid"/>
+          </a:ln>
+        </p:spPr>
+      </p:sp>
+      <p:sp>
+        <p:nvSpPr>
+          <p:cNvPr id="7" name="card-Router"/>
+          <p:cNvSpPr/>
+          <p:nvPr/>
+        </p:nvSpPr>
+        <p:spPr>
+          <a:xfrm>
+            <a:off x="2412949" y="1024128"/>
+            <a:ext cx="1635709" cy="658368"/>
+          </a:xfrm>
+          <a:prstGeom prst="rect">
+            <a:avLst/>
+          </a:prstGeom>
+          <a:solidFill>
+            <a:srgbClr val="FFFFFF"/>
+          </a:solidFill>
+          <a:ln w="12700">
+            <a:solidFill>
+              <a:srgbClr val="C3CCC0"/>
+            </a:solidFill>
+            <a:prstDash val="solid"/>
+          </a:ln>
+        </p:spPr>
+      </p:sp>
+      <p:sp>
+        <p:nvSpPr>
+          <p:cNvPr id="8" name="Text 6"/>
+          <p:cNvSpPr txBox="1"/>
+          <p:nvPr/>
+        </p:nvSpPr>
+        <p:spPr>
+          <a:xfrm>
+            <a:off x="2476957" y="1060704"/>
+            <a:ext cx="1507693" cy="585216"/>
+          </a:xfrm>
+          <a:prstGeom prst="rect">
+            <a:avLst/>
+          </a:prstGeom>
+          <a:noFill/>
+          <a:ln/>
+        </p:spPr>
+        <p:txBody>
+          <a:bodyPr wrap="square" lIns="0" tIns="0" rIns="0" bIns="0" rtlCol="0" anchor="t"/>
+          <a:lstStyle/>
+          <a:p>
+            <a:pPr algn="l" indent="0" marL="0">
+              <a:lnSpc>
+                <a:spcPct val="92000"/>
+              </a:lnSpc>
+              <a:buNone/>
+            </a:pPr>
+            <a:r>
+              <a:rPr lang="en-US" sz="1100" b="1" dirty="0">
+                <a:solidFill>
+                  <a:srgbClr val="14302A"/>
+                </a:solidFill>
+              </a:rPr>
+              <a:t>Router</a:t>
+            </a:r>
+            <a:endParaRPr lang="en-US" sz="1100" dirty="0"/>
+          </a:p>
+          <a:p>
+            <a:pPr algn="l" indent="0" marL="0">
+              <a:lnSpc>
+                <a:spcPct val="92000"/>
+              </a:lnSpc>
+              <a:buNone/>
+            </a:pPr>
+            <a:r>
+              <a:rPr lang="en-US" sz="1000" dirty="0">
+                <a:solidFill>
+                  <a:srgbClr val="5C6B64"/>
+                </a:solidFill>
+              </a:rPr>
+              <a:t>keywords, no model</a:t>
+            </a:r>
+            <a:endParaRPr lang="en-US" sz="1100" dirty="0"/>
+          </a:p>
+        </p:txBody>
+      </p:sp>
+      <p:sp>
+        <p:nvSpPr>
+          <p:cNvPr id="9" name="Shape 7"/>
+          <p:cNvSpPr/>
+          <p:nvPr/>
+        </p:nvSpPr>
+        <p:spPr>
+          <a:xfrm>
+            <a:off x="4085234" y="1225296"/>
+            <a:ext cx="201168" cy="201168"/>
+          </a:xfrm>
+          <a:prstGeom prst="rightArrow">
+            <a:avLst/>
+          </a:prstGeom>
+          <a:solidFill>
+            <a:srgbClr val="76B900"/>
+          </a:solidFill>
+          <a:ln w="12700">
+            <a:solidFill>
+              <a:srgbClr val="76B900"/>
+            </a:solidFill>
+            <a:prstDash val="solid"/>
+          </a:ln>
+        </p:spPr>
+      </p:sp>
+      <p:sp>
+        <p:nvSpPr>
+          <p:cNvPr id="10" name="card-Typed tools"/>
+          <p:cNvSpPr/>
+          <p:nvPr/>
+        </p:nvSpPr>
+        <p:spPr>
+          <a:xfrm>
+            <a:off x="4322978" y="1024128"/>
+            <a:ext cx="1635709" cy="658368"/>
+          </a:xfrm>
+          <a:prstGeom prst="rect">
+            <a:avLst/>
+          </a:prstGeom>
+          <a:solidFill>
+            <a:srgbClr val="FFFFFF"/>
+          </a:solidFill>
+          <a:ln w="12700">
+            <a:solidFill>
+              <a:srgbClr val="C3CCC0"/>
+            </a:solidFill>
+            <a:prstDash val="solid"/>
+          </a:ln>
+        </p:spPr>
+      </p:sp>
+      <p:sp>
+        <p:nvSpPr>
+          <p:cNvPr id="11" name="Text 9"/>
+          <p:cNvSpPr txBox="1"/>
+          <p:nvPr/>
+        </p:nvSpPr>
+        <p:spPr>
+          <a:xfrm>
+            <a:off x="4386986" y="1060704"/>
+            <a:ext cx="1507693" cy="585216"/>
+          </a:xfrm>
+          <a:prstGeom prst="rect">
+            <a:avLst/>
+          </a:prstGeom>
+          <a:noFill/>
+          <a:ln/>
+        </p:spPr>
+        <p:txBody>
+          <a:bodyPr wrap="square" lIns="0" tIns="0" rIns="0" bIns="0" rtlCol="0" anchor="t"/>
+          <a:lstStyle/>
+          <a:p>
+            <a:pPr algn="l" indent="0" marL="0">
+              <a:lnSpc>
+                <a:spcPct val="92000"/>
+              </a:lnSpc>
+              <a:buNone/>
+            </a:pPr>
+            <a:r>
+              <a:rPr lang="en-US" sz="1100" b="1" dirty="0">
+                <a:solidFill>
+                  <a:srgbClr val="14302A"/>
+                </a:solidFill>
+              </a:rPr>
+              <a:t>Typed tools</a:t>
+            </a:r>
+            <a:endParaRPr lang="en-US" sz="1100" dirty="0"/>
+          </a:p>
+          <a:p>
+            <a:pPr algn="l" indent="0" marL="0">
+              <a:lnSpc>
+                <a:spcPct val="92000"/>
+              </a:lnSpc>
+              <a:buNone/>
+            </a:pPr>
+            <a:r>
+              <a:rPr lang="en-US" sz="1000" dirty="0">
+                <a:solidFill>
+                  <a:srgbClr val="5C6B64"/>
+                </a:solidFill>
+              </a:rPr>
+              <a:t>SQL · Milvus + rerank</a:t>
+            </a:r>
+            <a:endParaRPr lang="en-US" sz="1100" dirty="0"/>
+          </a:p>
+        </p:txBody>
+      </p:sp>
+      <p:sp>
+        <p:nvSpPr>
+          <p:cNvPr id="12" name="Shape 10"/>
+          <p:cNvSpPr/>
+          <p:nvPr/>
+        </p:nvSpPr>
+        <p:spPr>
+          <a:xfrm>
+            <a:off x="5995264" y="1225296"/>
+            <a:ext cx="201168" cy="201168"/>
+          </a:xfrm>
+          <a:prstGeom prst="rightArrow">
+            <a:avLst/>
+          </a:prstGeom>
+          <a:solidFill>
+            <a:srgbClr val="76B900"/>
+          </a:solidFill>
+          <a:ln w="12700">
+            <a:solidFill>
+              <a:srgbClr val="76B900"/>
+            </a:solidFill>
+            <a:prstDash val="solid"/>
+          </a:ln>
+        </p:spPr>
+      </p:sp>
+      <p:sp>
+        <p:nvSpPr>
+          <p:cNvPr id="13" name="card-Compose"/>
+          <p:cNvSpPr/>
+          <p:nvPr/>
+        </p:nvSpPr>
+        <p:spPr>
+          <a:xfrm>
+            <a:off x="6233008" y="1024128"/>
+            <a:ext cx="1635709" cy="658368"/>
+          </a:xfrm>
+          <a:prstGeom prst="rect">
+            <a:avLst/>
+          </a:prstGeom>
+          <a:solidFill>
+            <a:srgbClr val="FFFFFF"/>
+          </a:solidFill>
+          <a:ln w="12700">
+            <a:solidFill>
+              <a:srgbClr val="C3CCC0"/>
+            </a:solidFill>
+            <a:prstDash val="solid"/>
+          </a:ln>
+        </p:spPr>
+      </p:sp>
+      <p:sp>
+        <p:nvSpPr>
+          <p:cNvPr id="14" name="Text 12"/>
+          <p:cNvSpPr txBox="1"/>
+          <p:nvPr/>
+        </p:nvSpPr>
+        <p:spPr>
+          <a:xfrm>
+            <a:off x="6297016" y="1060704"/>
+            <a:ext cx="1507693" cy="585216"/>
+          </a:xfrm>
+          <a:prstGeom prst="rect">
+            <a:avLst/>
+          </a:prstGeom>
+          <a:noFill/>
+          <a:ln/>
+        </p:spPr>
+        <p:txBody>
+          <a:bodyPr wrap="square" lIns="0" tIns="0" rIns="0" bIns="0" rtlCol="0" anchor="t"/>
+          <a:lstStyle/>
+          <a:p>
+            <a:pPr algn="l" indent="0" marL="0">
+              <a:lnSpc>
+                <a:spcPct val="92000"/>
+              </a:lnSpc>
+              <a:buNone/>
+            </a:pPr>
+            <a:r>
+              <a:rPr lang="en-US" sz="1100" b="1" dirty="0">
+                <a:solidFill>
+                  <a:srgbClr val="14302A"/>
+                </a:solidFill>
+              </a:rPr>
+              <a:t>Compose</a:t>
+            </a:r>
+            <a:endParaRPr lang="en-US" sz="1100" dirty="0"/>
+          </a:p>
+          <a:p>
+            <a:pPr algn="l" indent="0" marL="0">
+              <a:lnSpc>
+                <a:spcPct val="92000"/>
+              </a:lnSpc>
+              <a:buNone/>
+            </a:pPr>
+            <a:r>
+              <a:rPr lang="en-US" sz="1000" dirty="0">
+                <a:solidFill>
+                  <a:srgbClr val="5C6B64"/>
+                </a:solidFill>
+              </a:rPr>
+              <a:t>Python 87.5% · else narrate</a:t>
+            </a:r>
+            <a:endParaRPr lang="en-US" sz="1100" dirty="0"/>
+          </a:p>
+        </p:txBody>
+      </p:sp>
+      <p:sp>
+        <p:nvSpPr>
+          <p:cNvPr id="15" name="Shape 13"/>
+          <p:cNvSpPr/>
+          <p:nvPr/>
+        </p:nvSpPr>
+        <p:spPr>
+          <a:xfrm>
+            <a:off x="7905293" y="1225296"/>
+            <a:ext cx="201168" cy="201168"/>
+          </a:xfrm>
+          <a:prstGeom prst="rightArrow">
+            <a:avLst/>
+          </a:prstGeom>
+          <a:solidFill>
+            <a:srgbClr val="76B900"/>
+          </a:solidFill>
+          <a:ln w="12700">
+            <a:solidFill>
+              <a:srgbClr val="76B900"/>
+            </a:solidFill>
+            <a:prstDash val="solid"/>
+          </a:ln>
+        </p:spPr>
+      </p:sp>
+      <p:sp>
+        <p:nvSpPr>
+          <p:cNvPr id="16" name="card-Rails"/>
+          <p:cNvSpPr/>
+          <p:nvPr/>
+        </p:nvSpPr>
+        <p:spPr>
+          <a:xfrm>
+            <a:off x="8143037" y="1024128"/>
+            <a:ext cx="1635709" cy="658368"/>
+          </a:xfrm>
+          <a:prstGeom prst="rect">
+            <a:avLst/>
+          </a:prstGeom>
+          <a:solidFill>
+            <a:srgbClr val="FFFFFF"/>
+          </a:solidFill>
+          <a:ln w="22225">
+            <a:solidFill>
+              <a:srgbClr val="76B900"/>
+            </a:solidFill>
+            <a:prstDash val="solid"/>
+          </a:ln>
+        </p:spPr>
+      </p:sp>
+      <p:sp>
+        <p:nvSpPr>
+          <p:cNvPr id="17" name="Text 15"/>
+          <p:cNvSpPr txBox="1"/>
+          <p:nvPr/>
+        </p:nvSpPr>
+        <p:spPr>
+          <a:xfrm>
+            <a:off x="8207045" y="1060704"/>
+            <a:ext cx="1507693" cy="585216"/>
+          </a:xfrm>
+          <a:prstGeom prst="rect">
+            <a:avLst/>
+          </a:prstGeom>
+          <a:noFill/>
+          <a:ln/>
+        </p:spPr>
+        <p:txBody>
+          <a:bodyPr wrap="square" lIns="0" tIns="0" rIns="0" bIns="0" rtlCol="0" anchor="t"/>
+          <a:lstStyle/>
+          <a:p>
+            <a:pPr algn="l" indent="0" marL="0">
+              <a:lnSpc>
+                <a:spcPct val="92000"/>
+              </a:lnSpc>
+              <a:buNone/>
+            </a:pPr>
+            <a:r>
+              <a:rPr lang="en-US" sz="1100" b="1" dirty="0">
+                <a:solidFill>
+                  <a:srgbClr val="14302A"/>
+                </a:solidFill>
+              </a:rPr>
+              <a:t>Rails</a:t>
+            </a:r>
+            <a:endParaRPr lang="en-US" sz="1100" dirty="0"/>
+          </a:p>
+          <a:p>
+            <a:pPr algn="l" indent="0" marL="0">
+              <a:lnSpc>
+                <a:spcPct val="92000"/>
+              </a:lnSpc>
+              <a:buNone/>
+            </a:pPr>
+            <a:r>
+              <a:rPr lang="en-US" sz="1000" dirty="0">
+                <a:solidFill>
+                  <a:srgbClr val="5C6B64"/>
+                </a:solidFill>
+              </a:rPr>
+              <a:t>grounding + output</a:t>
+            </a:r>
+            <a:endParaRPr lang="en-US" sz="1100" dirty="0"/>
+          </a:p>
+        </p:txBody>
+      </p:sp>
+      <p:sp>
+        <p:nvSpPr>
+          <p:cNvPr id="18" name="Shape 16"/>
+          <p:cNvSpPr/>
+          <p:nvPr/>
+        </p:nvSpPr>
+        <p:spPr>
+          <a:xfrm>
+            <a:off x="9815322" y="1225296"/>
+            <a:ext cx="201168" cy="201168"/>
+          </a:xfrm>
+          <a:prstGeom prst="rightArrow">
+            <a:avLst/>
+          </a:prstGeom>
+          <a:solidFill>
+            <a:srgbClr val="76B900"/>
+          </a:solidFill>
+          <a:ln w="12700">
+            <a:solidFill>
+              <a:srgbClr val="76B900"/>
+            </a:solidFill>
+            <a:prstDash val="solid"/>
+          </a:ln>
+        </p:spPr>
+      </p:sp>
+      <p:sp>
+        <p:nvSpPr>
+          <p:cNvPr id="19" name="card-Answer"/>
+          <p:cNvSpPr/>
+          <p:nvPr/>
+        </p:nvSpPr>
+        <p:spPr>
+          <a:xfrm>
+            <a:off x="10053066" y="1024128"/>
+            <a:ext cx="1635709" cy="658368"/>
+          </a:xfrm>
+          <a:prstGeom prst="rect">
+            <a:avLst/>
+          </a:prstGeom>
+          <a:solidFill>
+            <a:srgbClr val="5B8C3A"/>
+          </a:solidFill>
+          <a:ln w="19050">
+            <a:solidFill>
+              <a:srgbClr val="446B29"/>
+            </a:solidFill>
+            <a:prstDash val="solid"/>
+          </a:ln>
+        </p:spPr>
+      </p:sp>
+      <p:sp>
+        <p:nvSpPr>
+          <p:cNvPr id="20" name="Text 18"/>
+          <p:cNvSpPr txBox="1"/>
+          <p:nvPr/>
+        </p:nvSpPr>
+        <p:spPr>
+          <a:xfrm>
+            <a:off x="10117074" y="1060704"/>
+            <a:ext cx="1507693" cy="585216"/>
+          </a:xfrm>
+          <a:prstGeom prst="rect">
+            <a:avLst/>
+          </a:prstGeom>
+          <a:noFill/>
+          <a:ln/>
+        </p:spPr>
+        <p:txBody>
+          <a:bodyPr wrap="square" lIns="0" tIns="0" rIns="0" bIns="0" rtlCol="0" anchor="t"/>
+          <a:lstStyle/>
+          <a:p>
+            <a:pPr algn="l" indent="0" marL="0">
+              <a:lnSpc>
+                <a:spcPct val="92000"/>
+              </a:lnSpc>
+              <a:buNone/>
+            </a:pPr>
+            <a:r>
+              <a:rPr lang="en-US" sz="1100" b="1" dirty="0">
+                <a:solidFill>
+                  <a:srgbClr val="FFFFFF"/>
+                </a:solidFill>
+              </a:rPr>
+              <a:t>Answer</a:t>
+            </a:r>
+            <a:endParaRPr lang="en-US" sz="1100" dirty="0"/>
+          </a:p>
+          <a:p>
+            <a:pPr algn="l" indent="0" marL="0">
+              <a:lnSpc>
+                <a:spcPct val="92000"/>
+              </a:lnSpc>
+              <a:buNone/>
+            </a:pPr>
+            <a:r>
+              <a:rPr lang="en-US" sz="1000" dirty="0">
+                <a:solidFill>
+                  <a:srgbClr val="DCE8CF"/>
+                </a:solidFill>
+              </a:rPr>
+              <a:t>every figure cited</a:t>
+            </a:r>
+            <a:endParaRPr lang="en-US" sz="1100" dirty="0"/>
+          </a:p>
+        </p:txBody>
+      </p:sp>
+      <p:sp>
+        <p:nvSpPr>
+          <p:cNvPr id="21" name="frame-05-app-manager-a"/>
+          <p:cNvSpPr/>
+          <p:nvPr/>
+        </p:nvSpPr>
+        <p:spPr>
+          <a:xfrm>
+            <a:off x="489551" y="1956816"/>
+            <a:ext cx="2815657" cy="2121408"/>
+          </a:xfrm>
+          <a:prstGeom prst="rect">
+            <a:avLst/>
+          </a:prstGeom>
+          <a:solidFill>
+            <a:srgbClr val="FFFFFF"/>
+          </a:solidFill>
+          <a:ln w="12700">
+            <a:solidFill>
+              <a:srgbClr val="C3CCC0"/>
+            </a:solidFill>
+            <a:prstDash val="solid"/>
+          </a:ln>
+        </p:spPr>
+      </p:sp>
+      <p:pic>
+        <p:nvPicPr>
+          <p:cNvPr id="22" name="Image 0" descr="docs/screenshots/05-app-manager-assistant.jpg">    </p:cNvPr>
+          <p:cNvPicPr>
+            <a:picLocks noChangeAspect="1"/>
+          </p:cNvPicPr>
+          <p:nvPr/>
+        </p:nvPicPr>
+        <p:blipFill>
+          <a:blip r:embed="rId1"/>
+          <a:stretch>
+            <a:fillRect/>
+          </a:stretch>
+        </p:blipFill>
+        <p:spPr>
+          <a:xfrm>
+            <a:off x="507839" y="1975104"/>
+            <a:ext cx="2779081" cy="2084832"/>
+          </a:xfrm>
+          <a:prstGeom prst="rect">
+            <a:avLst/>
+          </a:prstGeom>
+        </p:spPr>
+      </p:pic>
+      <p:sp>
+        <p:nvSpPr>
+          <p:cNvPr id="23" name="Text 20"/>
+          <p:cNvSpPr txBox="1"/>
+          <p:nvPr/>
+        </p:nvSpPr>
+        <p:spPr>
+          <a:xfrm>
+            <a:off x="3438144" y="2011680"/>
+            <a:ext cx="2520544" cy="274320"/>
+          </a:xfrm>
+          <a:prstGeom prst="rect">
+            <a:avLst/>
+          </a:prstGeom>
+          <a:noFill/>
+          <a:ln/>
+        </p:spPr>
+        <p:txBody>
+          <a:bodyPr wrap="square" lIns="0" tIns="0" rIns="0" bIns="0" rtlCol="0" anchor="ctr"/>
+          <a:lstStyle/>
+          <a:p>
+            <a:pPr indent="0" marL="0">
+              <a:buNone/>
+            </a:pPr>
+            <a:r>
+              <a:rPr lang="en-US" sz="1200" b="1" dirty="0">
+                <a:solidFill>
+                  <a:srgbClr val="14302A"/>
+                </a:solidFill>
+                <a:latin typeface="Arial" pitchFamily="34" charset="0"/>
+                <a:ea typeface="Arial" pitchFamily="34" charset="-122"/>
+                <a:cs typeface="Arial" pitchFamily="34" charset="-120"/>
+              </a:rPr>
+              <a:t>Manager Assistant</a:t>
+            </a:r>
+            <a:endParaRPr lang="en-US" sz="1200" dirty="0"/>
+          </a:p>
+        </p:txBody>
+      </p:sp>
+      <p:sp>
+        <p:nvSpPr>
+          <p:cNvPr id="24" name="Text 21"/>
+          <p:cNvSpPr txBox="1"/>
+          <p:nvPr/>
+        </p:nvSpPr>
+        <p:spPr>
+          <a:xfrm>
+            <a:off x="3438144" y="2304288"/>
+            <a:ext cx="2520544" cy="1719072"/>
+          </a:xfrm>
+          <a:prstGeom prst="rect">
+            <a:avLst/>
+          </a:prstGeom>
+          <a:noFill/>
+          <a:ln/>
+        </p:spPr>
+        <p:txBody>
+          <a:bodyPr wrap="square" lIns="0" tIns="0" rIns="0" bIns="0" rtlCol="0" anchor="ctr"/>
+          <a:lstStyle/>
+          <a:p>
+            <a:pPr marL="342900" indent="-342900">
+              <a:lnSpc>
+                <a:spcPct val="100000"/>
+              </a:lnSpc>
+              <a:spcAft>
+                <a:spcPts val="300"/>
+              </a:spcAft>
+              <a:buSzPct val="100000"/>
+              <a:buChar char="•"/>
+            </a:pPr>
+            <a:r>
+              <a:rPr lang="en-US" sz="1000" dirty="0">
+                <a:solidFill>
+                  <a:srgbClr val="5C6B64"/>
+                </a:solidFill>
+              </a:rPr>
+              <a:t>Asks in plain English; the router picks a typed tool</a:t>
+            </a:r>
+            <a:endParaRPr lang="en-US" sz="1000" dirty="0"/>
+          </a:p>
+          <a:p>
+            <a:pPr marL="342900" indent="-342900">
+              <a:lnSpc>
+                <a:spcPct val="100000"/>
+              </a:lnSpc>
+              <a:spcAft>
+                <a:spcPts val="300"/>
+              </a:spcAft>
+              <a:buSzPct val="100000"/>
+              <a:buChar char="•"/>
+            </a:pPr>
+            <a:r>
+              <a:rPr lang="en-US" sz="1000" dirty="0">
+                <a:solidFill>
+                  <a:srgbClr val="5C6B64"/>
+                </a:solidFill>
+              </a:rPr>
+              <a:t>Answer cites every record it used</a:t>
+            </a:r>
+            <a:endParaRPr lang="en-US" sz="1000" dirty="0"/>
+          </a:p>
+          <a:p>
+            <a:pPr marL="342900" indent="-342900">
+              <a:lnSpc>
+                <a:spcPct val="100000"/>
+              </a:lnSpc>
+              <a:spcAft>
+                <a:spcPts val="300"/>
+              </a:spcAft>
+              <a:buSzPct val="100000"/>
+              <a:buChar char="•"/>
+            </a:pPr>
+            <a:r>
+              <a:rPr lang="en-US" sz="1000" dirty="0">
+                <a:solidFill>
+                  <a:srgbClr val="5C6B64"/>
+                </a:solidFill>
+              </a:rPr>
+              <a:t>8 of 11 questions need no model call at all</a:t>
+            </a:r>
+            <a:endParaRPr lang="en-US" sz="1000" dirty="0"/>
+          </a:p>
+        </p:txBody>
+      </p:sp>
+      <p:sp>
+        <p:nvSpPr>
+          <p:cNvPr id="25" name="frame-09-grafana-dashb"/>
+          <p:cNvSpPr/>
+          <p:nvPr/>
+        </p:nvSpPr>
+        <p:spPr>
+          <a:xfrm>
+            <a:off x="6214720" y="2040840"/>
+            <a:ext cx="2825496" cy="1953360"/>
+          </a:xfrm>
+          <a:prstGeom prst="rect">
+            <a:avLst/>
+          </a:prstGeom>
+          <a:solidFill>
+            <a:srgbClr val="FFFFFF"/>
+          </a:solidFill>
+          <a:ln w="12700">
+            <a:solidFill>
+              <a:srgbClr val="C3CCC0"/>
+            </a:solidFill>
+            <a:prstDash val="solid"/>
+          </a:ln>
+        </p:spPr>
+      </p:sp>
+      <p:pic>
+        <p:nvPicPr>
+          <p:cNvPr id="26" name="Image 1" descr="docs/screenshots/09-grafana-dashboard.jpg">    </p:cNvPr>
+          <p:cNvPicPr>
+            <a:picLocks noChangeAspect="1"/>
+          </p:cNvPicPr>
+          <p:nvPr/>
+        </p:nvPicPr>
+        <p:blipFill>
+          <a:blip r:embed="rId2"/>
+          <a:stretch>
+            <a:fillRect/>
+          </a:stretch>
+        </p:blipFill>
+        <p:spPr>
+          <a:xfrm>
+            <a:off x="6233008" y="2059128"/>
+            <a:ext cx="2788920" cy="1916784"/>
+          </a:xfrm>
+          <a:prstGeom prst="rect">
+            <a:avLst/>
+          </a:prstGeom>
+        </p:spPr>
+      </p:pic>
+      <p:sp>
+        <p:nvSpPr>
+          <p:cNvPr id="27" name="Text 23"/>
+          <p:cNvSpPr txBox="1"/>
+          <p:nvPr/>
+        </p:nvSpPr>
+        <p:spPr>
+          <a:xfrm>
+            <a:off x="9168232" y="2011680"/>
+            <a:ext cx="2520544" cy="274320"/>
+          </a:xfrm>
+          <a:prstGeom prst="rect">
+            <a:avLst/>
+          </a:prstGeom>
+          <a:noFill/>
+          <a:ln/>
+        </p:spPr>
+        <p:txBody>
+          <a:bodyPr wrap="square" lIns="0" tIns="0" rIns="0" bIns="0" rtlCol="0" anchor="ctr"/>
+          <a:lstStyle/>
+          <a:p>
+            <a:pPr indent="0" marL="0">
+              <a:buNone/>
+            </a:pPr>
+            <a:r>
+              <a:rPr lang="en-US" sz="1200" b="1" dirty="0">
+                <a:solidFill>
+                  <a:srgbClr val="14302A"/>
+                </a:solidFill>
+                <a:latin typeface="Arial" pitchFamily="34" charset="0"/>
+                <a:ea typeface="Arial" pitchFamily="34" charset="-122"/>
+                <a:cs typeface="Arial" pitchFamily="34" charset="-120"/>
+              </a:rPr>
+              <a:t>Grafana — the claim, measured</a:t>
+            </a:r>
+            <a:endParaRPr lang="en-US" sz="1200" dirty="0"/>
+          </a:p>
+        </p:txBody>
+      </p:sp>
+      <p:sp>
+        <p:nvSpPr>
+          <p:cNvPr id="28" name="Text 24"/>
+          <p:cNvSpPr txBox="1"/>
+          <p:nvPr/>
+        </p:nvSpPr>
+        <p:spPr>
+          <a:xfrm>
+            <a:off x="9168232" y="2304288"/>
+            <a:ext cx="2520544" cy="1719072"/>
+          </a:xfrm>
+          <a:prstGeom prst="rect">
+            <a:avLst/>
+          </a:prstGeom>
+          <a:noFill/>
+          <a:ln/>
+        </p:spPr>
+        <p:txBody>
+          <a:bodyPr wrap="square" lIns="0" tIns="0" rIns="0" bIns="0" rtlCol="0" anchor="ctr"/>
+          <a:lstStyle/>
+          <a:p>
+            <a:pPr marL="342900" indent="-342900">
+              <a:lnSpc>
+                <a:spcPct val="100000"/>
+              </a:lnSpc>
+              <a:spcAft>
+                <a:spcPts val="300"/>
+              </a:spcAft>
+              <a:buSzPct val="100000"/>
+              <a:buChar char="•"/>
+            </a:pPr>
+            <a:r>
+              <a:rPr lang="en-US" sz="1000" dirty="0">
+                <a:solidFill>
+                  <a:srgbClr val="5C6B64"/>
+                </a:solidFill>
+              </a:rPr>
+              <a:t>Answers composed in Python: 87.5%</a:t>
+            </a:r>
+            <a:endParaRPr lang="en-US" sz="1000" dirty="0"/>
+          </a:p>
+          <a:p>
+            <a:pPr marL="342900" indent="-342900">
+              <a:lnSpc>
+                <a:spcPct val="100000"/>
+              </a:lnSpc>
+              <a:spcAft>
+                <a:spcPts val="300"/>
+              </a:spcAft>
+              <a:buSzPct val="100000"/>
+              <a:buChar char="•"/>
+            </a:pPr>
+            <a:r>
+              <a:rPr lang="en-US" sz="1000" dirty="0">
+                <a:solidFill>
+                  <a:srgbClr val="5C6B64"/>
+                </a:solidFill>
+              </a:rPr>
+              <a:t>Latency split by path: python ~0s, llm ~4-5s</a:t>
+            </a:r>
+            <a:endParaRPr lang="en-US" sz="1000" dirty="0"/>
+          </a:p>
+          <a:p>
+            <a:pPr marL="342900" indent="-342900">
+              <a:lnSpc>
+                <a:spcPct val="100000"/>
+              </a:lnSpc>
+              <a:spcAft>
+                <a:spcPts val="300"/>
+              </a:spcAft>
+              <a:buSzPct val="100000"/>
+              <a:buChar char="•"/>
+            </a:pPr>
+            <a:r>
+              <a:rPr lang="en-US" sz="1000" dirty="0">
+                <a:solidFill>
+                  <a:srgbClr val="5C6B64"/>
+                </a:solidFill>
+              </a:rPr>
+              <a:t>GPU to 100% on the semantic queries only</a:t>
+            </a:r>
+            <a:endParaRPr lang="en-US" sz="1000" dirty="0"/>
+          </a:p>
+        </p:txBody>
+      </p:sp>
+      <p:sp>
+        <p:nvSpPr>
+          <p:cNvPr id="29" name="frame-08-prometheus-to"/>
+          <p:cNvSpPr/>
+          <p:nvPr/>
+        </p:nvSpPr>
+        <p:spPr>
+          <a:xfrm>
+            <a:off x="484632" y="4326840"/>
+            <a:ext cx="2825496" cy="1953360"/>
+          </a:xfrm>
+          <a:prstGeom prst="rect">
+            <a:avLst/>
+          </a:prstGeom>
+          <a:solidFill>
+            <a:srgbClr val="FFFFFF"/>
+          </a:solidFill>
+          <a:ln w="12700">
+            <a:solidFill>
+              <a:srgbClr val="C3CCC0"/>
+            </a:solidFill>
+            <a:prstDash val="solid"/>
+          </a:ln>
+        </p:spPr>
+      </p:sp>
+      <p:pic>
+        <p:nvPicPr>
+          <p:cNvPr id="30" name="Image 2" descr="docs/screenshots/08-prometheus-tool-calls.jpg">    </p:cNvPr>
+          <p:cNvPicPr>
+            <a:picLocks noChangeAspect="1"/>
+          </p:cNvPicPr>
+          <p:nvPr/>
+        </p:nvPicPr>
+        <p:blipFill>
+          <a:blip r:embed="rId3"/>
+          <a:stretch>
+            <a:fillRect/>
+          </a:stretch>
+        </p:blipFill>
+        <p:spPr>
+          <a:xfrm>
+            <a:off x="502920" y="4345128"/>
+            <a:ext cx="2788920" cy="1916784"/>
+          </a:xfrm>
+          <a:prstGeom prst="rect">
+            <a:avLst/>
+          </a:prstGeom>
+        </p:spPr>
+      </p:pic>
+      <p:sp>
+        <p:nvSpPr>
+          <p:cNvPr id="31" name="Text 26"/>
+          <p:cNvSpPr txBox="1"/>
+          <p:nvPr/>
+        </p:nvSpPr>
+        <p:spPr>
+          <a:xfrm>
+            <a:off x="3438144" y="4297680"/>
+            <a:ext cx="2520544" cy="274320"/>
+          </a:xfrm>
+          <a:prstGeom prst="rect">
+            <a:avLst/>
+          </a:prstGeom>
+          <a:noFill/>
+          <a:ln/>
+        </p:spPr>
+        <p:txBody>
+          <a:bodyPr wrap="square" lIns="0" tIns="0" rIns="0" bIns="0" rtlCol="0" anchor="ctr"/>
+          <a:lstStyle/>
+          <a:p>
+            <a:pPr indent="0" marL="0">
+              <a:buNone/>
+            </a:pPr>
+            <a:r>
+              <a:rPr lang="en-US" sz="1200" b="1" dirty="0">
+                <a:solidFill>
+                  <a:srgbClr val="14302A"/>
+                </a:solidFill>
+                <a:latin typeface="Arial" pitchFamily="34" charset="0"/>
+                <a:ea typeface="Arial" pitchFamily="34" charset="-122"/>
+                <a:cs typeface="Arial" pitchFamily="34" charset="-120"/>
+              </a:rPr>
+              <a:t>Prometheus — which tools ran</a:t>
+            </a:r>
+            <a:endParaRPr lang="en-US" sz="1200" dirty="0"/>
+          </a:p>
+        </p:txBody>
+      </p:sp>
+      <p:sp>
+        <p:nvSpPr>
+          <p:cNvPr id="32" name="Text 27"/>
+          <p:cNvSpPr txBox="1"/>
+          <p:nvPr/>
+        </p:nvSpPr>
+        <p:spPr>
+          <a:xfrm>
+            <a:off x="3438144" y="4590288"/>
+            <a:ext cx="2520544" cy="1719072"/>
+          </a:xfrm>
+          <a:prstGeom prst="rect">
+            <a:avLst/>
+          </a:prstGeom>
+          <a:noFill/>
+          <a:ln/>
+        </p:spPr>
+        <p:txBody>
+          <a:bodyPr wrap="square" lIns="0" tIns="0" rIns="0" bIns="0" rtlCol="0" anchor="ctr"/>
+          <a:lstStyle/>
+          <a:p>
+            <a:pPr marL="342900" indent="-342900">
+              <a:lnSpc>
+                <a:spcPct val="100000"/>
+              </a:lnSpc>
+              <a:spcAft>
+                <a:spcPts val="300"/>
+              </a:spcAft>
+              <a:buSzPct val="100000"/>
+              <a:buChar char="•"/>
+            </a:pPr>
+            <a:r>
+              <a:rPr lang="en-US" sz="1000" dirty="0">
+                <a:solidFill>
+                  <a:srgbClr val="5C6B64"/>
+                </a:solidFill>
+              </a:rPr>
+              <a:t>One asoia_tool_calls_total series per tool called</a:t>
+            </a:r>
+            <a:endParaRPr lang="en-US" sz="1000" dirty="0"/>
+          </a:p>
+          <a:p>
+            <a:pPr marL="342900" indent="-342900">
+              <a:lnSpc>
+                <a:spcPct val="100000"/>
+              </a:lnSpc>
+              <a:spcAft>
+                <a:spcPts val="300"/>
+              </a:spcAft>
+              <a:buSzPct val="100000"/>
+              <a:buChar char="•"/>
+            </a:pPr>
+            <a:r>
+              <a:rPr lang="en-US" sz="1000" dirty="0">
+                <a:solidFill>
+                  <a:srgbClr val="5C6B64"/>
+                </a:solidFill>
+              </a:rPr>
+              <a:t>Counters are per-process: traffic must go through</a:t>
+            </a:r>
+            <a:endParaRPr lang="en-US" sz="1000" dirty="0"/>
+          </a:p>
+          <a:p>
+            <a:pPr marL="342900" indent="-342900">
+              <a:lnSpc>
+                <a:spcPct val="100000"/>
+              </a:lnSpc>
+              <a:spcAft>
+                <a:spcPts val="300"/>
+              </a:spcAft>
+              <a:buSzPct val="100000"/>
+              <a:buChar char="•"/>
+            </a:pPr>
+            <a:r>
+              <a:rPr lang="en-US" sz="1000" dirty="0">
+                <a:solidFill>
+                  <a:srgbClr val="5C6B64"/>
+                </a:solidFill>
+              </a:rPr>
+              <a:t>the API on :8080, not a standalone script</a:t>
+            </a:r>
+            <a:endParaRPr lang="en-US" sz="1000" dirty="0"/>
+          </a:p>
+        </p:txBody>
+      </p:sp>
+      <p:sp>
+        <p:nvSpPr>
+          <p:cNvPr id="33" name="frame-11-attu-collecti"/>
+          <p:cNvSpPr/>
+          <p:nvPr/>
+        </p:nvSpPr>
+        <p:spPr>
+          <a:xfrm>
+            <a:off x="6214720" y="4326840"/>
+            <a:ext cx="2825496" cy="1953360"/>
+          </a:xfrm>
+          <a:prstGeom prst="rect">
+            <a:avLst/>
+          </a:prstGeom>
+          <a:solidFill>
+            <a:srgbClr val="FFFFFF"/>
+          </a:solidFill>
+          <a:ln w="12700">
+            <a:solidFill>
+              <a:srgbClr val="C3CCC0"/>
+            </a:solidFill>
+            <a:prstDash val="solid"/>
+          </a:ln>
+        </p:spPr>
+      </p:sp>
+      <p:pic>
+        <p:nvPicPr>
+          <p:cNvPr id="34" name="Image 3" descr="docs/screenshots/11-attu-collection-1690.jpg">    </p:cNvPr>
+          <p:cNvPicPr>
+            <a:picLocks noChangeAspect="1"/>
+          </p:cNvPicPr>
+          <p:nvPr/>
+        </p:nvPicPr>
+        <p:blipFill>
+          <a:blip r:embed="rId4"/>
+          <a:stretch>
+            <a:fillRect/>
+          </a:stretch>
+        </p:blipFill>
+        <p:spPr>
+          <a:xfrm>
+            <a:off x="6233008" y="4345128"/>
+            <a:ext cx="2788920" cy="1916784"/>
+          </a:xfrm>
+          <a:prstGeom prst="rect">
+            <a:avLst/>
+          </a:prstGeom>
+        </p:spPr>
+      </p:pic>
+      <p:sp>
+        <p:nvSpPr>
+          <p:cNvPr id="35" name="Text 29"/>
+          <p:cNvSpPr txBox="1"/>
+          <p:nvPr/>
+        </p:nvSpPr>
+        <p:spPr>
+          <a:xfrm>
+            <a:off x="9168232" y="4297680"/>
+            <a:ext cx="2520544" cy="274320"/>
+          </a:xfrm>
+          <a:prstGeom prst="rect">
+            <a:avLst/>
+          </a:prstGeom>
+          <a:noFill/>
+          <a:ln/>
+        </p:spPr>
+        <p:txBody>
+          <a:bodyPr wrap="square" lIns="0" tIns="0" rIns="0" bIns="0" rtlCol="0" anchor="ctr"/>
+          <a:lstStyle/>
+          <a:p>
+            <a:pPr indent="0" marL="0">
+              <a:buNone/>
+            </a:pPr>
+            <a:r>
+              <a:rPr lang="en-US" sz="1200" b="1" dirty="0">
+                <a:solidFill>
+                  <a:srgbClr val="14302A"/>
+                </a:solidFill>
+                <a:latin typeface="Arial" pitchFamily="34" charset="0"/>
+                <a:ea typeface="Arial" pitchFamily="34" charset="-122"/>
+                <a:cs typeface="Arial" pitchFamily="34" charset="-120"/>
+              </a:rPr>
+              <a:t>Attu — the vector store</a:t>
+            </a:r>
+            <a:endParaRPr lang="en-US" sz="1200" dirty="0"/>
+          </a:p>
+        </p:txBody>
+      </p:sp>
+      <p:sp>
+        <p:nvSpPr>
+          <p:cNvPr id="36" name="Text 30"/>
+          <p:cNvSpPr txBox="1"/>
+          <p:nvPr/>
+        </p:nvSpPr>
+        <p:spPr>
+          <a:xfrm>
+            <a:off x="9168232" y="4590288"/>
+            <a:ext cx="2520544" cy="1719072"/>
+          </a:xfrm>
+          <a:prstGeom prst="rect">
+            <a:avLst/>
+          </a:prstGeom>
+          <a:noFill/>
+          <a:ln/>
+        </p:spPr>
+        <p:txBody>
+          <a:bodyPr wrap="square" lIns="0" tIns="0" rIns="0" bIns="0" rtlCol="0" anchor="ctr"/>
+          <a:lstStyle/>
+          <a:p>
+            <a:pPr marL="342900" indent="-342900">
+              <a:lnSpc>
+                <a:spcPct val="100000"/>
+              </a:lnSpc>
+              <a:spcAft>
+                <a:spcPts val="300"/>
+              </a:spcAft>
+              <a:buSzPct val="100000"/>
+              <a:buChar char="•"/>
+            </a:pPr>
+            <a:r>
+              <a:rPr lang="en-US" sz="1000" dirty="0">
+                <a:solidFill>
+                  <a:srgbClr val="5C6B64"/>
+                </a:solidFill>
+              </a:rPr>
+              <a:t>updates collection, 1,690 entities</a:t>
+            </a:r>
+            <a:endParaRPr lang="en-US" sz="1000" dirty="0"/>
+          </a:p>
+          <a:p>
+            <a:pPr marL="342900" indent="-342900">
+              <a:lnSpc>
+                <a:spcPct val="100000"/>
+              </a:lnSpc>
+              <a:spcAft>
+                <a:spcPts val="300"/>
+              </a:spcAft>
+              <a:buSzPct val="100000"/>
+              <a:buChar char="•"/>
+            </a:pPr>
+            <a:r>
+              <a:rPr lang="en-US" sz="1000" dirty="0">
+                <a:solidFill>
+                  <a:srgbClr val="5C6B64"/>
+                </a:solidFill>
+              </a:rPr>
+              <a:t>Built by nv-embedqa-e5-v5 at 1024 dimensions</a:t>
+            </a:r>
+            <a:endParaRPr lang="en-US" sz="1000" dirty="0"/>
+          </a:p>
+          <a:p>
+            <a:pPr marL="342900" indent="-342900">
+              <a:lnSpc>
+                <a:spcPct val="100000"/>
+              </a:lnSpc>
+              <a:spcAft>
+                <a:spcPts val="300"/>
+              </a:spcAft>
+              <a:buSzPct val="100000"/>
+              <a:buChar char="•"/>
+            </a:pPr>
+            <a:r>
+              <a:rPr lang="en-US" sz="1000" dirty="0">
+                <a:solidFill>
+                  <a:srgbClr val="5C6B64"/>
+                </a:solidFill>
+              </a:rPr>
+              <a:t>Rebuilt whenever the embedder changes width</a:t>
+            </a:r>
+            <a:endParaRPr lang="en-US" sz="1000" dirty="0"/>
+          </a:p>
+        </p:txBody>
+      </p:sp>
+    </p:spTree>
+  </p:cSld>
+  <p:clrMapOvr>
+    <a:masterClrMapping/>
+  </p:clrMapOvr>
+</p:sld>
+</file>
+
+<file path=ppt/slides/slide9.xml><?xml version="1.0" encoding="utf-8"?>
+<p:sld xmlns:a="http://schemas.openxmlformats.org/drawingml/2006/main" xmlns:r="http://schemas.openxmlformats.org/officeDocument/2006/relationships" xmlns:p="http://schemas.openxmlformats.org/presentationml/2006/main">
+  <p:cSld name="Slide 9">
+    <p:spTree>
+      <p:nvGrpSpPr>
+        <p:cNvPr id="1" name=""/>
+        <p:cNvGrpSpPr/>
+        <p:nvPr/>
+      </p:nvGrpSpPr>
+      <p:grpSpPr>
+        <a:xfrm>
+          <a:off x="0" y="0"/>
+          <a:ext cx="0" cy="0"/>
+          <a:chOff x="0" y="0"/>
+          <a:chExt cx="0" cy="0"/>
+        </a:xfrm>
+      </p:grpSpPr>
+      <p:sp>
+        <p:nvSpPr>
+          <p:cNvPr id="2" name="Text 0"/>
+          <p:cNvSpPr txBox="1"/>
+          <p:nvPr/>
+        </p:nvSpPr>
+        <p:spPr>
+          <a:xfrm>
+            <a:off x="502920" y="237744"/>
+            <a:ext cx="11185855" cy="402336"/>
+          </a:xfrm>
+          <a:prstGeom prst="rect">
+            <a:avLst/>
+          </a:prstGeom>
+          <a:noFill/>
+          <a:ln/>
+        </p:spPr>
+        <p:txBody>
+          <a:bodyPr wrap="square" lIns="0" tIns="0" rIns="0" bIns="0" rtlCol="0" anchor="ctr"/>
+          <a:lstStyle/>
+          <a:p>
+            <a:pPr indent="0" marL="0">
+              <a:buNone/>
+            </a:pPr>
+            <a:r>
+              <a:rPr lang="en-US" sz="2600" b="1" dirty="0">
+                <a:solidFill>
+                  <a:srgbClr val="14302A"/>
+                </a:solidFill>
+                <a:latin typeface="Arial" pitchFamily="34" charset="0"/>
+                <a:ea typeface="Arial" pitchFamily="34" charset="-122"/>
+                <a:cs typeface="Arial" pitchFamily="34" charset="-120"/>
+              </a:rPr>
+              <a:t>The rest of the surface</a:t>
+            </a:r>
+            <a:endParaRPr lang="en-US" sz="2600" dirty="0"/>
+          </a:p>
+        </p:txBody>
+      </p:sp>
+      <p:sp>
+        <p:nvSpPr>
+          <p:cNvPr id="3" name="Text 1"/>
+          <p:cNvSpPr txBox="1"/>
+          <p:nvPr/>
+        </p:nvSpPr>
+        <p:spPr>
+          <a:xfrm>
+            <a:off x="502920" y="676656"/>
+            <a:ext cx="11185855" cy="310896"/>
+          </a:xfrm>
+          <a:prstGeom prst="rect">
+            <a:avLst/>
+          </a:prstGeom>
+          <a:noFill/>
+          <a:ln/>
+        </p:spPr>
+        <p:txBody>
+          <a:bodyPr wrap="square" lIns="0" tIns="0" rIns="0" bIns="0" rtlCol="0" anchor="ctr"/>
+          <a:lstStyle/>
+          <a:p>
+            <a:pPr indent="0" marL="0">
+              <a:buNone/>
+            </a:pPr>
+            <a:r>
+              <a:rPr lang="en-US" sz="1150" dirty="0">
+                <a:solidFill>
+                  <a:srgbClr val="5C6B64"/>
+                </a:solidFill>
+              </a:rPr>
+              <a:t>Five tabs a service advisor actually uses, and the two store consoles behind them. The agent's UI shows no vector internals — that is an operator's view, and it lives in Attu and sqlite-web.</a:t>
+            </a:r>
+            <a:endParaRPr lang="en-US" sz="1150" dirty="0"/>
+          </a:p>
+        </p:txBody>
+      </p:sp>
+      <p:sp>
+        <p:nvSpPr>
+          <p:cNvPr id="4" name="frame-01-app-dashboard"/>
+          <p:cNvSpPr/>
+          <p:nvPr/>
+        </p:nvSpPr>
+        <p:spPr>
+          <a:xfrm>
+            <a:off x="886023" y="1261872"/>
+            <a:ext cx="2803916" cy="1938528"/>
+          </a:xfrm>
+          <a:prstGeom prst="rect">
+            <a:avLst/>
+          </a:prstGeom>
+          <a:solidFill>
+            <a:srgbClr val="FFFFFF"/>
+          </a:solidFill>
+          <a:ln w="12700">
+            <a:solidFill>
+              <a:srgbClr val="C3CCC0"/>
+            </a:solidFill>
+            <a:prstDash val="solid"/>
+          </a:ln>
+        </p:spPr>
+      </p:sp>
+      <p:pic>
+        <p:nvPicPr>
+          <p:cNvPr id="5" name="Image 0" descr="docs/screenshots/01-app-dashboard.jpg">    </p:cNvPr>
+          <p:cNvPicPr>
+            <a:picLocks noChangeAspect="1"/>
+          </p:cNvPicPr>
+          <p:nvPr/>
+        </p:nvPicPr>
+        <p:blipFill>
+          <a:blip r:embed="rId1"/>
+          <a:stretch>
+            <a:fillRect/>
+          </a:stretch>
+        </p:blipFill>
+        <p:spPr>
+          <a:xfrm>
+            <a:off x="904311" y="1280160"/>
+            <a:ext cx="2767340" cy="1901952"/>
+          </a:xfrm>
+          <a:prstGeom prst="rect">
+            <a:avLst/>
+          </a:prstGeom>
+        </p:spPr>
+      </p:pic>
+      <p:sp>
+        <p:nvSpPr>
+          <p:cNvPr id="6" name="Text 3"/>
+          <p:cNvSpPr txBox="1"/>
+          <p:nvPr/>
+        </p:nvSpPr>
+        <p:spPr>
+          <a:xfrm>
+            <a:off x="502920" y="3236976"/>
+            <a:ext cx="3570122" cy="237744"/>
+          </a:xfrm>
+          <a:prstGeom prst="rect">
+            <a:avLst/>
+          </a:prstGeom>
+          <a:noFill/>
+          <a:ln/>
+        </p:spPr>
+        <p:txBody>
+          <a:bodyPr wrap="square" lIns="0" tIns="0" rIns="0" bIns="0" rtlCol="0" anchor="ctr"/>
+          <a:lstStyle/>
+          <a:p>
+            <a:pPr algn="ctr" indent="0" marL="0">
+              <a:buNone/>
+            </a:pPr>
+            <a:r>
+              <a:rPr lang="en-US" sz="1200" b="1" dirty="0">
+                <a:solidFill>
+                  <a:srgbClr val="14302A"/>
+                </a:solidFill>
+                <a:latin typeface="Arial" pitchFamily="34" charset="0"/>
+                <a:ea typeface="Arial" pitchFamily="34" charset="-122"/>
+                <a:cs typeface="Arial" pitchFamily="34" charset="-120"/>
+              </a:rPr>
+              <a:t>Dashboard</a:t>
+            </a:r>
+            <a:endParaRPr lang="en-US" sz="1200" dirty="0"/>
+          </a:p>
+        </p:txBody>
+      </p:sp>
+      <p:sp>
+        <p:nvSpPr>
+          <p:cNvPr id="7" name="Text 4"/>
+          <p:cNvSpPr txBox="1"/>
+          <p:nvPr/>
+        </p:nvSpPr>
+        <p:spPr>
+          <a:xfrm>
+            <a:off x="502920" y="3474720"/>
+            <a:ext cx="3570122" cy="384048"/>
+          </a:xfrm>
+          <a:prstGeom prst="rect">
+            <a:avLst/>
+          </a:prstGeom>
+          <a:noFill/>
+          <a:ln/>
+        </p:spPr>
+        <p:txBody>
+          <a:bodyPr wrap="square" lIns="0" tIns="0" rIns="0" bIns="0" rtlCol="0" anchor="ctr"/>
+          <a:lstStyle/>
+          <a:p>
+            <a:pPr algn="ctr" indent="0" marL="0">
+              <a:lnSpc>
+                <a:spcPct val="95000"/>
+              </a:lnSpc>
+              <a:buNone/>
+            </a:pPr>
+            <a:r>
+              <a:rPr lang="en-US" sz="1000" dirty="0">
+                <a:solidFill>
+                  <a:srgbClr val="5C6B64"/>
+                </a:solidFill>
+              </a:rPr>
+              <a:t>Every RO, filtered to safety, blocked, at-risk or waiting</a:t>
+            </a:r>
+            <a:endParaRPr lang="en-US" sz="1000" dirty="0"/>
+          </a:p>
+        </p:txBody>
+      </p:sp>
+      <p:sp>
+        <p:nvSpPr>
+          <p:cNvPr id="8" name="frame-02-app-repair-or"/>
+          <p:cNvSpPr/>
+          <p:nvPr/>
+        </p:nvSpPr>
+        <p:spPr>
+          <a:xfrm>
+            <a:off x="4693890" y="1261872"/>
+            <a:ext cx="2803916" cy="1938528"/>
+          </a:xfrm>
+          <a:prstGeom prst="rect">
+            <a:avLst/>
+          </a:prstGeom>
+          <a:solidFill>
+            <a:srgbClr val="FFFFFF"/>
+          </a:solidFill>
+          <a:ln w="12700">
+            <a:solidFill>
+              <a:srgbClr val="C3CCC0"/>
+            </a:solidFill>
+            <a:prstDash val="solid"/>
+          </a:ln>
+        </p:spPr>
+      </p:sp>
+      <p:pic>
+        <p:nvPicPr>
+          <p:cNvPr id="9" name="Image 1" descr="docs/screenshots/02-app-repair-order.jpg">    </p:cNvPr>
+          <p:cNvPicPr>
+            <a:picLocks noChangeAspect="1"/>
+          </p:cNvPicPr>
+          <p:nvPr/>
+        </p:nvPicPr>
+        <p:blipFill>
+          <a:blip r:embed="rId2"/>
+          <a:stretch>
+            <a:fillRect/>
+          </a:stretch>
+        </p:blipFill>
+        <p:spPr>
+          <a:xfrm>
+            <a:off x="4712178" y="1280160"/>
+            <a:ext cx="2767340" cy="1901952"/>
+          </a:xfrm>
+          <a:prstGeom prst="rect">
+            <a:avLst/>
+          </a:prstGeom>
+        </p:spPr>
+      </p:pic>
+      <p:sp>
+        <p:nvSpPr>
+          <p:cNvPr id="10" name="Text 6"/>
+          <p:cNvSpPr txBox="1"/>
+          <p:nvPr/>
+        </p:nvSpPr>
+        <p:spPr>
+          <a:xfrm>
+            <a:off x="4310786" y="3236976"/>
+            <a:ext cx="3570122" cy="237744"/>
+          </a:xfrm>
+          <a:prstGeom prst="rect">
+            <a:avLst/>
+          </a:prstGeom>
+          <a:noFill/>
+          <a:ln/>
+        </p:spPr>
+        <p:txBody>
+          <a:bodyPr wrap="square" lIns="0" tIns="0" rIns="0" bIns="0" rtlCol="0" anchor="ctr"/>
+          <a:lstStyle/>
+          <a:p>
+            <a:pPr algn="ctr" indent="0" marL="0">
+              <a:buNone/>
+            </a:pPr>
+            <a:r>
+              <a:rPr lang="en-US" sz="1200" b="1" dirty="0">
+                <a:solidFill>
+                  <a:srgbClr val="14302A"/>
+                </a:solidFill>
+                <a:latin typeface="Arial" pitchFamily="34" charset="0"/>
+                <a:ea typeface="Arial" pitchFamily="34" charset="-122"/>
+                <a:cs typeface="Arial" pitchFamily="34" charset="-120"/>
+              </a:rPr>
+              <a:t>Repair Order</a:t>
+            </a:r>
+            <a:endParaRPr lang="en-US" sz="1200" dirty="0"/>
+          </a:p>
+        </p:txBody>
+      </p:sp>
+      <p:sp>
+        <p:nvSpPr>
+          <p:cNvPr id="11" name="Text 7"/>
+          <p:cNvSpPr txBox="1"/>
+          <p:nvPr/>
+        </p:nvSpPr>
+        <p:spPr>
+          <a:xfrm>
+            <a:off x="4310786" y="3474720"/>
+            <a:ext cx="3570122" cy="384048"/>
+          </a:xfrm>
+          <a:prstGeom prst="rect">
+            <a:avLst/>
+          </a:prstGeom>
+          <a:noFill/>
+          <a:ln/>
+        </p:spPr>
+        <p:txBody>
+          <a:bodyPr wrap="square" lIns="0" tIns="0" rIns="0" bIns="0" rtlCol="0" anchor="ctr"/>
+          <a:lstStyle/>
+          <a:p>
+            <a:pPr algn="ctr" indent="0" marL="0">
+              <a:lnSpc>
+                <a:spcPct val="95000"/>
+              </a:lnSpc>
+              <a:buNone/>
+            </a:pPr>
+            <a:r>
+              <a:rPr lang="en-US" sz="1000" dirty="0">
+                <a:solidFill>
+                  <a:srgbClr val="5C6B64"/>
+                </a:solidFill>
+              </a:rPr>
+              <a:t>State folded from the event log, with the updates as written</a:t>
+            </a:r>
+            <a:endParaRPr lang="en-US" sz="1000" dirty="0"/>
+          </a:p>
+        </p:txBody>
+      </p:sp>
+      <p:sp>
+        <p:nvSpPr>
+          <p:cNvPr id="12" name="frame-03-app-technicia"/>
+          <p:cNvSpPr/>
+          <p:nvPr/>
+        </p:nvSpPr>
+        <p:spPr>
+          <a:xfrm>
+            <a:off x="8617775" y="1261872"/>
+            <a:ext cx="2571878" cy="1938528"/>
+          </a:xfrm>
+          <a:prstGeom prst="rect">
+            <a:avLst/>
+          </a:prstGeom>
+          <a:solidFill>
+            <a:srgbClr val="FFFFFF"/>
+          </a:solidFill>
+          <a:ln w="12700">
+            <a:solidFill>
+              <a:srgbClr val="C3CCC0"/>
+            </a:solidFill>
+            <a:prstDash val="solid"/>
+          </a:ln>
+        </p:spPr>
+      </p:sp>
+      <p:pic>
+        <p:nvPicPr>
+          <p:cNvPr id="13" name="Image 2" descr="docs/screenshots/03-app-technician-update.jpg">    </p:cNvPr>
+          <p:cNvPicPr>
+            <a:picLocks noChangeAspect="1"/>
+          </p:cNvPicPr>
+          <p:nvPr/>
+        </p:nvPicPr>
+        <p:blipFill>
+          <a:blip r:embed="rId3"/>
+          <a:stretch>
+            <a:fillRect/>
+          </a:stretch>
+        </p:blipFill>
+        <p:spPr>
+          <a:xfrm>
+            <a:off x="8636063" y="1280160"/>
+            <a:ext cx="2535302" cy="1901952"/>
+          </a:xfrm>
+          <a:prstGeom prst="rect">
+            <a:avLst/>
+          </a:prstGeom>
+        </p:spPr>
+      </p:pic>
+      <p:sp>
+        <p:nvSpPr>
+          <p:cNvPr id="14" name="Text 9"/>
+          <p:cNvSpPr txBox="1"/>
+          <p:nvPr/>
+        </p:nvSpPr>
+        <p:spPr>
+          <a:xfrm>
+            <a:off x="8118653" y="3236976"/>
+            <a:ext cx="3570122" cy="237744"/>
+          </a:xfrm>
+          <a:prstGeom prst="rect">
+            <a:avLst/>
+          </a:prstGeom>
+          <a:noFill/>
+          <a:ln/>
+        </p:spPr>
+        <p:txBody>
+          <a:bodyPr wrap="square" lIns="0" tIns="0" rIns="0" bIns="0" rtlCol="0" anchor="ctr"/>
+          <a:lstStyle/>
+          <a:p>
+            <a:pPr algn="ctr" indent="0" marL="0">
+              <a:buNone/>
+            </a:pPr>
+            <a:r>
+              <a:rPr lang="en-US" sz="1200" b="1" dirty="0">
+                <a:solidFill>
+                  <a:srgbClr val="14302A"/>
+                </a:solidFill>
+                <a:latin typeface="Arial" pitchFamily="34" charset="0"/>
+                <a:ea typeface="Arial" pitchFamily="34" charset="-122"/>
+                <a:cs typeface="Arial" pitchFamily="34" charset="-120"/>
+              </a:rPr>
+              <a:t>Technician Update</a:t>
+            </a:r>
+            <a:endParaRPr lang="en-US" sz="1200" dirty="0"/>
+          </a:p>
+        </p:txBody>
+      </p:sp>
+      <p:sp>
+        <p:nvSpPr>
+          <p:cNvPr id="15" name="Text 10"/>
+          <p:cNvSpPr txBox="1"/>
+          <p:nvPr/>
+        </p:nvSpPr>
+        <p:spPr>
+          <a:xfrm>
+            <a:off x="8118653" y="3474720"/>
+            <a:ext cx="3570122" cy="384048"/>
+          </a:xfrm>
+          <a:prstGeom prst="rect">
+            <a:avLst/>
+          </a:prstGeom>
+          <a:noFill/>
+          <a:ln/>
+        </p:spPr>
+        <p:txBody>
+          <a:bodyPr wrap="square" lIns="0" tIns="0" rIns="0" bIns="0" rtlCol="0" anchor="ctr"/>
+          <a:lstStyle/>
+          <a:p>
+            <a:pPr algn="ctr" indent="0" marL="0">
+              <a:lnSpc>
+                <a:spcPct val="95000"/>
+              </a:lnSpc>
+              <a:buNone/>
+            </a:pPr>
+            <a:r>
+              <a:rPr lang="en-US" sz="1000" dirty="0">
+                <a:solidFill>
+                  <a:srgbClr val="5C6B64"/>
+                </a:solidFill>
+              </a:rPr>
+              <a:t>Log work by voice or text, then read the diff card</a:t>
+            </a:r>
+            <a:endParaRPr lang="en-US" sz="1000" dirty="0"/>
+          </a:p>
+        </p:txBody>
+      </p:sp>
+      <p:sp>
+        <p:nvSpPr>
+          <p:cNvPr id="16" name="frame-04-app-shift-han"/>
+          <p:cNvSpPr/>
+          <p:nvPr/>
+        </p:nvSpPr>
+        <p:spPr>
+          <a:xfrm>
+            <a:off x="1002042" y="4041648"/>
+            <a:ext cx="2571878" cy="1938528"/>
+          </a:xfrm>
+          <a:prstGeom prst="rect">
+            <a:avLst/>
+          </a:prstGeom>
+          <a:solidFill>
+            <a:srgbClr val="FFFFFF"/>
+          </a:solidFill>
+          <a:ln w="12700">
+            <a:solidFill>
+              <a:srgbClr val="C3CCC0"/>
+            </a:solidFill>
+            <a:prstDash val="solid"/>
+          </a:ln>
+        </p:spPr>
+      </p:sp>
+      <p:pic>
+        <p:nvPicPr>
+          <p:cNvPr id="17" name="Image 3" descr="docs/screenshots/04-app-shift-handover.jpg">    </p:cNvPr>
+          <p:cNvPicPr>
+            <a:picLocks noChangeAspect="1"/>
+          </p:cNvPicPr>
+          <p:nvPr/>
+        </p:nvPicPr>
+        <p:blipFill>
+          <a:blip r:embed="rId4"/>
+          <a:stretch>
+            <a:fillRect/>
+          </a:stretch>
+        </p:blipFill>
+        <p:spPr>
+          <a:xfrm>
+            <a:off x="1020330" y="4059936"/>
+            <a:ext cx="2535302" cy="1901952"/>
+          </a:xfrm>
+          <a:prstGeom prst="rect">
+            <a:avLst/>
+          </a:prstGeom>
+        </p:spPr>
+      </p:pic>
+      <p:sp>
+        <p:nvSpPr>
+          <p:cNvPr id="18" name="Text 12"/>
+          <p:cNvSpPr txBox="1"/>
+          <p:nvPr/>
+        </p:nvSpPr>
+        <p:spPr>
+          <a:xfrm>
+            <a:off x="502920" y="6016752"/>
+            <a:ext cx="3570122" cy="237744"/>
+          </a:xfrm>
+          <a:prstGeom prst="rect">
+            <a:avLst/>
+          </a:prstGeom>
+          <a:noFill/>
+          <a:ln/>
+        </p:spPr>
+        <p:txBody>
+          <a:bodyPr wrap="square" lIns="0" tIns="0" rIns="0" bIns="0" rtlCol="0" anchor="ctr"/>
+          <a:lstStyle/>
+          <a:p>
+            <a:pPr algn="ctr" indent="0" marL="0">
+              <a:buNone/>
+            </a:pPr>
+            <a:r>
+              <a:rPr lang="en-US" sz="1200" b="1" dirty="0">
+                <a:solidFill>
+                  <a:srgbClr val="14302A"/>
+                </a:solidFill>
+                <a:latin typeface="Arial" pitchFamily="34" charset="0"/>
+                <a:ea typeface="Arial" pitchFamily="34" charset="-122"/>
+                <a:cs typeface="Arial" pitchFamily="34" charset="-120"/>
+              </a:rPr>
+              <a:t>Shift Handover</a:t>
+            </a:r>
+            <a:endParaRPr lang="en-US" sz="1200" dirty="0"/>
+          </a:p>
+        </p:txBody>
+      </p:sp>
+      <p:sp>
+        <p:nvSpPr>
+          <p:cNvPr id="19" name="Text 13"/>
+          <p:cNvSpPr txBox="1"/>
+          <p:nvPr/>
+        </p:nvSpPr>
+        <p:spPr>
+          <a:xfrm>
+            <a:off x="502920" y="6254496"/>
+            <a:ext cx="3570122" cy="384048"/>
+          </a:xfrm>
+          <a:prstGeom prst="rect">
+            <a:avLst/>
+          </a:prstGeom>
+          <a:noFill/>
+          <a:ln/>
+        </p:spPr>
+        <p:txBody>
+          <a:bodyPr wrap="square" lIns="0" tIns="0" rIns="0" bIns="0" rtlCol="0" anchor="ctr"/>
+          <a:lstStyle/>
+          <a:p>
+            <a:pPr algn="ctr" indent="0" marL="0">
+              <a:lnSpc>
+                <a:spcPct val="95000"/>
+              </a:lnSpc>
+              <a:buNone/>
+            </a:pPr>
+            <a:r>
+              <a:rPr lang="en-US" sz="1000" dirty="0">
+                <a:solidFill>
+                  <a:srgbClr val="5C6B64"/>
+                </a:solidFill>
+              </a:rPr>
+              <a:t>Prioritised brief: safety, breached, at-risk, blocked</a:t>
+            </a:r>
+            <a:endParaRPr lang="en-US" sz="1000" dirty="0"/>
+          </a:p>
+        </p:txBody>
+      </p:sp>
+      <p:sp>
+        <p:nvSpPr>
+          <p:cNvPr id="20" name="frame-06-app-data-and-"/>
+          <p:cNvSpPr/>
+          <p:nvPr/>
+        </p:nvSpPr>
+        <p:spPr>
+          <a:xfrm>
+            <a:off x="4809909" y="4041648"/>
+            <a:ext cx="2571878" cy="1938528"/>
+          </a:xfrm>
+          <a:prstGeom prst="rect">
+            <a:avLst/>
+          </a:prstGeom>
+          <a:solidFill>
+            <a:srgbClr val="FFFFFF"/>
+          </a:solidFill>
+          <a:ln w="12700">
+            <a:solidFill>
+              <a:srgbClr val="C3CCC0"/>
+            </a:solidFill>
+            <a:prstDash val="solid"/>
+          </a:ln>
+        </p:spPr>
+      </p:sp>
+      <p:pic>
+        <p:nvPicPr>
+          <p:cNvPr id="21" name="Image 4" descr="docs/screenshots/06-app-data-and-retrieval.jpg">    </p:cNvPr>
+          <p:cNvPicPr>
+            <a:picLocks noChangeAspect="1"/>
+          </p:cNvPicPr>
+          <p:nvPr/>
+        </p:nvPicPr>
+        <p:blipFill>
+          <a:blip r:embed="rId5"/>
+          <a:stretch>
+            <a:fillRect/>
+          </a:stretch>
+        </p:blipFill>
+        <p:spPr>
+          <a:xfrm>
+            <a:off x="4828197" y="4059936"/>
+            <a:ext cx="2535302" cy="1901952"/>
+          </a:xfrm>
+          <a:prstGeom prst="rect">
+            <a:avLst/>
+          </a:prstGeom>
+        </p:spPr>
+      </p:pic>
+      <p:sp>
+        <p:nvSpPr>
+          <p:cNvPr id="22" name="Text 15"/>
+          <p:cNvSpPr txBox="1"/>
+          <p:nvPr/>
+        </p:nvSpPr>
+        <p:spPr>
+          <a:xfrm>
+            <a:off x="4310786" y="6016752"/>
+            <a:ext cx="3570122" cy="237744"/>
+          </a:xfrm>
+          <a:prstGeom prst="rect">
+            <a:avLst/>
+          </a:prstGeom>
+          <a:noFill/>
+          <a:ln/>
+        </p:spPr>
+        <p:txBody>
+          <a:bodyPr wrap="square" lIns="0" tIns="0" rIns="0" bIns="0" rtlCol="0" anchor="ctr"/>
+          <a:lstStyle/>
+          <a:p>
+            <a:pPr algn="ctr" indent="0" marL="0">
+              <a:buNone/>
+            </a:pPr>
+            <a:r>
+              <a:rPr lang="en-US" sz="1200" b="1" dirty="0">
+                <a:solidFill>
+                  <a:srgbClr val="14302A"/>
+                </a:solidFill>
+                <a:latin typeface="Arial" pitchFamily="34" charset="0"/>
+                <a:ea typeface="Arial" pitchFamily="34" charset="-122"/>
+                <a:cs typeface="Arial" pitchFamily="34" charset="-120"/>
+              </a:rPr>
+              <a:t>Data &amp; Retrieval</a:t>
+            </a:r>
+            <a:endParaRPr lang="en-US" sz="1200" dirty="0"/>
+          </a:p>
+        </p:txBody>
+      </p:sp>
+      <p:sp>
+        <p:nvSpPr>
+          <p:cNvPr id="23" name="Text 16"/>
+          <p:cNvSpPr txBox="1"/>
+          <p:nvPr/>
+        </p:nvSpPr>
+        <p:spPr>
+          <a:xfrm>
+            <a:off x="4310786" y="6254496"/>
+            <a:ext cx="3570122" cy="384048"/>
+          </a:xfrm>
+          <a:prstGeom prst="rect">
+            <a:avLst/>
+          </a:prstGeom>
+          <a:noFill/>
+          <a:ln/>
+        </p:spPr>
+        <p:txBody>
+          <a:bodyPr wrap="square" lIns="0" tIns="0" rIns="0" bIns="0" rtlCol="0" anchor="ctr"/>
+          <a:lstStyle/>
+          <a:p>
+            <a:pPr algn="ctr" indent="0" marL="0">
+              <a:lnSpc>
+                <a:spcPct val="95000"/>
+              </a:lnSpc>
+              <a:buNone/>
+            </a:pPr>
+            <a:r>
+              <a:rPr lang="en-US" sz="1000" dirty="0">
+                <a:solidFill>
+                  <a:srgbClr val="5C6B64"/>
+                </a:solidFill>
+              </a:rPr>
+              <a:t>Points at the store consoles rather than embedding them</a:t>
+            </a:r>
+            <a:endParaRPr lang="en-US" sz="1000" dirty="0"/>
+          </a:p>
+        </p:txBody>
+      </p:sp>
+      <p:sp>
+        <p:nvSpPr>
+          <p:cNvPr id="24" name="frame-12-sqlite-web.jp"/>
+          <p:cNvSpPr/>
+          <p:nvPr/>
+        </p:nvSpPr>
+        <p:spPr>
+          <a:xfrm>
+            <a:off x="8501756" y="4041648"/>
+            <a:ext cx="2803916" cy="1938528"/>
+          </a:xfrm>
+          <a:prstGeom prst="rect">
+            <a:avLst/>
+          </a:prstGeom>
+          <a:solidFill>
+            <a:srgbClr val="FFFFFF"/>
+          </a:solidFill>
+          <a:ln w="12700">
+            <a:solidFill>
+              <a:srgbClr val="C3CCC0"/>
+            </a:solidFill>
+            <a:prstDash val="solid"/>
+          </a:ln>
+        </p:spPr>
+      </p:sp>
+      <p:pic>
+        <p:nvPicPr>
+          <p:cNvPr id="25" name="Image 5" descr="docs/screenshots/12-sqlite-web.jpg">    </p:cNvPr>
+          <p:cNvPicPr>
+            <a:picLocks noChangeAspect="1"/>
+          </p:cNvPicPr>
+          <p:nvPr/>
+        </p:nvPicPr>
+        <p:blipFill>
+          <a:blip r:embed="rId6"/>
+          <a:stretch>
+            <a:fillRect/>
+          </a:stretch>
+        </p:blipFill>
+        <p:spPr>
+          <a:xfrm>
+            <a:off x="8520044" y="4059936"/>
+            <a:ext cx="2767340" cy="1901952"/>
+          </a:xfrm>
+          <a:prstGeom prst="rect">
+            <a:avLst/>
+          </a:prstGeom>
+        </p:spPr>
+      </p:pic>
+      <p:sp>
+        <p:nvSpPr>
+          <p:cNvPr id="26" name="Text 18"/>
+          <p:cNvSpPr txBox="1"/>
+          <p:nvPr/>
+        </p:nvSpPr>
+        <p:spPr>
+          <a:xfrm>
+            <a:off x="8118653" y="6016752"/>
+            <a:ext cx="3570122" cy="237744"/>
+          </a:xfrm>
+          <a:prstGeom prst="rect">
+            <a:avLst/>
+          </a:prstGeom>
+          <a:noFill/>
+          <a:ln/>
+        </p:spPr>
+        <p:txBody>
+          <a:bodyPr wrap="square" lIns="0" tIns="0" rIns="0" bIns="0" rtlCol="0" anchor="ctr"/>
+          <a:lstStyle/>
+          <a:p>
+            <a:pPr algn="ctr" indent="0" marL="0">
+              <a:buNone/>
+            </a:pPr>
+            <a:r>
+              <a:rPr lang="en-US" sz="1200" b="1" dirty="0">
+                <a:solidFill>
+                  <a:srgbClr val="14302A"/>
+                </a:solidFill>
+                <a:latin typeface="Arial" pitchFamily="34" charset="0"/>
+                <a:ea typeface="Arial" pitchFamily="34" charset="-122"/>
+                <a:cs typeface="Arial" pitchFamily="34" charset="-120"/>
+              </a:rPr>
+              <a:t>sqlite-web</a:t>
+            </a:r>
+            <a:endParaRPr lang="en-US" sz="1200" dirty="0"/>
+          </a:p>
+        </p:txBody>
+      </p:sp>
+      <p:sp>
+        <p:nvSpPr>
+          <p:cNvPr id="27" name="Text 19"/>
+          <p:cNvSpPr txBox="1"/>
+          <p:nvPr/>
+        </p:nvSpPr>
+        <p:spPr>
+          <a:xfrm>
+            <a:off x="8118653" y="6254496"/>
+            <a:ext cx="3570122" cy="384048"/>
+          </a:xfrm>
+          <a:prstGeom prst="rect">
+            <a:avLst/>
+          </a:prstGeom>
+          <a:noFill/>
+          <a:ln/>
+        </p:spPr>
+        <p:txBody>
+          <a:bodyPr wrap="square" lIns="0" tIns="0" rIns="0" bIns="0" rtlCol="0" anchor="ctr"/>
+          <a:lstStyle/>
+          <a:p>
+            <a:pPr algn="ctr" indent="0" marL="0">
+              <a:lnSpc>
+                <a:spcPct val="95000"/>
+              </a:lnSpc>
+              <a:buNone/>
+            </a:pPr>
+            <a:r>
+              <a:rPr lang="en-US" sz="1000" dirty="0">
+                <a:solidFill>
+                  <a:srgbClr val="5C6B64"/>
+                </a:solidFill>
+              </a:rPr>
+              <a:t>The system of record, read-write, bound to loopback</a:t>
+            </a:r>
+            <a:endParaRPr lang="en-US" sz="1000" dirty="0"/>
+          </a:p>
+        </p:txBody>
+      </p:sp>
+      <p:sp>
+        <p:nvSpPr>
+          <p:cNvPr id="28" name="Text 20"/>
+          <p:cNvSpPr txBox="1"/>
+          <p:nvPr/>
+        </p:nvSpPr>
+        <p:spPr>
+          <a:xfrm>
+            <a:off x="502920" y="6355080"/>
+            <a:ext cx="11185855" cy="310896"/>
+          </a:xfrm>
+          <a:prstGeom prst="rect">
+            <a:avLst/>
+          </a:prstGeom>
+          <a:noFill/>
+          <a:ln/>
+        </p:spPr>
+        <p:txBody>
+          <a:bodyPr wrap="square" lIns="0" tIns="0" rIns="0" bIns="0" rtlCol="0" anchor="ctr"/>
+          <a:lstStyle/>
+          <a:p>
+            <a:pPr indent="0" marL="0">
+              <a:buNone/>
+            </a:pPr>
+            <a:r>
+              <a:rPr lang="en-US" sz="1000" i="1" dirty="0">
+                <a:solidFill>
+                  <a:srgbClr val="5C6B64"/>
+                </a:solidFill>
+              </a:rPr>
+              <a:t>Technician Update, Shift Handover and Data &amp; Retrieval were captured against the hosted models rather than the local NIMs — Chromium hangs on those three Gradio tabs, so they are not re-taken automatically. docs/screenshots/README.md dates every frame.</a:t>
             </a:r>
             <a:endParaRPr lang="en-US" sz="1000" dirty="0"/>
           </a:p>

--- a/docs/architecture-deck.pptx
+++ b/docs/architecture-deck.pptx
@@ -115,42 +115,42 @@
   <p:extLst>
     <p:ext uri="{521415D9-36F7-43E2-AB2F-B90AF26B5E84}">
       <p14:sectionLst xmlns:p14="http://schemas.microsoft.com/office/powerpoint/2010/main">
-        <p14:section name="Overview" id="{89330760-eeb3-569e-7b54-6692e5fab8c0}">
+        <p14:section name="Overview" id="{a3756a23-96bd-b45d-e020-9a54a46de9c5}">
           <p14:sldIdLst>
             <p14:sldId id="256"/>
           </p14:sldIdLst>
         </p14:section>
-        <p14:section name="Architecture" id="{8b0cbe7b-3c66-63df-6b5b-c122551b0f6c}">
+        <p14:section name="Architecture" id="{d3dbc883-61b1-d447-68ac-9bec53bd81f9}">
           <p14:sldIdLst>
             <p14:sldId id="257"/>
           </p14:sldIdLst>
         </p14:section>
-        <p14:section name="Application flow" id="{3acb2bc4-19d5-3212-63a5-67a73a3f0cd4}">
+        <p14:section name="Application flow" id="{28648ea2-0795-a726-7b18-106b7f69a858}">
           <p14:sldIdLst>
             <p14:sldId id="258"/>
           </p14:sldIdLst>
         </p14:section>
-        <p14:section name="Components" id="{c9e77b0e-c35b-aff1-6a31-a1560db7fc71}">
+        <p14:section name="Components" id="{b4ac6365-6bd0-b9ab-5249-bf6614cce02a}">
           <p14:sldIdLst>
             <p14:sldId id="259"/>
           </p14:sldIdLst>
         </p14:section>
-        <p14:section name="Deployment" id="{04cf93c8-fa70-d084-6e96-d05419096c4d}">
+        <p14:section name="Deployment" id="{12b01c5a-0714-3f37-c0b5-55dcf017e328}">
           <p14:sldIdLst>
             <p14:sldId id="260"/>
           </p14:sldIdLst>
         </p14:section>
-        <p14:section name="Data model" id="{725cb8b3-5908-590f-530b-78d815849b63}">
+        <p14:section name="Data model" id="{cb51853f-144a-2e55-faae-3213ad8c4121}">
           <p14:sldIdLst>
             <p14:sldId id="261"/>
           </p14:sldIdLst>
         </p14:section>
-        <p14:section name="Lifecycle" id="{9b989025-c85f-8743-e383-4d2a04c54c29}">
+        <p14:section name="Lifecycle" id="{f48a0f5f-f80f-7375-f976-0b0bf888d00e}">
           <p14:sldIdLst>
             <p14:sldId id="262"/>
           </p14:sldIdLst>
         </p14:section>
-        <p14:section name="Usage" id="{36383487-68fd-7584-2b72-75d7d21bf2bb}">
+        <p14:section name="Usage" id="{beaa20f0-a18a-43bd-33dd-b474c2aa1134}">
           <p14:sldIdLst>
             <p14:sldId id="263"/>
             <p14:sldId id="264"/>
@@ -15403,14 +15403,14 @@
       </p:sp>
       <p:sp>
         <p:nvSpPr>
-          <p:cNvPr id="4" name="card-Question"/>
+          <p:cNvPr id="4" name="card-1 · Question"/>
           <p:cNvSpPr/>
           <p:nvPr/>
         </p:nvSpPr>
         <p:spPr>
           <a:xfrm>
             <a:off x="502920" y="1024128"/>
-            <a:ext cx="1635709" cy="658368"/>
+            <a:ext cx="1635709" cy="841248"/>
           </a:xfrm>
           <a:prstGeom prst="rect">
             <a:avLst/>
@@ -15435,7 +15435,7 @@
         <p:spPr>
           <a:xfrm>
             <a:off x="566928" y="1060704"/>
-            <a:ext cx="1507693" cy="585216"/>
+            <a:ext cx="1507693" cy="768096"/>
           </a:xfrm>
           <a:prstGeom prst="rect">
             <a:avLst/>
@@ -15459,7 +15459,7 @@
                   <a:srgbClr val="14302A"/>
                 </a:solidFill>
               </a:rPr>
-              <a:t>Question</a:t>
+              <a:t>1 · Question</a:t>
             </a:r>
             <a:endParaRPr lang="en-US" sz="1100" dirty="0"/>
           </a:p>
@@ -15476,10 +15476,27 @@
                   <a:srgbClr val="5C6B64"/>
                 </a:solidFill>
               </a:rPr>
-              <a:t>typed or spoken</a:t>
+              <a:t>typed in the UI,</a:t>
             </a:r>
             <a:endParaRPr lang="en-US" sz="1100" dirty="0"/>
           </a:p>
+          <a:p>
+            <a:pPr algn="l" indent="0" marL="0">
+              <a:lnSpc>
+                <a:spcPct val="92000"/>
+              </a:lnSpc>
+              <a:buNone/>
+            </a:pPr>
+            <a:r>
+              <a:rPr lang="en-US" sz="1000" dirty="0">
+                <a:solidFill>
+                  <a:srgbClr val="5C6B64"/>
+                </a:solidFill>
+              </a:rPr>
+              <a:t>or spoken and transcribed</a:t>
+            </a:r>
+            <a:endParaRPr lang="en-US" sz="1100" dirty="0"/>
+          </a:p>
         </p:txBody>
       </p:sp>
       <p:sp>
@@ -15490,7 +15507,7 @@
         </p:nvSpPr>
         <p:spPr>
           <a:xfrm>
-            <a:off x="2175205" y="1225296"/>
+            <a:off x="2175205" y="1325880"/>
             <a:ext cx="201168" cy="201168"/>
           </a:xfrm>
           <a:prstGeom prst="rightArrow">
@@ -15509,14 +15526,14 @@
       </p:sp>
       <p:sp>
         <p:nvSpPr>
-          <p:cNvPr id="7" name="card-Router"/>
+          <p:cNvPr id="7" name="card-2 · Route"/>
           <p:cNvSpPr/>
           <p:nvPr/>
         </p:nvSpPr>
         <p:spPr>
           <a:xfrm>
             <a:off x="2412949" y="1024128"/>
-            <a:ext cx="1635709" cy="658368"/>
+            <a:ext cx="1635709" cy="841248"/>
           </a:xfrm>
           <a:prstGeom prst="rect">
             <a:avLst/>
@@ -15541,7 +15558,7 @@
         <p:spPr>
           <a:xfrm>
             <a:off x="2476957" y="1060704"/>
-            <a:ext cx="1507693" cy="585216"/>
+            <a:ext cx="1507693" cy="768096"/>
           </a:xfrm>
           <a:prstGeom prst="rect">
             <a:avLst/>
@@ -15565,7 +15582,7 @@
                   <a:srgbClr val="14302A"/>
                 </a:solidFill>
               </a:rPr>
-              <a:t>Router</a:t>
+              <a:t>2 · Route</a:t>
             </a:r>
             <a:endParaRPr lang="en-US" sz="1100" dirty="0"/>
           </a:p>
@@ -15582,10 +15599,27 @@
                   <a:srgbClr val="5C6B64"/>
                 </a:solidFill>
               </a:rPr>
-              <a:t>keywords, no model</a:t>
+              <a:t>keyword match picks one typed tool.</a:t>
             </a:r>
             <a:endParaRPr lang="en-US" sz="1100" dirty="0"/>
           </a:p>
+          <a:p>
+            <a:pPr algn="l" indent="0" marL="0">
+              <a:lnSpc>
+                <a:spcPct val="92000"/>
+              </a:lnSpc>
+              <a:buNone/>
+            </a:pPr>
+            <a:r>
+              <a:rPr lang="en-US" sz="1000" dirty="0">
+                <a:solidFill>
+                  <a:srgbClr val="5C6B64"/>
+                </a:solidFill>
+              </a:rPr>
+              <a:t>No model call here</a:t>
+            </a:r>
+            <a:endParaRPr lang="en-US" sz="1100" dirty="0"/>
+          </a:p>
         </p:txBody>
       </p:sp>
       <p:sp>
@@ -15596,7 +15630,7 @@
         </p:nvSpPr>
         <p:spPr>
           <a:xfrm>
-            <a:off x="4085234" y="1225296"/>
+            <a:off x="4085234" y="1325880"/>
             <a:ext cx="201168" cy="201168"/>
           </a:xfrm>
           <a:prstGeom prst="rightArrow">
@@ -15615,14 +15649,14 @@
       </p:sp>
       <p:sp>
         <p:nvSpPr>
-          <p:cNvPr id="10" name="card-Typed tools"/>
+          <p:cNvPr id="10" name="card-3 · Read"/>
           <p:cNvSpPr/>
           <p:nvPr/>
         </p:nvSpPr>
         <p:spPr>
           <a:xfrm>
             <a:off x="4322978" y="1024128"/>
-            <a:ext cx="1635709" cy="658368"/>
+            <a:ext cx="1635709" cy="841248"/>
           </a:xfrm>
           <a:prstGeom prst="rect">
             <a:avLst/>
@@ -15647,7 +15681,7 @@
         <p:spPr>
           <a:xfrm>
             <a:off x="4386986" y="1060704"/>
-            <a:ext cx="1507693" cy="585216"/>
+            <a:ext cx="1507693" cy="768096"/>
           </a:xfrm>
           <a:prstGeom prst="rect">
             <a:avLst/>
@@ -15671,7 +15705,7 @@
                   <a:srgbClr val="14302A"/>
                 </a:solidFill>
               </a:rPr>
-              <a:t>Typed tools</a:t>
+              <a:t>3 · Read</a:t>
             </a:r>
             <a:endParaRPr lang="en-US" sz="1100" dirty="0"/>
           </a:p>
@@ -15688,10 +15722,27 @@
                   <a:srgbClr val="5C6B64"/>
                 </a:solidFill>
               </a:rPr>
-              <a:t>SQL · Milvus + rerank</a:t>
+              <a:t>SQL over the event log, or</a:t>
             </a:r>
             <a:endParaRPr lang="en-US" sz="1100" dirty="0"/>
           </a:p>
+          <a:p>
+            <a:pPr algn="l" indent="0" marL="0">
+              <a:lnSpc>
+                <a:spcPct val="92000"/>
+              </a:lnSpc>
+              <a:buNone/>
+            </a:pPr>
+            <a:r>
+              <a:rPr lang="en-US" sz="1000" dirty="0">
+                <a:solidFill>
+                  <a:srgbClr val="5C6B64"/>
+                </a:solidFill>
+              </a:rPr>
+              <a:t>embed &gt; Milvus &gt; rerank</a:t>
+            </a:r>
+            <a:endParaRPr lang="en-US" sz="1100" dirty="0"/>
+          </a:p>
         </p:txBody>
       </p:sp>
       <p:sp>
@@ -15702,7 +15753,7 @@
         </p:nvSpPr>
         <p:spPr>
           <a:xfrm>
-            <a:off x="5995264" y="1225296"/>
+            <a:off x="5995264" y="1325880"/>
             <a:ext cx="201168" cy="201168"/>
           </a:xfrm>
           <a:prstGeom prst="rightArrow">
@@ -15721,14 +15772,14 @@
       </p:sp>
       <p:sp>
         <p:nvSpPr>
-          <p:cNvPr id="13" name="card-Compose"/>
+          <p:cNvPr id="13" name="card-4 · Compose"/>
           <p:cNvSpPr/>
           <p:nvPr/>
         </p:nvSpPr>
         <p:spPr>
           <a:xfrm>
             <a:off x="6233008" y="1024128"/>
-            <a:ext cx="1635709" cy="658368"/>
+            <a:ext cx="1635709" cy="841248"/>
           </a:xfrm>
           <a:prstGeom prst="rect">
             <a:avLst/>
@@ -15753,7 +15804,7 @@
         <p:spPr>
           <a:xfrm>
             <a:off x="6297016" y="1060704"/>
-            <a:ext cx="1507693" cy="585216"/>
+            <a:ext cx="1507693" cy="768096"/>
           </a:xfrm>
           <a:prstGeom prst="rect">
             <a:avLst/>
@@ -15777,7 +15828,7 @@
                   <a:srgbClr val="14302A"/>
                 </a:solidFill>
               </a:rPr>
-              <a:t>Compose</a:t>
+              <a:t>4 · Compose</a:t>
             </a:r>
             <a:endParaRPr lang="en-US" sz="1100" dirty="0"/>
           </a:p>
@@ -15794,10 +15845,27 @@
                   <a:srgbClr val="5C6B64"/>
                 </a:solidFill>
               </a:rPr>
-              <a:t>Python 87.5% · else narrate</a:t>
+              <a:t>Python builds the answer.</a:t>
             </a:r>
             <a:endParaRPr lang="en-US" sz="1100" dirty="0"/>
           </a:p>
+          <a:p>
+            <a:pPr algn="l" indent="0" marL="0">
+              <a:lnSpc>
+                <a:spcPct val="92000"/>
+              </a:lnSpc>
+              <a:buNone/>
+            </a:pPr>
+            <a:r>
+              <a:rPr lang="en-US" sz="1000" dirty="0">
+                <a:solidFill>
+                  <a:srgbClr val="5C6B64"/>
+                </a:solidFill>
+              </a:rPr>
+              <a:t>The model only narrates prose</a:t>
+            </a:r>
+            <a:endParaRPr lang="en-US" sz="1100" dirty="0"/>
+          </a:p>
         </p:txBody>
       </p:sp>
       <p:sp>
@@ -15808,7 +15876,7 @@
         </p:nvSpPr>
         <p:spPr>
           <a:xfrm>
-            <a:off x="7905293" y="1225296"/>
+            <a:off x="7905293" y="1325880"/>
             <a:ext cx="201168" cy="201168"/>
           </a:xfrm>
           <a:prstGeom prst="rightArrow">
@@ -15827,14 +15895,14 @@
       </p:sp>
       <p:sp>
         <p:nvSpPr>
-          <p:cNvPr id="16" name="card-Rails"/>
+          <p:cNvPr id="16" name="card-5 · Check"/>
           <p:cNvSpPr/>
           <p:nvPr/>
         </p:nvSpPr>
         <p:spPr>
           <a:xfrm>
             <a:off x="8143037" y="1024128"/>
-            <a:ext cx="1635709" cy="658368"/>
+            <a:ext cx="1635709" cy="841248"/>
           </a:xfrm>
           <a:prstGeom prst="rect">
             <a:avLst/>
@@ -15859,7 +15927,7 @@
         <p:spPr>
           <a:xfrm>
             <a:off x="8207045" y="1060704"/>
-            <a:ext cx="1507693" cy="585216"/>
+            <a:ext cx="1507693" cy="768096"/>
           </a:xfrm>
           <a:prstGeom prst="rect">
             <a:avLst/>
@@ -15883,7 +15951,7 @@
                   <a:srgbClr val="14302A"/>
                 </a:solidFill>
               </a:rPr>
-              <a:t>Rails</a:t>
+              <a:t>5 · Check</a:t>
             </a:r>
             <a:endParaRPr lang="en-US" sz="1100" dirty="0"/>
           </a:p>
@@ -15900,10 +15968,27 @@
                   <a:srgbClr val="5C6B64"/>
                 </a:solidFill>
               </a:rPr>
-              <a:t>grounding + output</a:t>
+              <a:t>every figure must trace back</a:t>
             </a:r>
             <a:endParaRPr lang="en-US" sz="1100" dirty="0"/>
           </a:p>
+          <a:p>
+            <a:pPr algn="l" indent="0" marL="0">
+              <a:lnSpc>
+                <a:spcPct val="92000"/>
+              </a:lnSpc>
+              <a:buNone/>
+            </a:pPr>
+            <a:r>
+              <a:rPr lang="en-US" sz="1000" dirty="0">
+                <a:solidFill>
+                  <a:srgbClr val="5C6B64"/>
+                </a:solidFill>
+              </a:rPr>
+              <a:t>to a tool result, or it is blocked</a:t>
+            </a:r>
+            <a:endParaRPr lang="en-US" sz="1100" dirty="0"/>
+          </a:p>
         </p:txBody>
       </p:sp>
       <p:sp>
@@ -15914,7 +15999,7 @@
         </p:nvSpPr>
         <p:spPr>
           <a:xfrm>
-            <a:off x="9815322" y="1225296"/>
+            <a:off x="9815322" y="1325880"/>
             <a:ext cx="201168" cy="201168"/>
           </a:xfrm>
           <a:prstGeom prst="rightArrow">
@@ -15933,14 +16018,14 @@
       </p:sp>
       <p:sp>
         <p:nvSpPr>
-          <p:cNvPr id="19" name="card-Answer"/>
+          <p:cNvPr id="19" name="card-6 · Answer"/>
           <p:cNvSpPr/>
           <p:nvPr/>
         </p:nvSpPr>
         <p:spPr>
           <a:xfrm>
             <a:off x="10053066" y="1024128"/>
-            <a:ext cx="1635709" cy="658368"/>
+            <a:ext cx="1635709" cy="841248"/>
           </a:xfrm>
           <a:prstGeom prst="rect">
             <a:avLst/>
@@ -15965,7 +16050,7 @@
         <p:spPr>
           <a:xfrm>
             <a:off x="10117074" y="1060704"/>
-            <a:ext cx="1507693" cy="585216"/>
+            <a:ext cx="1507693" cy="768096"/>
           </a:xfrm>
           <a:prstGeom prst="rect">
             <a:avLst/>
@@ -15989,7 +16074,7 @@
                   <a:srgbClr val="FFFFFF"/>
                 </a:solidFill>
               </a:rPr>
-              <a:t>Answer</a:t>
+              <a:t>6 · Answer</a:t>
             </a:r>
             <a:endParaRPr lang="en-US" sz="1100" dirty="0"/>
           </a:p>
@@ -16006,22 +16091,86 @@
                   <a:srgbClr val="DCE8CF"/>
                 </a:solidFill>
               </a:rPr>
-              <a:t>every figure cited</a:t>
+              <a:t>with the record ids</a:t>
             </a:r>
             <a:endParaRPr lang="en-US" sz="1100" dirty="0"/>
           </a:p>
-        </p:txBody>
-      </p:sp>
-      <p:sp>
-        <p:nvSpPr>
-          <p:cNvPr id="21" name="frame-05-app-manager-a"/>
-          <p:cNvSpPr/>
-          <p:nvPr/>
-        </p:nvSpPr>
-        <p:spPr>
-          <a:xfrm>
-            <a:off x="489551" y="1956816"/>
-            <a:ext cx="2815657" cy="2121408"/>
+          <a:p>
+            <a:pPr algn="l" indent="0" marL="0">
+              <a:lnSpc>
+                <a:spcPct val="92000"/>
+              </a:lnSpc>
+              <a:buNone/>
+            </a:pPr>
+            <a:r>
+              <a:rPr lang="en-US" sz="1000" dirty="0">
+                <a:solidFill>
+                  <a:srgbClr val="DCE8CF"/>
+                </a:solidFill>
+              </a:rPr>
+              <a:t>it was built from</a:t>
+            </a:r>
+            <a:endParaRPr lang="en-US" sz="1100" dirty="0"/>
+          </a:p>
+        </p:txBody>
+      </p:sp>
+      <p:sp>
+        <p:nvSpPr>
+          <p:cNvPr id="21" name="Text 19"/>
+          <p:cNvSpPr txBox="1"/>
+          <p:nvPr/>
+        </p:nvSpPr>
+        <p:spPr>
+          <a:xfrm>
+            <a:off x="502920" y="1901952"/>
+            <a:ext cx="11185855" cy="237744"/>
+          </a:xfrm>
+          <a:prstGeom prst="rect">
+            <a:avLst/>
+          </a:prstGeom>
+          <a:noFill/>
+          <a:ln/>
+        </p:spPr>
+        <p:txBody>
+          <a:bodyPr wrap="square" lIns="0" tIns="0" rIns="0" bIns="0" rtlCol="0" anchor="ctr"/>
+          <a:lstStyle/>
+          <a:p>
+            <a:pPr algn="ctr" indent="0" marL="0">
+              <a:buNone/>
+            </a:pPr>
+            <a:r>
+              <a:rPr lang="en-US" sz="1000" b="1" dirty="0">
+                <a:solidFill>
+                  <a:srgbClr val="14302A"/>
+                </a:solidFill>
+              </a:rPr>
+              <a:t>Steps 1, 2, 4 and 6 never touch a model. </a:t>
+            </a:r>
+            <a:pPr algn="ctr" indent="0" marL="0">
+              <a:buNone/>
+            </a:pPr>
+            <a:r>
+              <a:rPr lang="en-US" sz="1000" dirty="0">
+                <a:solidFill>
+                  <a:srgbClr val="5C6B64"/>
+                </a:solidFill>
+              </a:rPr>
+              <a:t>Only step 3's semantic branch and step 4's narration do - which is why eight of eleven questions answer in under a tenth of a second.</a:t>
+            </a:r>
+            <a:endParaRPr lang="en-US" sz="1000" dirty="0"/>
+          </a:p>
+        </p:txBody>
+      </p:sp>
+      <p:sp>
+        <p:nvSpPr>
+          <p:cNvPr id="22" name="frame-05-app-manager-a"/>
+          <p:cNvSpPr/>
+          <p:nvPr/>
+        </p:nvSpPr>
+        <p:spPr>
+          <a:xfrm>
+            <a:off x="574874" y="2249424"/>
+            <a:ext cx="2645012" cy="1993392"/>
           </a:xfrm>
           <a:prstGeom prst="rect">
             <a:avLst/>
@@ -16039,7 +16188,7 @@
       </p:sp>
       <p:pic>
         <p:nvPicPr>
-          <p:cNvPr id="22" name="Image 0" descr="docs/screenshots/05-app-manager-assistant.jpg">    </p:cNvPr>
+          <p:cNvPr id="23" name="Image 0" descr="docs/screenshots/05-app-manager-assistant.jpg">    </p:cNvPr>
           <p:cNvPicPr>
             <a:picLocks noChangeAspect="1"/>
           </p:cNvPicPr>
@@ -16053,8 +16202,8 @@
         </p:blipFill>
         <p:spPr>
           <a:xfrm>
-            <a:off x="507839" y="1975104"/>
-            <a:ext cx="2779081" cy="2084832"/>
+            <a:off x="593162" y="2267712"/>
+            <a:ext cx="2608436" cy="1956816"/>
           </a:xfrm>
           <a:prstGeom prst="rect">
             <a:avLst/>
@@ -16063,13 +16212,13 @@
       </p:pic>
       <p:sp>
         <p:nvSpPr>
-          <p:cNvPr id="23" name="Text 20"/>
-          <p:cNvSpPr txBox="1"/>
-          <p:nvPr/>
-        </p:nvSpPr>
-        <p:spPr>
-          <a:xfrm>
-            <a:off x="3438144" y="2011680"/>
+          <p:cNvPr id="24" name="Text 21"/>
+          <p:cNvSpPr txBox="1"/>
+          <p:nvPr/>
+        </p:nvSpPr>
+        <p:spPr>
+          <a:xfrm>
+            <a:off x="3438144" y="2304288"/>
             <a:ext cx="2520544" cy="274320"/>
           </a:xfrm>
           <a:prstGeom prst="rect">
@@ -16094,7 +16243,7 @@
                 <a:ea typeface="Arial" pitchFamily="34" charset="-122"/>
                 <a:cs typeface="Arial" pitchFamily="34" charset="-120"/>
               </a:rPr>
-              <a:t>Manager Assistant</a:t>
+              <a:t>Manager Assistant — the question</a:t>
             </a:r>
             <a:endParaRPr lang="en-US" sz="1200" dirty="0"/>
           </a:p>
@@ -16102,14 +16251,14 @@
       </p:sp>
       <p:sp>
         <p:nvSpPr>
-          <p:cNvPr id="24" name="Text 21"/>
-          <p:cNvSpPr txBox="1"/>
-          <p:nvPr/>
-        </p:nvSpPr>
-        <p:spPr>
-          <a:xfrm>
-            <a:off x="3438144" y="2304288"/>
-            <a:ext cx="2520544" cy="1719072"/>
+          <p:cNvPr id="25" name="Text 22"/>
+          <p:cNvSpPr txBox="1"/>
+          <p:nvPr/>
+        </p:nvSpPr>
+        <p:spPr>
+          <a:xfrm>
+            <a:off x="3438144" y="2596896"/>
+            <a:ext cx="2520544" cy="1591056"/>
           </a:xfrm>
           <a:prstGeom prst="rect">
             <a:avLst/>
@@ -16137,7 +16286,7 @@
                   <a:srgbClr val="5C6B64"/>
                 </a:solidFill>
               </a:rPr>
-              <a:t>Asks in plain English; the router picks a typed tool</a:t>
+              <a:t>Plain English in; the router picks one typed tool</a:t>
             </a:r>
             <a:endParaRPr lang="en-US" sz="1000" dirty="0"/>
           </a:p>
@@ -16158,7 +16307,7 @@
                   <a:srgbClr val="5C6B64"/>
                 </a:solidFill>
               </a:rPr>
-              <a:t>Answer cites every record it used</a:t>
+              <a:t>Every figure traces to a record id</a:t>
             </a:r>
             <a:endParaRPr lang="en-US" sz="1000" dirty="0"/>
           </a:p>
@@ -16179,7 +16328,7 @@
                   <a:srgbClr val="5C6B64"/>
                 </a:solidFill>
               </a:rPr>
-              <a:t>8 of 11 questions need no model call at all</a:t>
+              <a:t>Refusals read the record first, then decline</a:t>
             </a:r>
             <a:endParaRPr lang="en-US" sz="1000" dirty="0"/>
           </a:p>
@@ -16187,13 +16336,13 @@
       </p:sp>
       <p:sp>
         <p:nvSpPr>
-          <p:cNvPr id="25" name="frame-09-grafana-dashb"/>
-          <p:cNvSpPr/>
-          <p:nvPr/>
-        </p:nvSpPr>
-        <p:spPr>
-          <a:xfrm>
-            <a:off x="6214720" y="2040840"/>
+          <p:cNvPr id="26" name="frame-09-grafana-dashb"/>
+          <p:cNvSpPr/>
+          <p:nvPr/>
+        </p:nvSpPr>
+        <p:spPr>
+          <a:xfrm>
+            <a:off x="6214720" y="2269440"/>
             <a:ext cx="2825496" cy="1953360"/>
           </a:xfrm>
           <a:prstGeom prst="rect">
@@ -16212,7 +16361,7 @@
       </p:sp>
       <p:pic>
         <p:nvPicPr>
-          <p:cNvPr id="26" name="Image 1" descr="docs/screenshots/09-grafana-dashboard.jpg">    </p:cNvPr>
+          <p:cNvPr id="27" name="Image 1" descr="docs/screenshots/09-grafana-dashboard.jpg">    </p:cNvPr>
           <p:cNvPicPr>
             <a:picLocks noChangeAspect="1"/>
           </p:cNvPicPr>
@@ -16226,7 +16375,7 @@
         </p:blipFill>
         <p:spPr>
           <a:xfrm>
-            <a:off x="6233008" y="2059128"/>
+            <a:off x="6233008" y="2287728"/>
             <a:ext cx="2788920" cy="1916784"/>
           </a:xfrm>
           <a:prstGeom prst="rect">
@@ -16236,13 +16385,13 @@
       </p:pic>
       <p:sp>
         <p:nvSpPr>
-          <p:cNvPr id="27" name="Text 23"/>
-          <p:cNvSpPr txBox="1"/>
-          <p:nvPr/>
-        </p:nvSpPr>
-        <p:spPr>
-          <a:xfrm>
-            <a:off x="9168232" y="2011680"/>
+          <p:cNvPr id="28" name="Text 24"/>
+          <p:cNvSpPr txBox="1"/>
+          <p:nvPr/>
+        </p:nvSpPr>
+        <p:spPr>
+          <a:xfrm>
+            <a:off x="9168232" y="2304288"/>
             <a:ext cx="2520544" cy="274320"/>
           </a:xfrm>
           <a:prstGeom prst="rect">
@@ -16267,7 +16416,7 @@
                 <a:ea typeface="Arial" pitchFamily="34" charset="-122"/>
                 <a:cs typeface="Arial" pitchFamily="34" charset="-120"/>
               </a:rPr>
-              <a:t>Grafana — the claim, measured</a:t>
+              <a:t>Grafana — under real load</a:t>
             </a:r>
             <a:endParaRPr lang="en-US" sz="1200" dirty="0"/>
           </a:p>
@@ -16275,14 +16424,14 @@
       </p:sp>
       <p:sp>
         <p:nvSpPr>
-          <p:cNvPr id="28" name="Text 24"/>
-          <p:cNvSpPr txBox="1"/>
-          <p:nvPr/>
-        </p:nvSpPr>
-        <p:spPr>
-          <a:xfrm>
-            <a:off x="9168232" y="2304288"/>
-            <a:ext cx="2520544" cy="1719072"/>
+          <p:cNvPr id="29" name="Text 25"/>
+          <p:cNvSpPr txBox="1"/>
+          <p:nvPr/>
+        </p:nvSpPr>
+        <p:spPr>
+          <a:xfrm>
+            <a:off x="9168232" y="2596896"/>
+            <a:ext cx="2520544" cy="1591056"/>
           </a:xfrm>
           <a:prstGeom prst="rect">
             <a:avLst/>
@@ -16310,7 +16459,7 @@
                   <a:srgbClr val="5C6B64"/>
                 </a:solidFill>
               </a:rPr>
-              <a:t>Answers composed in Python: 87.5%</a:t>
+              <a:t>Ungrounded answers 0  ·  answers cut short 0</a:t>
             </a:r>
             <a:endParaRPr lang="en-US" sz="1000" dirty="0"/>
           </a:p>
@@ -16331,7 +16480,7 @@
                   <a:srgbClr val="5C6B64"/>
                 </a:solidFill>
               </a:rPr>
-              <a:t>Latency split by path: python ~0s, llm ~4-5s</a:t>
+              <a:t>p95 by path: python ~0s against llm ~10s</a:t>
             </a:r>
             <a:endParaRPr lang="en-US" sz="1000" dirty="0"/>
           </a:p>
@@ -16352,7 +16501,7 @@
                   <a:srgbClr val="5C6B64"/>
                 </a:solidFill>
               </a:rPr>
-              <a:t>GPU to 100% on the semantic queries only</a:t>
+              <a:t>Six tools in use; GPU tracks the semantic queries</a:t>
             </a:r>
             <a:endParaRPr lang="en-US" sz="1000" dirty="0"/>
           </a:p>
@@ -16360,13 +16509,13 @@
       </p:sp>
       <p:sp>
         <p:nvSpPr>
-          <p:cNvPr id="29" name="frame-08-prometheus-to"/>
-          <p:cNvSpPr/>
-          <p:nvPr/>
-        </p:nvSpPr>
-        <p:spPr>
-          <a:xfrm>
-            <a:off x="484632" y="4326840"/>
+          <p:cNvPr id="30" name="frame-08-prometheus-to"/>
+          <p:cNvSpPr/>
+          <p:nvPr/>
+        </p:nvSpPr>
+        <p:spPr>
+          <a:xfrm>
+            <a:off x="484632" y="4427424"/>
             <a:ext cx="2825496" cy="1953360"/>
           </a:xfrm>
           <a:prstGeom prst="rect">
@@ -16385,7 +16534,7 @@
       </p:sp>
       <p:pic>
         <p:nvPicPr>
-          <p:cNvPr id="30" name="Image 2" descr="docs/screenshots/08-prometheus-tool-calls.jpg">    </p:cNvPr>
+          <p:cNvPr id="31" name="Image 2" descr="docs/screenshots/08-prometheus-tool-calls.jpg">    </p:cNvPr>
           <p:cNvPicPr>
             <a:picLocks noChangeAspect="1"/>
           </p:cNvPicPr>
@@ -16399,7 +16548,7 @@
         </p:blipFill>
         <p:spPr>
           <a:xfrm>
-            <a:off x="502920" y="4345128"/>
+            <a:off x="502920" y="4445712"/>
             <a:ext cx="2788920" cy="1916784"/>
           </a:xfrm>
           <a:prstGeom prst="rect">
@@ -16409,13 +16558,13 @@
       </p:pic>
       <p:sp>
         <p:nvSpPr>
-          <p:cNvPr id="31" name="Text 26"/>
-          <p:cNvSpPr txBox="1"/>
-          <p:nvPr/>
-        </p:nvSpPr>
-        <p:spPr>
-          <a:xfrm>
-            <a:off x="3438144" y="4297680"/>
+          <p:cNvPr id="32" name="Text 27"/>
+          <p:cNvSpPr txBox="1"/>
+          <p:nvPr/>
+        </p:nvSpPr>
+        <p:spPr>
+          <a:xfrm>
+            <a:off x="3438144" y="4462272"/>
             <a:ext cx="2520544" cy="274320"/>
           </a:xfrm>
           <a:prstGeom prst="rect">
@@ -16448,14 +16597,14 @@
       </p:sp>
       <p:sp>
         <p:nvSpPr>
-          <p:cNvPr id="32" name="Text 27"/>
-          <p:cNvSpPr txBox="1"/>
-          <p:nvPr/>
-        </p:nvSpPr>
-        <p:spPr>
-          <a:xfrm>
-            <a:off x="3438144" y="4590288"/>
-            <a:ext cx="2520544" cy="1719072"/>
+          <p:cNvPr id="33" name="Text 28"/>
+          <p:cNvSpPr txBox="1"/>
+          <p:nvPr/>
+        </p:nvSpPr>
+        <p:spPr>
+          <a:xfrm>
+            <a:off x="3438144" y="4754880"/>
+            <a:ext cx="2520544" cy="1591056"/>
           </a:xfrm>
           <a:prstGeom prst="rect">
             <a:avLst/>
@@ -16483,7 +16632,7 @@
                   <a:srgbClr val="5C6B64"/>
                 </a:solidFill>
               </a:rPr>
-              <a:t>One asoia_tool_calls_total series per tool called</a:t>
+              <a:t>rate(asoia_tool_calls_total[5m]) x 60, six series</a:t>
             </a:r>
             <a:endParaRPr lang="en-US" sz="1000" dirty="0"/>
           </a:p>
@@ -16504,7 +16653,7 @@
                   <a:srgbClr val="5C6B64"/>
                 </a:solidFill>
               </a:rPr>
-              <a:t>Counters are per-process: traffic must go through</a:t>
+              <a:t>list_ros dominates; search_updates is the rare one</a:t>
             </a:r>
             <a:endParaRPr lang="en-US" sz="1000" dirty="0"/>
           </a:p>
@@ -16525,7 +16674,7 @@
                   <a:srgbClr val="5C6B64"/>
                 </a:solidFill>
               </a:rPr>
-              <a:t>the API on :8080, not a standalone script</a:t>
+              <a:t>Counters are per-process - traffic must hit the API</a:t>
             </a:r>
             <a:endParaRPr lang="en-US" sz="1000" dirty="0"/>
           </a:p>
@@ -16533,13 +16682,13 @@
       </p:sp>
       <p:sp>
         <p:nvSpPr>
-          <p:cNvPr id="33" name="frame-11-attu-collecti"/>
-          <p:cNvSpPr/>
-          <p:nvPr/>
-        </p:nvSpPr>
-        <p:spPr>
-          <a:xfrm>
-            <a:off x="6214720" y="4326840"/>
+          <p:cNvPr id="34" name="frame-11-attu-collecti"/>
+          <p:cNvSpPr/>
+          <p:nvPr/>
+        </p:nvSpPr>
+        <p:spPr>
+          <a:xfrm>
+            <a:off x="6214720" y="4427424"/>
             <a:ext cx="2825496" cy="1953360"/>
           </a:xfrm>
           <a:prstGeom prst="rect">
@@ -16558,7 +16707,7 @@
       </p:sp>
       <p:pic>
         <p:nvPicPr>
-          <p:cNvPr id="34" name="Image 3" descr="docs/screenshots/11-attu-collection-1690.jpg">    </p:cNvPr>
+          <p:cNvPr id="35" name="Image 3" descr="docs/screenshots/11-attu-collection-1690.jpg">    </p:cNvPr>
           <p:cNvPicPr>
             <a:picLocks noChangeAspect="1"/>
           </p:cNvPicPr>
@@ -16572,7 +16721,7 @@
         </p:blipFill>
         <p:spPr>
           <a:xfrm>
-            <a:off x="6233008" y="4345128"/>
+            <a:off x="6233008" y="4445712"/>
             <a:ext cx="2788920" cy="1916784"/>
           </a:xfrm>
           <a:prstGeom prst="rect">
@@ -16582,13 +16731,13 @@
       </p:pic>
       <p:sp>
         <p:nvSpPr>
-          <p:cNvPr id="35" name="Text 29"/>
-          <p:cNvSpPr txBox="1"/>
-          <p:nvPr/>
-        </p:nvSpPr>
-        <p:spPr>
-          <a:xfrm>
-            <a:off x="9168232" y="4297680"/>
+          <p:cNvPr id="36" name="Text 30"/>
+          <p:cNvSpPr txBox="1"/>
+          <p:nvPr/>
+        </p:nvSpPr>
+        <p:spPr>
+          <a:xfrm>
+            <a:off x="9168232" y="4462272"/>
             <a:ext cx="2520544" cy="274320"/>
           </a:xfrm>
           <a:prstGeom prst="rect">
@@ -16613,7 +16762,7 @@
                 <a:ea typeface="Arial" pitchFamily="34" charset="-122"/>
                 <a:cs typeface="Arial" pitchFamily="34" charset="-120"/>
               </a:rPr>
-              <a:t>Attu — the vector store</a:t>
+              <a:t>Milvus — 1,690 vectors, and the rerank</a:t>
             </a:r>
             <a:endParaRPr lang="en-US" sz="1200" dirty="0"/>
           </a:p>
@@ -16621,14 +16770,14 @@
       </p:sp>
       <p:sp>
         <p:nvSpPr>
-          <p:cNvPr id="36" name="Text 30"/>
-          <p:cNvSpPr txBox="1"/>
-          <p:nvPr/>
-        </p:nvSpPr>
-        <p:spPr>
-          <a:xfrm>
-            <a:off x="9168232" y="4590288"/>
-            <a:ext cx="2520544" cy="1719072"/>
+          <p:cNvPr id="37" name="Text 31"/>
+          <p:cNvSpPr txBox="1"/>
+          <p:nvPr/>
+        </p:nvSpPr>
+        <p:spPr>
+          <a:xfrm>
+            <a:off x="9168232" y="4754880"/>
+            <a:ext cx="2520544" cy="1591056"/>
           </a:xfrm>
           <a:prstGeom prst="rect">
             <a:avLst/>
@@ -16656,7 +16805,7 @@
                   <a:srgbClr val="5C6B64"/>
                 </a:solidFill>
               </a:rPr>
-              <a:t>updates collection, 1,690 entities</a:t>
+              <a:t>updates collection, 1,690 entities at 1024 dims</a:t>
             </a:r>
             <a:endParaRPr lang="en-US" sz="1000" dirty="0"/>
           </a:p>
@@ -16677,7 +16826,7 @@
                   <a:srgbClr val="5C6B64"/>
                 </a:solidFill>
               </a:rPr>
-              <a:t>Built by nv-embedqa-e5-v5 at 1024 dimensions</a:t>
+              <a:t>"whistling noise": vector-only tops out at knocking</a:t>
             </a:r>
             <a:endParaRPr lang="en-US" sz="1000" dirty="0"/>
           </a:p>
@@ -16698,7 +16847,28 @@
                   <a:srgbClr val="5C6B64"/>
                 </a:solidFill>
               </a:rPr>
-              <a:t>Rebuilt whenever the embedder changes width</a:t>
+              <a:t>and vibration; the reranker returns blowing-noise</a:t>
+            </a:r>
+            <a:endParaRPr lang="en-US" sz="1000" dirty="0"/>
+          </a:p>
+          <a:p>
+            <a:pPr marL="342900" indent="-342900">
+              <a:lnSpc>
+                <a:spcPct val="100000"/>
+              </a:lnSpc>
+              <a:spcAft>
+                <a:spcPts val="300"/>
+              </a:spcAft>
+              <a:buSzPct val="100000"/>
+              <a:buChar char="•"/>
+            </a:pPr>
+            <a:r>
+              <a:rPr lang="en-US" sz="1000" dirty="0">
+                <a:solidFill>
+                  <a:srgbClr val="5C6B64"/>
+                </a:solidFill>
+              </a:rPr>
+              <a:t>passages instead - a different set of ROs entirely</a:t>
             </a:r>
             <a:endParaRPr lang="en-US" sz="1000" dirty="0"/>
           </a:p>

--- a/docs/architecture-deck.pptx
+++ b/docs/architecture-deck.pptx
@@ -115,42 +115,42 @@
   <p:extLst>
     <p:ext uri="{521415D9-36F7-43E2-AB2F-B90AF26B5E84}">
       <p14:sectionLst xmlns:p14="http://schemas.microsoft.com/office/powerpoint/2010/main">
-        <p14:section name="Overview" id="{a3756a23-96bd-b45d-e020-9a54a46de9c5}">
+        <p14:section name="Overview" id="{aa72aea1-f9e1-95e4-5f39-f47c87cd18d4}">
           <p14:sldIdLst>
             <p14:sldId id="256"/>
           </p14:sldIdLst>
         </p14:section>
-        <p14:section name="Architecture" id="{d3dbc883-61b1-d447-68ac-9bec53bd81f9}">
+        <p14:section name="Architecture" id="{550a3267-1895-7998-6c31-42f755f35388}">
           <p14:sldIdLst>
             <p14:sldId id="257"/>
           </p14:sldIdLst>
         </p14:section>
-        <p14:section name="Application flow" id="{28648ea2-0795-a726-7b18-106b7f69a858}">
+        <p14:section name="Application flow" id="{dd905b96-94bf-340a-7634-72b8bbc7133c}">
           <p14:sldIdLst>
             <p14:sldId id="258"/>
           </p14:sldIdLst>
         </p14:section>
-        <p14:section name="Components" id="{b4ac6365-6bd0-b9ab-5249-bf6614cce02a}">
+        <p14:section name="Components" id="{d1d95a51-c19c-fd9d-5ae0-6e3de6b33c06}">
           <p14:sldIdLst>
             <p14:sldId id="259"/>
           </p14:sldIdLst>
         </p14:section>
-        <p14:section name="Deployment" id="{12b01c5a-0714-3f37-c0b5-55dcf017e328}">
+        <p14:section name="Deployment" id="{a105c1b3-5aa9-3f71-30d7-d3ee12e33d8a}">
           <p14:sldIdLst>
             <p14:sldId id="260"/>
           </p14:sldIdLst>
         </p14:section>
-        <p14:section name="Data model" id="{cb51853f-144a-2e55-faae-3213ad8c4121}">
+        <p14:section name="Data model" id="{92119576-6055-2846-3ce4-fe6e691ff3d3}">
           <p14:sldIdLst>
             <p14:sldId id="261"/>
           </p14:sldIdLst>
         </p14:section>
-        <p14:section name="Lifecycle" id="{f48a0f5f-f80f-7375-f976-0b0bf888d00e}">
+        <p14:section name="Lifecycle" id="{62b8451e-4381-62ac-abf1-5cf666b73f13}">
           <p14:sldIdLst>
             <p14:sldId id="262"/>
           </p14:sldIdLst>
         </p14:section>
-        <p14:section name="Usage" id="{beaa20f0-a18a-43bd-33dd-b474c2aa1134}">
+        <p14:section name="Usage" id="{a3765b3e-ac86-40ef-23dc-d49335b4f7a7}">
           <p14:sldIdLst>
             <p14:sldId id="263"/>
             <p14:sldId id="264"/>
@@ -16682,7 +16682,7 @@
       </p:sp>
       <p:sp>
         <p:nvSpPr>
-          <p:cNvPr id="34" name="frame-11-attu-collecti"/>
+          <p:cNvPr id="34" name="frame-11-attu-schema-1"/>
           <p:cNvSpPr/>
           <p:nvPr/>
         </p:nvSpPr>
@@ -16707,7 +16707,7 @@
       </p:sp>
       <p:pic>
         <p:nvPicPr>
-          <p:cNvPr id="35" name="Image 3" descr="docs/screenshots/11-attu-collection-1690.jpg">    </p:cNvPr>
+          <p:cNvPr id="35" name="Image 3" descr="docs/screenshots/11-attu-schema-1024.jpg">    </p:cNvPr>
           <p:cNvPicPr>
             <a:picLocks noChangeAspect="1"/>
           </p:cNvPicPr>
@@ -16762,7 +16762,7 @@
                 <a:ea typeface="Arial" pitchFamily="34" charset="-122"/>
                 <a:cs typeface="Arial" pitchFamily="34" charset="-120"/>
               </a:rPr>
-              <a:t>Milvus — 1,690 vectors, and the rerank</a:t>
+              <a:t>Milvus in Attu — loaded and indexed</a:t>
             </a:r>
             <a:endParaRPr lang="en-US" sz="1200" dirty="0"/>
           </a:p>
@@ -16805,7 +16805,7 @@
                   <a:srgbClr val="5C6B64"/>
                 </a:solidFill>
               </a:rPr>
-              <a:t>updates collection, 1,690 entities at 1024 dims</a:t>
+              <a:t>vector: FloatVector(1024), AUTOINDEX(COSINE)</a:t>
             </a:r>
             <a:endParaRPr lang="en-US" sz="1000" dirty="0"/>
           </a:p>
@@ -16826,7 +16826,7 @@
                   <a:srgbClr val="5C6B64"/>
                 </a:solidFill>
               </a:rPr>
-              <a:t>"whistling noise": vector-only tops out at knocking</a:t>
+              <a:t>Loaded, replica 1, entity count 1,690</a:t>
             </a:r>
             <a:endParaRPr lang="en-US" sz="1000" dirty="0"/>
           </a:p>
@@ -16847,7 +16847,7 @@
                   <a:srgbClr val="5C6B64"/>
                 </a:solidFill>
               </a:rPr>
-              <a:t>and vibration; the reranker returns blowing-noise</a:t>
+              <a:t>Rerank earns its place: for "whistling noise",</a:t>
             </a:r>
             <a:endParaRPr lang="en-US" sz="1000" dirty="0"/>
           </a:p>
@@ -16868,7 +16868,28 @@
                   <a:srgbClr val="5C6B64"/>
                 </a:solidFill>
               </a:rPr>
-              <a:t>passages instead - a different set of ROs entirely</a:t>
+              <a:t>vector-only returns knocking and vibration; the</a:t>
+            </a:r>
+            <a:endParaRPr lang="en-US" sz="1000" dirty="0"/>
+          </a:p>
+          <a:p>
+            <a:pPr marL="342900" indent="-342900">
+              <a:lnSpc>
+                <a:spcPct val="100000"/>
+              </a:lnSpc>
+              <a:spcAft>
+                <a:spcPts val="300"/>
+              </a:spcAft>
+              <a:buSzPct val="100000"/>
+              <a:buChar char="•"/>
+            </a:pPr>
+            <a:r>
+              <a:rPr lang="en-US" sz="1000" dirty="0">
+                <a:solidFill>
+                  <a:srgbClr val="5C6B64"/>
+                </a:solidFill>
+              </a:rPr>
+              <a:t>reranker returns blowing-noise - different ROs</a:t>
             </a:r>
             <a:endParaRPr lang="en-US" sz="1000" dirty="0"/>
           </a:p>

--- a/docs/architecture-deck.pptx
+++ b/docs/architecture-deck.pptx
@@ -115,42 +115,42 @@
   <p:extLst>
     <p:ext uri="{521415D9-36F7-43E2-AB2F-B90AF26B5E84}">
       <p14:sectionLst xmlns:p14="http://schemas.microsoft.com/office/powerpoint/2010/main">
-        <p14:section name="Overview" id="{aa72aea1-f9e1-95e4-5f39-f47c87cd18d4}">
+        <p14:section name="Overview" id="{7991033a-3557-91d8-67b4-f80ca0461b86}">
           <p14:sldIdLst>
             <p14:sldId id="256"/>
           </p14:sldIdLst>
         </p14:section>
-        <p14:section name="Architecture" id="{550a3267-1895-7998-6c31-42f755f35388}">
+        <p14:section name="Architecture" id="{4b21b31d-b010-7554-c7ce-799b18d1abcc}">
           <p14:sldIdLst>
             <p14:sldId id="257"/>
           </p14:sldIdLst>
         </p14:section>
-        <p14:section name="Application flow" id="{dd905b96-94bf-340a-7634-72b8bbc7133c}">
+        <p14:section name="Application flow" id="{d08762ff-59c2-cf77-32c3-ad132fd55755}">
           <p14:sldIdLst>
             <p14:sldId id="258"/>
           </p14:sldIdLst>
         </p14:section>
-        <p14:section name="Components" id="{d1d95a51-c19c-fd9d-5ae0-6e3de6b33c06}">
+        <p14:section name="Components" id="{82ae09c1-8ecd-d96e-c350-bdb452d3410e}">
           <p14:sldIdLst>
             <p14:sldId id="259"/>
           </p14:sldIdLst>
         </p14:section>
-        <p14:section name="Deployment" id="{a105c1b3-5aa9-3f71-30d7-d3ee12e33d8a}">
+        <p14:section name="Deployment" id="{42514254-8c0a-0bea-cc9c-58f0a8d130f8}">
           <p14:sldIdLst>
             <p14:sldId id="260"/>
           </p14:sldIdLst>
         </p14:section>
-        <p14:section name="Data model" id="{92119576-6055-2846-3ce4-fe6e691ff3d3}">
+        <p14:section name="Data model" id="{3f6ff96d-7398-ee0b-5844-59223d098231}">
           <p14:sldIdLst>
             <p14:sldId id="261"/>
           </p14:sldIdLst>
         </p14:section>
-        <p14:section name="Lifecycle" id="{62b8451e-4381-62ac-abf1-5cf666b73f13}">
+        <p14:section name="Lifecycle" id="{812d80db-6352-035c-be01-faf04f78df51}">
           <p14:sldIdLst>
             <p14:sldId id="262"/>
           </p14:sldIdLst>
         </p14:section>
-        <p14:section name="Usage" id="{a3765b3e-ac86-40ef-23dc-d49335b4f7a7}">
+        <p14:section name="Usage" id="{a0e62173-3ac5-3625-e89d-299c6de279a7}">
           <p14:sldIdLst>
             <p14:sldId id="263"/>
             <p14:sldId id="264"/>
@@ -1176,7 +1176,7 @@
           <a:p>
             <a:r>
               <a:rPr lang="en-US" dirty="0"/>
-              <a:t>The flow strip is the read path. The four frames are the same run seen from the app, from Grafana, from Prometheus and from the store. 87.5% composed in Python is the project's thesis, and Grafana reports it independently of the eleven timings in docs/EXAMPLES.md.</a:t>
+              <a:t>The flow strip is the read path. The four frames are the same run seen from the app, from Grafana, from Prometheus and from the store. On the Python share: do NOT claim Grafana corroborates the eleven timings in docs/EXAMPLES.md - it measures a different thing. Over 80 answers, 92.5% finished on the Python path and 86.25% were Python by design once the 5 model fallbacks are removed.</a:t>
             </a:r>
             <a:endParaRPr lang="en-US" dirty="0"/>
           </a:p>
@@ -16459,7 +16459,7 @@
                   <a:srgbClr val="5C6B64"/>
                 </a:solidFill>
               </a:rPr>
-              <a:t>Ungrounded answers 0  ·  answers cut short 0</a:t>
+              <a:t>Composed in Python by design 94.5% over 1h -</a:t>
             </a:r>
             <a:endParaRPr lang="en-US" sz="1000" dirty="0"/>
           </a:p>
@@ -16480,7 +16480,7 @@
                   <a:srgbClr val="5C6B64"/>
                 </a:solidFill>
               </a:rPr>
-              <a:t>p95 by path: python ~0s against llm ~10s</a:t>
+              <a:t>model fallbacks subtracted, so a timing-out LLM</a:t>
             </a:r>
             <a:endParaRPr lang="en-US" sz="1000" dirty="0"/>
           </a:p>
@@ -16501,7 +16501,28 @@
                   <a:srgbClr val="5C6B64"/>
                 </a:solidFill>
               </a:rPr>
-              <a:t>Six tools in use; GPU tracks the semantic queries</a:t>
+              <a:t>cannot inflate it</a:t>
+            </a:r>
+            <a:endParaRPr lang="en-US" sz="1000" dirty="0"/>
+          </a:p>
+          <a:p>
+            <a:pPr marL="342900" indent="-342900">
+              <a:lnSpc>
+                <a:spcPct val="100000"/>
+              </a:lnSpc>
+              <a:spcAft>
+                <a:spcPts val="300"/>
+              </a:spcAft>
+              <a:buSzPct val="100000"/>
+              <a:buChar char="•"/>
+            </a:pPr>
+            <a:r>
+              <a:rPr lang="en-US" sz="1000" dirty="0">
+                <a:solidFill>
+                  <a:srgbClr val="5C6B64"/>
+                </a:solidFill>
+              </a:rPr>
+              <a:t>Ungrounded 0  ·  cut short 0  ·  six tools in use</a:t>
             </a:r>
             <a:endParaRPr lang="en-US" sz="1000" dirty="0"/>
           </a:p>

--- a/docs/architecture-deck.pptx
+++ b/docs/architecture-deck.pptx
@@ -115,42 +115,42 @@
   <p:extLst>
     <p:ext uri="{521415D9-36F7-43E2-AB2F-B90AF26B5E84}">
       <p14:sectionLst xmlns:p14="http://schemas.microsoft.com/office/powerpoint/2010/main">
-        <p14:section name="Overview" id="{7991033a-3557-91d8-67b4-f80ca0461b86}">
+        <p14:section name="Overview" id="{f7ea8cff-3fed-7770-df0b-b0e5e8a22984}">
           <p14:sldIdLst>
             <p14:sldId id="256"/>
           </p14:sldIdLst>
         </p14:section>
-        <p14:section name="Architecture" id="{4b21b31d-b010-7554-c7ce-799b18d1abcc}">
+        <p14:section name="Architecture" id="{0d7afdcc-c5c9-859a-d044-835b2d47e12c}">
           <p14:sldIdLst>
             <p14:sldId id="257"/>
           </p14:sldIdLst>
         </p14:section>
-        <p14:section name="Application flow" id="{d08762ff-59c2-cf77-32c3-ad132fd55755}">
+        <p14:section name="Application flow" id="{f3966f74-ec28-e476-82d0-db023df682ff}">
           <p14:sldIdLst>
             <p14:sldId id="258"/>
           </p14:sldIdLst>
         </p14:section>
-        <p14:section name="Components" id="{82ae09c1-8ecd-d96e-c350-bdb452d3410e}">
+        <p14:section name="Components" id="{0fa1aada-1b44-d4f4-111c-8d62b24a5a94}">
           <p14:sldIdLst>
             <p14:sldId id="259"/>
           </p14:sldIdLst>
         </p14:section>
-        <p14:section name="Deployment" id="{42514254-8c0a-0bea-cc9c-58f0a8d130f8}">
+        <p14:section name="Deployment" id="{fc5fc676-62ea-9649-fb40-eece53d3c589}">
           <p14:sldIdLst>
             <p14:sldId id="260"/>
           </p14:sldIdLst>
         </p14:section>
-        <p14:section name="Data model" id="{3f6ff96d-7398-ee0b-5844-59223d098231}">
+        <p14:section name="Data model" id="{f9f6ce6c-6a20-5f09-ef9a-5cdc8645b2ac}">
           <p14:sldIdLst>
             <p14:sldId id="261"/>
           </p14:sldIdLst>
         </p14:section>
-        <p14:section name="Lifecycle" id="{812d80db-6352-035c-be01-faf04f78df51}">
+        <p14:section name="Lifecycle" id="{8cc33ff2-c97e-999d-a292-9cca068c4de2}">
           <p14:sldIdLst>
             <p14:sldId id="262"/>
           </p14:sldIdLst>
         </p14:section>
-        <p14:section name="Usage" id="{a0e62173-3ac5-3625-e89d-299c6de279a7}">
+        <p14:section name="Usage" id="{4142e356-d2de-d141-c22c-29d912db5a47}">
           <p14:sldIdLst>
             <p14:sldId id="263"/>
             <p14:sldId id="264"/>
@@ -16243,7 +16243,7 @@
                 <a:ea typeface="Arial" pitchFamily="34" charset="-122"/>
                 <a:cs typeface="Arial" pitchFamily="34" charset="-120"/>
               </a:rPr>
-              <a:t>Manager Assistant — the question</a:t>
+              <a:t>The question a service manager asks</a:t>
             </a:r>
             <a:endParaRPr lang="en-US" sz="1200" dirty="0"/>
           </a:p>
@@ -16286,7 +16286,7 @@
                   <a:srgbClr val="5C6B64"/>
                 </a:solidFill>
               </a:rPr>
-              <a:t>Plain English in; the router picks one typed tool</a:t>
+              <a:t>Plain English in; a keyword router picks one typed</a:t>
             </a:r>
             <a:endParaRPr lang="en-US" sz="1000" dirty="0"/>
           </a:p>
@@ -16307,7 +16307,7 @@
                   <a:srgbClr val="5C6B64"/>
                 </a:solidFill>
               </a:rPr>
-              <a:t>Every figure traces to a record id</a:t>
+              <a:t>tool - no model call to decide what to run</a:t>
             </a:r>
             <a:endParaRPr lang="en-US" sz="1000" dirty="0"/>
           </a:p>
@@ -16328,7 +16328,28 @@
                   <a:srgbClr val="5C6B64"/>
                 </a:solidFill>
               </a:rPr>
-              <a:t>Refusals read the record first, then decline</a:t>
+              <a:t>Every figure carries the record id it came from</a:t>
+            </a:r>
+            <a:endParaRPr lang="en-US" sz="1000" dirty="0"/>
+          </a:p>
+          <a:p>
+            <a:pPr marL="342900" indent="-342900">
+              <a:lnSpc>
+                <a:spcPct val="100000"/>
+              </a:lnSpc>
+              <a:spcAft>
+                <a:spcPts val="300"/>
+              </a:spcAft>
+              <a:buSzPct val="100000"/>
+              <a:buChar char="•"/>
+            </a:pPr>
+            <a:r>
+              <a:rPr lang="en-US" sz="1000" dirty="0">
+                <a:solidFill>
+                  <a:srgbClr val="5C6B64"/>
+                </a:solidFill>
+              </a:rPr>
+              <a:t>Measured: 9 of 11 questions answer in under 0.11s</a:t>
             </a:r>
             <a:endParaRPr lang="en-US" sz="1000" dirty="0"/>
           </a:p>
@@ -16416,7 +16437,7 @@
                 <a:ea typeface="Arial" pitchFamily="34" charset="-122"/>
                 <a:cs typeface="Arial" pitchFamily="34" charset="-120"/>
               </a:rPr>
-              <a:t>Grafana — under real load</a:t>
+              <a:t>Grafana — the thesis, measured</a:t>
             </a:r>
             <a:endParaRPr lang="en-US" sz="1200" dirty="0"/>
           </a:p>
@@ -16459,7 +16480,7 @@
                   <a:srgbClr val="5C6B64"/>
                 </a:solidFill>
               </a:rPr>
-              <a:t>Composed in Python by design 94.5% over 1h -</a:t>
+              <a:t>Answers composed in Python 88.3% over the hour</a:t>
             </a:r>
             <a:endParaRPr lang="en-US" sz="1000" dirty="0"/>
           </a:p>
@@ -16480,7 +16501,7 @@
                   <a:srgbClr val="5C6B64"/>
                 </a:solidFill>
               </a:rPr>
-              <a:t>model fallbacks subtracted, so a timing-out LLM</a:t>
+              <a:t>Ungrounded 0  ·  cut short 0  ·  rail blocks 0</a:t>
             </a:r>
             <a:endParaRPr lang="en-US" sz="1000" dirty="0"/>
           </a:p>
@@ -16501,7 +16522,7 @@
                   <a:srgbClr val="5C6B64"/>
                 </a:solidFill>
               </a:rPr>
-              <a:t>cannot inflate it</a:t>
+              <a:t>p50 by path: python ~0s against llm ~3s - and the</a:t>
             </a:r>
             <a:endParaRPr lang="en-US" sz="1000" dirty="0"/>
           </a:p>
@@ -16522,7 +16543,7 @@
                   <a:srgbClr val="5C6B64"/>
                 </a:solidFill>
               </a:rPr>
-              <a:t>Ungrounded 0  ·  cut short 0  ·  six tools in use</a:t>
+              <a:t>step down at 16:40 is the guided-JSON fix landing</a:t>
             </a:r>
             <a:endParaRPr lang="en-US" sz="1000" dirty="0"/>
           </a:p>
@@ -16610,7 +16631,7 @@
                 <a:ea typeface="Arial" pitchFamily="34" charset="-122"/>
                 <a:cs typeface="Arial" pitchFamily="34" charset="-120"/>
               </a:rPr>
-              <a:t>Prometheus — which tools ran</a:t>
+              <a:t>Prometheus — which tools actually ran</a:t>
             </a:r>
             <a:endParaRPr lang="en-US" sz="1200" dirty="0"/>
           </a:p>
@@ -16674,7 +16695,7 @@
                   <a:srgbClr val="5C6B64"/>
                 </a:solidFill>
               </a:rPr>
-              <a:t>list_ros dominates; search_updates is the rare one</a:t>
+              <a:t>list_ros peaks ~10/min; search_updates is the rare</a:t>
             </a:r>
             <a:endParaRPr lang="en-US" sz="1000" dirty="0"/>
           </a:p>
@@ -16695,7 +16716,28 @@
                   <a:srgbClr val="5C6B64"/>
                 </a:solidFill>
               </a:rPr>
-              <a:t>Counters are per-process - traffic must hit the API</a:t>
+              <a:t>one, because retrieval is the minority path here</a:t>
+            </a:r>
+            <a:endParaRPr lang="en-US" sz="1000" dirty="0"/>
+          </a:p>
+          <a:p>
+            <a:pPr marL="342900" indent="-342900">
+              <a:lnSpc>
+                <a:spcPct val="100000"/>
+              </a:lnSpc>
+              <a:spcAft>
+                <a:spcPts val="300"/>
+              </a:spcAft>
+              <a:buSzPct val="100000"/>
+              <a:buChar char="•"/>
+            </a:pPr>
+            <a:r>
+              <a:rPr lang="en-US" sz="1000" dirty="0">
+                <a:solidFill>
+                  <a:srgbClr val="5C6B64"/>
+                </a:solidFill>
+              </a:rPr>
+              <a:t>Counters are per-process: load must hit the API</a:t>
             </a:r>
             <a:endParaRPr lang="en-US" sz="1000" dirty="0"/>
           </a:p>
@@ -16783,7 +16825,7 @@
                 <a:ea typeface="Arial" pitchFamily="34" charset="-122"/>
                 <a:cs typeface="Arial" pitchFamily="34" charset="-120"/>
               </a:rPr>
-              <a:t>Milvus in Attu — loaded and indexed</a:t>
+              <a:t>Milvus in Attu — the store, in full</a:t>
             </a:r>
             <a:endParaRPr lang="en-US" sz="1200" dirty="0"/>
           </a:p>
@@ -16847,7 +16889,7 @@
                   <a:srgbClr val="5C6B64"/>
                 </a:solidFill>
               </a:rPr>
-              <a:t>Loaded, replica 1, entity count 1,690</a:t>
+              <a:t>Loaded, replica 1, entity count 1,690, 13 fields</a:t>
             </a:r>
             <a:endParaRPr lang="en-US" sz="1000" dirty="0"/>
           </a:p>
@@ -16868,7 +16910,7 @@
                   <a:srgbClr val="5C6B64"/>
                 </a:solidFill>
               </a:rPr>
-              <a:t>Rerank earns its place: for "whistling noise",</a:t>
+              <a:t>Width is load-bearing: the hosted embedder is 2048,</a:t>
             </a:r>
             <a:endParaRPr lang="en-US" sz="1000" dirty="0"/>
           </a:p>
@@ -16889,28 +16931,7 @@
                   <a:srgbClr val="5C6B64"/>
                 </a:solidFill>
               </a:rPr>
-              <a:t>vector-only returns knocking and vibration; the</a:t>
-            </a:r>
-            <a:endParaRPr lang="en-US" sz="1000" dirty="0"/>
-          </a:p>
-          <a:p>
-            <a:pPr marL="342900" indent="-342900">
-              <a:lnSpc>
-                <a:spcPct val="100000"/>
-              </a:lnSpc>
-              <a:spcAft>
-                <a:spcPts val="300"/>
-              </a:spcAft>
-              <a:buSzPct val="100000"/>
-              <a:buChar char="•"/>
-            </a:pPr>
-            <a:r>
-              <a:rPr lang="en-US" sz="1000" dirty="0">
-                <a:solidFill>
-                  <a:srgbClr val="5C6B64"/>
-                </a:solidFill>
-              </a:rPr>
-              <a:t>reranker returns blowing-noise - different ROs</a:t>
+              <a:t>so switching mode without rebuilding breaks search</a:t>
             </a:r>
             <a:endParaRPr lang="en-US" sz="1000" dirty="0"/>
           </a:p>
@@ -17137,7 +17158,7 @@
                   <a:srgbClr val="5C6B64"/>
                 </a:solidFill>
               </a:rPr>
-              <a:t>Every RO, filtered to safety, blocked, at-risk or waiting</a:t>
+              <a:t>400 live ROs, filtered to safety, blocked, at-risk or waiting — each row says WHY, with the measurement against its limit</a:t>
             </a:r>
             <a:endParaRPr lang="en-US" sz="1000" dirty="0"/>
           </a:p>
@@ -17264,7 +17285,7 @@
                   <a:srgbClr val="5C6B64"/>
                 </a:solidFill>
               </a:rPr>
-              <a:t>State folded from the event log, with the updates as written</a:t>
+              <a:t>State folded from the event log rather than stored, beside the technician updates exactly as written</a:t>
             </a:r>
             <a:endParaRPr lang="en-US" sz="1000" dirty="0"/>
           </a:p>
@@ -17272,7 +17293,7 @@
       </p:sp>
       <p:sp>
         <p:nvSpPr>
-          <p:cNvPr id="12" name="frame-03-app-technicia"/>
+          <p:cNvPr id="12" name="frame-04-app-shift-han"/>
           <p:cNvSpPr/>
           <p:nvPr/>
         </p:nvSpPr>
@@ -17297,7 +17318,7 @@
       </p:sp>
       <p:pic>
         <p:nvPicPr>
-          <p:cNvPr id="13" name="Image 2" descr="docs/screenshots/03-app-technician-update.jpg">    </p:cNvPr>
+          <p:cNvPr id="13" name="Image 2" descr="docs/screenshots/04-app-shift-handover.jpg">    </p:cNvPr>
           <p:cNvPicPr>
             <a:picLocks noChangeAspect="1"/>
           </p:cNvPicPr>
@@ -17352,7 +17373,7 @@
                 <a:ea typeface="Arial" pitchFamily="34" charset="-122"/>
                 <a:cs typeface="Arial" pitchFamily="34" charset="-120"/>
               </a:rPr>
-              <a:t>Technician Update</a:t>
+              <a:t>Shift Handover</a:t>
             </a:r>
             <a:endParaRPr lang="en-US" sz="1200" dirty="0"/>
           </a:p>
@@ -17391,7 +17412,7 @@
                   <a:srgbClr val="5C6B64"/>
                 </a:solidFill>
               </a:rPr>
-              <a:t>Log work by voice or text, then read the diff card</a:t>
+              <a:t>The brief a manager reads at changeover: safety first, then breached, at-risk, blocked — composed in 0.05s</a:t>
             </a:r>
             <a:endParaRPr lang="en-US" sz="1000" dirty="0"/>
           </a:p>
@@ -17399,7 +17420,7 @@
       </p:sp>
       <p:sp>
         <p:nvSpPr>
-          <p:cNvPr id="16" name="frame-04-app-shift-han"/>
+          <p:cNvPr id="16" name="frame-03-app-technicia"/>
           <p:cNvSpPr/>
           <p:nvPr/>
         </p:nvSpPr>
@@ -17424,7 +17445,7 @@
       </p:sp>
       <p:pic>
         <p:nvPicPr>
-          <p:cNvPr id="17" name="Image 3" descr="docs/screenshots/04-app-shift-handover.jpg">    </p:cNvPr>
+          <p:cNvPr id="17" name="Image 3" descr="docs/screenshots/03-app-technician-update.jpg">    </p:cNvPr>
           <p:cNvPicPr>
             <a:picLocks noChangeAspect="1"/>
           </p:cNvPicPr>
@@ -17479,7 +17500,7 @@
                 <a:ea typeface="Arial" pitchFamily="34" charset="-122"/>
                 <a:cs typeface="Arial" pitchFamily="34" charset="-120"/>
               </a:rPr>
-              <a:t>Shift Handover</a:t>
+              <a:t>Technician Update</a:t>
             </a:r>
             <a:endParaRPr lang="en-US" sz="1200" dirty="0"/>
           </a:p>
@@ -17518,7 +17539,7 @@
                   <a:srgbClr val="5C6B64"/>
                 </a:solidFill>
               </a:rPr>
-              <a:t>Prioritised brief: safety, breached, at-risk, blocked</a:t>
+              <a:t>Dictate or type the update; the diff card shows exactly what changed in the record, for confirmation before it lands</a:t>
             </a:r>
             <a:endParaRPr lang="en-US" sz="1000" dirty="0"/>
           </a:p>
@@ -17526,14 +17547,14 @@
       </p:sp>
       <p:sp>
         <p:nvSpPr>
-          <p:cNvPr id="20" name="frame-06-app-data-and-"/>
-          <p:cNvSpPr/>
-          <p:nvPr/>
-        </p:nvSpPr>
-        <p:spPr>
-          <a:xfrm>
-            <a:off x="4809909" y="4041648"/>
-            <a:ext cx="2571878" cy="1938528"/>
+          <p:cNvPr id="20" name="frame-07-prometheus-ta"/>
+          <p:cNvSpPr/>
+          <p:nvPr/>
+        </p:nvSpPr>
+        <p:spPr>
+          <a:xfrm>
+            <a:off x="4693890" y="4041648"/>
+            <a:ext cx="2803916" cy="1938528"/>
           </a:xfrm>
           <a:prstGeom prst="rect">
             <a:avLst/>
@@ -17551,7 +17572,7 @@
       </p:sp>
       <p:pic>
         <p:nvPicPr>
-          <p:cNvPr id="21" name="Image 4" descr="docs/screenshots/06-app-data-and-retrieval.jpg">    </p:cNvPr>
+          <p:cNvPr id="21" name="Image 4" descr="docs/screenshots/07-prometheus-targets.jpg">    </p:cNvPr>
           <p:cNvPicPr>
             <a:picLocks noChangeAspect="1"/>
           </p:cNvPicPr>
@@ -17565,8 +17586,8 @@
         </p:blipFill>
         <p:spPr>
           <a:xfrm>
-            <a:off x="4828197" y="4059936"/>
-            <a:ext cx="2535302" cy="1901952"/>
+            <a:off x="4712178" y="4059936"/>
+            <a:ext cx="2767340" cy="1901952"/>
           </a:xfrm>
           <a:prstGeom prst="rect">
             <a:avLst/>
@@ -17606,7 +17627,7 @@
                 <a:ea typeface="Arial" pitchFamily="34" charset="-122"/>
                 <a:cs typeface="Arial" pitchFamily="34" charset="-120"/>
               </a:rPr>
-              <a:t>Data &amp; Retrieval</a:t>
+              <a:t>Prometheus targets</a:t>
             </a:r>
             <a:endParaRPr lang="en-US" sz="1200" dirty="0"/>
           </a:p>
@@ -17645,7 +17666,7 @@
                   <a:srgbClr val="5C6B64"/>
                 </a:solidFill>
               </a:rPr>
-              <a:t>Points at the store consoles rather than embedding them</a:t>
+              <a:t>Both scrape jobs up: the app on :9400 and NVIDIA DCGM on :9401, which is what puts real GPU telemetry on the dashboard</a:t>
             </a:r>
             <a:endParaRPr lang="en-US" sz="1000" dirty="0"/>
           </a:p>
@@ -17772,7 +17793,7 @@
                   <a:srgbClr val="5C6B64"/>
                 </a:solidFill>
               </a:rPr>
-              <a:t>The system of record, read-write, bound to loopback</a:t>
+              <a:t>The system of record itself — 8 tables, 12,266 rows. An operator view, deliberately outside the advisor's UI</a:t>
             </a:r>
             <a:endParaRPr lang="en-US" sz="1000" dirty="0"/>
           </a:p>

--- a/docs/architecture-deck.pptx
+++ b/docs/architecture-deck.pptx
@@ -115,42 +115,42 @@
   <p:extLst>
     <p:ext uri="{521415D9-36F7-43E2-AB2F-B90AF26B5E84}">
       <p14:sectionLst xmlns:p14="http://schemas.microsoft.com/office/powerpoint/2010/main">
-        <p14:section name="Overview" id="{f7ea8cff-3fed-7770-df0b-b0e5e8a22984}">
+        <p14:section name="Overview" id="{93c96ab4-5843-eb7f-410c-0b54d0a9d44b}">
           <p14:sldIdLst>
             <p14:sldId id="256"/>
           </p14:sldIdLst>
         </p14:section>
-        <p14:section name="Architecture" id="{0d7afdcc-c5c9-859a-d044-835b2d47e12c}">
+        <p14:section name="Architecture" id="{e9edb241-fc12-5294-fd71-fb04d6c47e2d}">
           <p14:sldIdLst>
             <p14:sldId id="257"/>
           </p14:sldIdLst>
         </p14:section>
-        <p14:section name="Application flow" id="{f3966f74-ec28-e476-82d0-db023df682ff}">
+        <p14:section name="Application flow" id="{bebbf72d-ea61-2663-f706-5e9e7a5b0fac}">
           <p14:sldIdLst>
             <p14:sldId id="258"/>
           </p14:sldIdLst>
         </p14:section>
-        <p14:section name="Components" id="{0fa1aada-1b44-d4f4-111c-8d62b24a5a94}">
+        <p14:section name="Components" id="{23f0c7ad-eddb-9d67-9bbb-61ca21be02db}">
           <p14:sldIdLst>
             <p14:sldId id="259"/>
           </p14:sldIdLst>
         </p14:section>
-        <p14:section name="Deployment" id="{fc5fc676-62ea-9649-fb40-eece53d3c589}">
+        <p14:section name="Deployment" id="{c06b037f-87f2-8d13-f964-69e43b33a70f}">
           <p14:sldIdLst>
             <p14:sldId id="260"/>
           </p14:sldIdLst>
         </p14:section>
-        <p14:section name="Data model" id="{f9f6ce6c-6a20-5f09-ef9a-5cdc8645b2ac}">
+        <p14:section name="Data model" id="{8f90c2c8-c47b-23c6-95ec-9f34e1177c84}">
           <p14:sldIdLst>
             <p14:sldId id="261"/>
           </p14:sldIdLst>
         </p14:section>
-        <p14:section name="Lifecycle" id="{8cc33ff2-c97e-999d-a292-9cca068c4de2}">
+        <p14:section name="Lifecycle" id="{e53b21ab-7030-dae2-b9af-fbb518a44a43}">
           <p14:sldIdLst>
             <p14:sldId id="262"/>
           </p14:sldIdLst>
         </p14:section>
-        <p14:section name="Usage" id="{4142e356-d2de-d141-c22c-29d912db5a47}">
+        <p14:section name="Usage" id="{b1ba6054-e1e4-6f2f-8340-16da52438db1}">
           <p14:sldIdLst>
             <p14:sldId id="263"/>
             <p14:sldId id="264"/>
@@ -1176,7 +1176,7 @@
           <a:p>
             <a:r>
               <a:rPr lang="en-US" dirty="0"/>
-              <a:t>The flow strip is the read path. The four frames are the same run seen from the app, from Grafana, from Prometheus and from the store. On the Python share: do NOT claim Grafana corroborates the eleven timings in docs/EXAMPLES.md - it measures a different thing. Over 80 answers, 92.5% finished on the Python path and 86.25% were Python by design once the 5 model fallbacks are removed.</a:t>
+              <a:t>The flow strip is the read path. The four frames are the same run seen from the app, from Grafana, from Prometheus and from the store. Two cautions on the 90.9%. It does NOT corroborate the eleven timings in docs/EXAMPLES.md - that is a different measurement that happens to agree. And `compose` records the path that FINISHED: an answer that called the model, timed out and fell back to Python counts as Python, so a failing LLM would push this number up. There are no NIM errors in this window, which is what makes it a clean reading.</a:t>
             </a:r>
             <a:endParaRPr lang="en-US" dirty="0"/>
           </a:p>
@@ -16169,8 +16169,8 @@
         </p:nvSpPr>
         <p:spPr>
           <a:xfrm>
-            <a:off x="574874" y="2249424"/>
-            <a:ext cx="2645012" cy="1993392"/>
+            <a:off x="484632" y="2269440"/>
+            <a:ext cx="2825496" cy="1953360"/>
           </a:xfrm>
           <a:prstGeom prst="rect">
             <a:avLst/>
@@ -16202,8 +16202,8 @@
         </p:blipFill>
         <p:spPr>
           <a:xfrm>
-            <a:off x="593162" y="2267712"/>
-            <a:ext cx="2608436" cy="1956816"/>
+            <a:off x="502920" y="2287728"/>
+            <a:ext cx="2788920" cy="1916784"/>
           </a:xfrm>
           <a:prstGeom prst="rect">
             <a:avLst/>
@@ -16286,7 +16286,7 @@
                   <a:srgbClr val="5C6B64"/>
                 </a:solidFill>
               </a:rPr>
-              <a:t>Plain English in; a keyword router picks one typed</a:t>
+              <a:t>Plain English in; a keyword router picks the tool</a:t>
             </a:r>
             <a:endParaRPr lang="en-US" sz="1000" dirty="0"/>
           </a:p>
@@ -16307,7 +16307,7 @@
                   <a:srgbClr val="5C6B64"/>
                 </a:solidFill>
               </a:rPr>
-              <a:t>tool - no model call to decide what to run</a:t>
+              <a:t>The answer ends in the six record ids it used -</a:t>
             </a:r>
             <a:endParaRPr lang="en-US" sz="1000" dirty="0"/>
           </a:p>
@@ -16328,7 +16328,7 @@
                   <a:srgbClr val="5C6B64"/>
                 </a:solidFill>
               </a:rPr>
-              <a:t>Every figure carries the record id it came from</a:t>
+              <a:t>the same six as docs/EXAMPLES.md</a:t>
             </a:r>
             <a:endParaRPr lang="en-US" sz="1000" dirty="0"/>
           </a:p>
@@ -16349,7 +16349,7 @@
                   <a:srgbClr val="5C6B64"/>
                 </a:solidFill>
               </a:rPr>
-              <a:t>Measured: 9 of 11 questions answer in under 0.11s</a:t>
+              <a:t>Measured: 9 of 11 answer in under 0.11s</a:t>
             </a:r>
             <a:endParaRPr lang="en-US" sz="1000" dirty="0"/>
           </a:p>
@@ -16480,7 +16480,7 @@
                   <a:srgbClr val="5C6B64"/>
                 </a:solidFill>
               </a:rPr>
-              <a:t>Answers composed in Python 88.3% over the hour</a:t>
+              <a:t>90.9% of answers composed in Python, over 30 min</a:t>
             </a:r>
             <a:endParaRPr lang="en-US" sz="1000" dirty="0"/>
           </a:p>
@@ -16501,7 +16501,7 @@
                   <a:srgbClr val="5C6B64"/>
                 </a:solidFill>
               </a:rPr>
-              <a:t>Ungrounded 0  ·  cut short 0  ·  rail blocks 0</a:t>
+              <a:t>Ungrounded 0 · cut short 0 · blocks 0 · errors 0</a:t>
             </a:r>
             <a:endParaRPr lang="en-US" sz="1000" dirty="0"/>
           </a:p>
@@ -16522,7 +16522,7 @@
                   <a:srgbClr val="5C6B64"/>
                 </a:solidFill>
               </a:rPr>
-              <a:t>p50 by path: python ~0s against llm ~3s - and the</a:t>
+              <a:t>p50 by path: python ~0s against llm ~3s</a:t>
             </a:r>
             <a:endParaRPr lang="en-US" sz="1000" dirty="0"/>
           </a:p>
@@ -16543,7 +16543,7 @@
                   <a:srgbClr val="5C6B64"/>
                 </a:solidFill>
               </a:rPr>
-              <a:t>step down at 16:40 is the guided-JSON fix landing</a:t>
+              <a:t>GPU to 100% on the semantic queries, flat otherwise</a:t>
             </a:r>
             <a:endParaRPr lang="en-US" sz="1000" dirty="0"/>
           </a:p>
@@ -16695,7 +16695,7 @@
                   <a:srgbClr val="5C6B64"/>
                 </a:solidFill>
               </a:rPr>
-              <a:t>list_ros peaks ~10/min; search_updates is the rare</a:t>
+              <a:t>Two bursts of load, thirty minutes apart</a:t>
             </a:r>
             <a:endParaRPr lang="en-US" sz="1000" dirty="0"/>
           </a:p>
@@ -16716,7 +16716,7 @@
                   <a:srgbClr val="5C6B64"/>
                 </a:solidFill>
               </a:rPr>
-              <a:t>one, because retrieval is the minority path here</a:t>
+              <a:t>list_ros peaks at 10.3/min; search_updates is rare</a:t>
             </a:r>
             <a:endParaRPr lang="en-US" sz="1000" dirty="0"/>
           </a:p>
@@ -16889,7 +16889,7 @@
                   <a:srgbClr val="5C6B64"/>
                 </a:solidFill>
               </a:rPr>
-              <a:t>Loaded, replica 1, entity count 1,690, 13 fields</a:t>
+              <a:t>Loaded, replica 1, 1,690 entities, 13 fields</a:t>
             </a:r>
             <a:endParaRPr lang="en-US" sz="1000" dirty="0"/>
           </a:p>
@@ -17158,7 +17158,7 @@
                   <a:srgbClr val="5C6B64"/>
                 </a:solidFill>
               </a:rPr>
-              <a:t>400 live ROs, filtered to safety, blocked, at-risk or waiting — each row says WHY, with the measurement against its limit</a:t>
+              <a:t>66 open repair orders of 400 — 11 unsafe to release, 43 past promise — each row saying why, with its measurement</a:t>
             </a:r>
             <a:endParaRPr lang="en-US" sz="1000" dirty="0"/>
           </a:p>
@@ -17285,7 +17285,7 @@
                   <a:srgbClr val="5C6B64"/>
                 </a:solidFill>
               </a:rPr>
-              <a:t>State folded from the event log rather than stored, beside the technician updates exactly as written</a:t>
+              <a:t>State folded from the event log, never stored — promise breached, hours against flat rate, 12 events cited</a:t>
             </a:r>
             <a:endParaRPr lang="en-US" sz="1000" dirty="0"/>
           </a:p>
@@ -17299,8 +17299,8 @@
         </p:nvSpPr>
         <p:spPr>
           <a:xfrm>
-            <a:off x="8617775" y="1261872"/>
-            <a:ext cx="2571878" cy="1938528"/>
+            <a:off x="8501756" y="1261872"/>
+            <a:ext cx="2803916" cy="1938528"/>
           </a:xfrm>
           <a:prstGeom prst="rect">
             <a:avLst/>
@@ -17332,8 +17332,8 @@
         </p:blipFill>
         <p:spPr>
           <a:xfrm>
-            <a:off x="8636063" y="1280160"/>
-            <a:ext cx="2535302" cy="1901952"/>
+            <a:off x="8520044" y="1280160"/>
+            <a:ext cx="2767340" cy="1901952"/>
           </a:xfrm>
           <a:prstGeom prst="rect">
             <a:avLst/>
@@ -17426,8 +17426,8 @@
         </p:nvSpPr>
         <p:spPr>
           <a:xfrm>
-            <a:off x="1002042" y="4041648"/>
-            <a:ext cx="2571878" cy="1938528"/>
+            <a:off x="886023" y="4041648"/>
+            <a:ext cx="2803916" cy="1938528"/>
           </a:xfrm>
           <a:prstGeom prst="rect">
             <a:avLst/>
@@ -17459,8 +17459,8 @@
         </p:blipFill>
         <p:spPr>
           <a:xfrm>
-            <a:off x="1020330" y="4059936"/>
-            <a:ext cx="2535302" cy="1901952"/>
+            <a:off x="904311" y="4059936"/>
+            <a:ext cx="2767340" cy="1901952"/>
           </a:xfrm>
           <a:prstGeom prst="rect">
             <a:avLst/>
@@ -17539,7 +17539,7 @@
                   <a:srgbClr val="5C6B64"/>
                 </a:solidFill>
               </a:rPr>
-              <a:t>Dictate or type the update; the diff card shows exactly what changed in the record, for confirmation before it lands</a:t>
+              <a:t>What the RO already says, shown before anything is typed, so nothing is logged twice. Dictate or type it</a:t>
             </a:r>
             <a:endParaRPr lang="en-US" sz="1000" dirty="0"/>
           </a:p>
@@ -17793,7 +17793,7 @@
                   <a:srgbClr val="5C6B64"/>
                 </a:solidFill>
               </a:rPr>
-              <a:t>The system of record itself — 8 tables, 12,266 rows. An operator view, deliberately outside the advisor's UI</a:t>
+              <a:t>The system of record itself — 9 tables, 12 indexes, 6.4 MB. An operator view, outside the advisor's UI</a:t>
             </a:r>
             <a:endParaRPr lang="en-US" sz="1000" dirty="0"/>
           </a:p>
@@ -17829,7 +17829,7 @@
                   <a:srgbClr val="5C6B64"/>
                 </a:solidFill>
               </a:rPr>
-              <a:t>Technician Update, Shift Handover and Data &amp; Retrieval were captured against the hosted models rather than the local NIMs — Chromium hangs on those three Gradio tabs, so they are not re-taken automatically. docs/screenshots/README.md dates every frame.</a:t>
+              <a:t>Every frame on these two slides came from one box with all three NIMs local, taken by scripts/capture_screenshots.py on 2026-10-09 — not by hand. Each one is checked against a string that must appear in the page before it counts as captured; docs/screenshots/README.md says what each shows.</a:t>
             </a:r>
             <a:endParaRPr lang="en-US" sz="1000" dirty="0"/>
           </a:p>

--- a/docs/architecture-deck.pptx
+++ b/docs/architecture-deck.pptx
@@ -116,47 +116,47 @@
   <p:extLst>
     <p:ext uri="{521415D9-36F7-43E2-AB2F-B90AF26B5E84}">
       <p14:sectionLst xmlns:p14="http://schemas.microsoft.com/office/powerpoint/2010/main">
-        <p14:section name="Overview" id="{ce4f8d3b-f637-b165-35c1-d99416ff8b6d}">
+        <p14:section name="Overview" id="{b88167c4-f979-1824-c91b-1f92c2c78184}">
           <p14:sldIdLst>
             <p14:sldId id="256"/>
           </p14:sldIdLst>
         </p14:section>
-        <p14:section name="Process" id="{e7716984-b6db-4f73-565a-789556bb6cf3}">
+        <p14:section name="Process" id="{eac9bf67-4895-1517-137c-e1b032580ec3}">
           <p14:sldIdLst>
             <p14:sldId id="257"/>
           </p14:sldIdLst>
         </p14:section>
-        <p14:section name="Architecture" id="{2d76453c-2fe7-6462-d037-75586cccb236}">
+        <p14:section name="Architecture" id="{174cd3e1-5e0f-567a-c33b-7966dddfb007}">
           <p14:sldIdLst>
             <p14:sldId id="258"/>
           </p14:sldIdLst>
         </p14:section>
-        <p14:section name="Application flow" id="{8cbdcc49-68b6-8e82-21d0-de231fad2181}">
+        <p14:section name="Application flow" id="{8b3ae366-bc67-e64e-1a2c-81611cb267ce}">
           <p14:sldIdLst>
             <p14:sldId id="259"/>
           </p14:sldIdLst>
         </p14:section>
-        <p14:section name="Components" id="{0c39a4b9-cc10-dacd-d520-7be399f4348a}">
+        <p14:section name="Components" id="{86d6f8bd-13bc-565d-ad25-0e8f242423ee}">
           <p14:sldIdLst>
             <p14:sldId id="260"/>
           </p14:sldIdLst>
         </p14:section>
-        <p14:section name="Deployment" id="{a3806c42-0726-ac81-a708-b9f1de98754a}">
+        <p14:section name="Deployment" id="{6dbd43a3-7fe3-08e9-43d4-a6806c69c365}">
           <p14:sldIdLst>
             <p14:sldId id="261"/>
           </p14:sldIdLst>
         </p14:section>
-        <p14:section name="Data model" id="{d1a185e3-5e80-b542-0a90-7ee1bd7b5955}">
+        <p14:section name="Data model" id="{c171e4f2-706c-546b-3716-91f77e0bd799}">
           <p14:sldIdLst>
             <p14:sldId id="262"/>
           </p14:sldIdLst>
         </p14:section>
-        <p14:section name="Lifecycle" id="{c4aaec7d-20cd-3c36-9483-176724fa2b7b}">
+        <p14:section name="Lifecycle" id="{01c25880-b6a7-9854-4ea7-e0ec308eb2a6}">
           <p14:sldIdLst>
             <p14:sldId id="263"/>
           </p14:sldIdLst>
         </p14:section>
-        <p14:section name="Usage" id="{65b20251-6e05-c5ec-5e6d-77207e002b9e}">
+        <p14:section name="Usage" id="{8f8099ed-6e0d-3c01-0cd8-e6af9a6bb78d}">
           <p14:sldIdLst>
             <p14:sldId id="264"/>
             <p14:sldId id="265"/>
@@ -742,7 +742,7 @@
           <a:p>
             <a:r>
               <a:rPr lang="en-US" dirty="0"/>
-              <a:t>Narration (demo scene 2): A technician speaks or types an update. NVIDIA Riva Parakeet transcribes it. A Nemotron model extracts the facts. Python checks every one against the catalogue, folds it into an event log, and derives the state of the repair order. Nothing is guessed, and every answer cites its records. The slide builds itself in about eight seconds on entry; it does not need a click.</a:t>
+              <a:t>Narration (demo scene 2): A technician speaks or types an update. NVIDIA Riva Parakeet transcribes it. A Nemotron model extracts the facts. Python checks every one against the catalogue, folds it into an event log, and derives the state of the repair order. Nothing is guessed, and every answer cites its records. The slide builds itself in about six seconds on entry; it does not need a click.</a:t>
             </a:r>
             <a:endParaRPr lang="en-US" dirty="0"/>
           </a:p>
@@ -3315,8 +3315,8 @@
         </p:nvSpPr>
         <p:spPr>
           <a:xfrm>
-            <a:off x="502920" y="1481328"/>
-            <a:ext cx="2017715" cy="2999232"/>
+            <a:off x="502920" y="2194560"/>
+            <a:ext cx="2017715" cy="2377440"/>
           </a:xfrm>
           <a:prstGeom prst="rect">
             <a:avLst/>
@@ -3340,7 +3340,7 @@
         </p:nvSpPr>
         <p:spPr>
           <a:xfrm>
-            <a:off x="630936" y="1234440"/>
+            <a:off x="630936" y="1947672"/>
             <a:ext cx="493776" cy="493776"/>
           </a:xfrm>
           <a:prstGeom prst="ellipse">
@@ -3382,8 +3382,8 @@
         </p:nvSpPr>
         <p:spPr>
           <a:xfrm>
-            <a:off x="630936" y="1810512"/>
-            <a:ext cx="1761683" cy="2066544"/>
+            <a:off x="630936" y="2523744"/>
+            <a:ext cx="1761683" cy="1444752"/>
           </a:xfrm>
           <a:prstGeom prst="rect">
             <a:avLst/>
@@ -3425,7 +3425,7 @@
               <a:buNone/>
             </a:pPr>
             <a:r>
-              <a:rPr lang="en-US" sz="1100" dirty="0">
+              <a:rPr lang="en-US" sz="1200" dirty="0">
                 <a:solidFill>
                   <a:srgbClr val="5C6B64"/>
                 </a:solidFill>
@@ -3434,43 +3434,6 @@
             </a:r>
             <a:endParaRPr lang="en-US" sz="1600" dirty="0"/>
           </a:p>
-          <a:p>
-            <a:pPr indent="0" marL="0">
-              <a:lnSpc>
-                <a:spcPct val="95000"/>
-              </a:lnSpc>
-              <a:spcBef>
-                <a:spcPts val="1000"/>
-              </a:spcBef>
-              <a:buNone/>
-            </a:pPr>
-            <a:r>
-              <a:rPr lang="en-US" sz="1000" b="1" dirty="0">
-                <a:solidFill>
-                  <a:srgbClr val="5B8C3A"/>
-                </a:solidFill>
-              </a:rPr>
-              <a:t>WHAT YOU GET</a:t>
-            </a:r>
-            <a:endParaRPr lang="en-US" sz="1600" dirty="0"/>
-          </a:p>
-          <a:p>
-            <a:pPr indent="0" marL="0">
-              <a:lnSpc>
-                <a:spcPct val="95000"/>
-              </a:lnSpc>
-              <a:buNone/>
-            </a:pPr>
-            <a:r>
-              <a:rPr lang="en-US" sz="1100" dirty="0">
-                <a:solidFill>
-                  <a:srgbClr val="14302A"/>
-                </a:solidFill>
-              </a:rPr>
-              <a:t>No forms. No end-of-shift retyping.</a:t>
-            </a:r>
-            <a:endParaRPr lang="en-US" sz="1600" dirty="0"/>
-          </a:p>
         </p:txBody>
       </p:sp>
       <p:sp>
@@ -3481,7 +3444,7 @@
         </p:nvSpPr>
         <p:spPr>
           <a:xfrm>
-            <a:off x="594360" y="3913632"/>
+            <a:off x="594360" y="4005072"/>
             <a:ext cx="1834835" cy="475488"/>
           </a:xfrm>
           <a:prstGeom prst="rect">
@@ -3543,7 +3506,7 @@
         </p:nvSpPr>
         <p:spPr>
           <a:xfrm>
-            <a:off x="2557211" y="1645920"/>
+            <a:off x="2557211" y="2359152"/>
             <a:ext cx="201168" cy="237744"/>
           </a:xfrm>
           <a:prstGeom prst="rightArrow">
@@ -3568,8 +3531,8 @@
         </p:nvSpPr>
         <p:spPr>
           <a:xfrm>
-            <a:off x="2794955" y="1481328"/>
-            <a:ext cx="2017715" cy="2999232"/>
+            <a:off x="2794955" y="2194560"/>
+            <a:ext cx="2017715" cy="2377440"/>
           </a:xfrm>
           <a:prstGeom prst="rect">
             <a:avLst/>
@@ -3593,7 +3556,7 @@
         </p:nvSpPr>
         <p:spPr>
           <a:xfrm>
-            <a:off x="2922971" y="1234440"/>
+            <a:off x="2922971" y="1947672"/>
             <a:ext cx="493776" cy="493776"/>
           </a:xfrm>
           <a:prstGeom prst="ellipse">
@@ -3635,8 +3598,8 @@
         </p:nvSpPr>
         <p:spPr>
           <a:xfrm>
-            <a:off x="2922971" y="1810512"/>
-            <a:ext cx="1761683" cy="2066544"/>
+            <a:off x="2922971" y="2523744"/>
+            <a:ext cx="1761683" cy="1444752"/>
           </a:xfrm>
           <a:prstGeom prst="rect">
             <a:avLst/>
@@ -3678,7 +3641,7 @@
               <a:buNone/>
             </a:pPr>
             <a:r>
-              <a:rPr lang="en-US" sz="1100" dirty="0">
+              <a:rPr lang="en-US" sz="1200" dirty="0">
                 <a:solidFill>
                   <a:srgbClr val="5C6B64"/>
                 </a:solidFill>
@@ -3687,43 +3650,6 @@
             </a:r>
             <a:endParaRPr lang="en-US" sz="1600" dirty="0"/>
           </a:p>
-          <a:p>
-            <a:pPr indent="0" marL="0">
-              <a:lnSpc>
-                <a:spcPct val="95000"/>
-              </a:lnSpc>
-              <a:spcBef>
-                <a:spcPts val="1000"/>
-              </a:spcBef>
-              <a:buNone/>
-            </a:pPr>
-            <a:r>
-              <a:rPr lang="en-US" sz="1000" b="1" dirty="0">
-                <a:solidFill>
-                  <a:srgbClr val="5B8C3A"/>
-                </a:solidFill>
-              </a:rPr>
-              <a:t>WHAT YOU GET</a:t>
-            </a:r>
-            <a:endParaRPr lang="en-US" sz="1600" dirty="0"/>
-          </a:p>
-          <a:p>
-            <a:pPr indent="0" marL="0">
-              <a:lnSpc>
-                <a:spcPct val="95000"/>
-              </a:lnSpc>
-              <a:buNone/>
-            </a:pPr>
-            <a:r>
-              <a:rPr lang="en-US" sz="1100" dirty="0">
-                <a:solidFill>
-                  <a:srgbClr val="14302A"/>
-                </a:solidFill>
-              </a:rPr>
-              <a:t>Hours, parts and measurements pulled out automatically.</a:t>
-            </a:r>
-            <a:endParaRPr lang="en-US" sz="1600" dirty="0"/>
-          </a:p>
         </p:txBody>
       </p:sp>
       <p:sp>
@@ -3734,7 +3660,7 @@
         </p:nvSpPr>
         <p:spPr>
           <a:xfrm>
-            <a:off x="2886395" y="3913632"/>
+            <a:off x="2886395" y="4005072"/>
             <a:ext cx="1834835" cy="475488"/>
           </a:xfrm>
           <a:prstGeom prst="rect">
@@ -3796,7 +3722,7 @@
         </p:nvSpPr>
         <p:spPr>
           <a:xfrm>
-            <a:off x="4849246" y="1645920"/>
+            <a:off x="4849246" y="2359152"/>
             <a:ext cx="201168" cy="237744"/>
           </a:xfrm>
           <a:prstGeom prst="rightArrow">
@@ -3821,8 +3747,8 @@
         </p:nvSpPr>
         <p:spPr>
           <a:xfrm>
-            <a:off x="5086990" y="1481328"/>
-            <a:ext cx="2017715" cy="2999232"/>
+            <a:off x="5086990" y="2194560"/>
+            <a:ext cx="2017715" cy="2377440"/>
           </a:xfrm>
           <a:prstGeom prst="rect">
             <a:avLst/>
@@ -3846,7 +3772,7 @@
         </p:nvSpPr>
         <p:spPr>
           <a:xfrm>
-            <a:off x="5215006" y="1234440"/>
+            <a:off x="5215006" y="1947672"/>
             <a:ext cx="493776" cy="493776"/>
           </a:xfrm>
           <a:prstGeom prst="ellipse">
@@ -3888,8 +3814,8 @@
         </p:nvSpPr>
         <p:spPr>
           <a:xfrm>
-            <a:off x="5215006" y="1810512"/>
-            <a:ext cx="1761683" cy="2066544"/>
+            <a:off x="5215006" y="2523744"/>
+            <a:ext cx="1761683" cy="1444752"/>
           </a:xfrm>
           <a:prstGeom prst="rect">
             <a:avLst/>
@@ -3931,7 +3857,7 @@
               <a:buNone/>
             </a:pPr>
             <a:r>
-              <a:rPr lang="en-US" sz="1100" dirty="0">
+              <a:rPr lang="en-US" sz="1200" dirty="0">
                 <a:solidFill>
                   <a:srgbClr val="5C6B64"/>
                 </a:solidFill>
@@ -3940,43 +3866,6 @@
             </a:r>
             <a:endParaRPr lang="en-US" sz="1600" dirty="0"/>
           </a:p>
-          <a:p>
-            <a:pPr indent="0" marL="0">
-              <a:lnSpc>
-                <a:spcPct val="95000"/>
-              </a:lnSpc>
-              <a:spcBef>
-                <a:spcPts val="1000"/>
-              </a:spcBef>
-              <a:buNone/>
-            </a:pPr>
-            <a:r>
-              <a:rPr lang="en-US" sz="1000" b="1" dirty="0">
-                <a:solidFill>
-                  <a:srgbClr val="5B8C3A"/>
-                </a:solidFill>
-              </a:rPr>
-              <a:t>WHAT YOU GET</a:t>
-            </a:r>
-            <a:endParaRPr lang="en-US" sz="1600" dirty="0"/>
-          </a:p>
-          <a:p>
-            <a:pPr indent="0" marL="0">
-              <a:lnSpc>
-                <a:spcPct val="95000"/>
-              </a:lnSpc>
-              <a:buNone/>
-            </a:pPr>
-            <a:r>
-              <a:rPr lang="en-US" sz="1100" dirty="0">
-                <a:solidFill>
-                  <a:srgbClr val="14302A"/>
-                </a:solidFill>
-              </a:rPr>
-              <a:t>Nothing is guessed. An unclear update asks a question.</a:t>
-            </a:r>
-            <a:endParaRPr lang="en-US" sz="1600" dirty="0"/>
-          </a:p>
         </p:txBody>
       </p:sp>
       <p:sp>
@@ -3987,7 +3876,7 @@
         </p:nvSpPr>
         <p:spPr>
           <a:xfrm>
-            <a:off x="5178430" y="3913632"/>
+            <a:off x="5178430" y="4005072"/>
             <a:ext cx="1834835" cy="475488"/>
           </a:xfrm>
           <a:prstGeom prst="rect">
@@ -4049,7 +3938,7 @@
         </p:nvSpPr>
         <p:spPr>
           <a:xfrm>
-            <a:off x="7141281" y="1645920"/>
+            <a:off x="7141281" y="2359152"/>
             <a:ext cx="201168" cy="237744"/>
           </a:xfrm>
           <a:prstGeom prst="rightArrow">
@@ -4074,8 +3963,8 @@
         </p:nvSpPr>
         <p:spPr>
           <a:xfrm>
-            <a:off x="7379025" y="1481328"/>
-            <a:ext cx="2017715" cy="2999232"/>
+            <a:off x="7379025" y="2194560"/>
+            <a:ext cx="2017715" cy="2377440"/>
           </a:xfrm>
           <a:prstGeom prst="rect">
             <a:avLst/>
@@ -4099,7 +3988,7 @@
         </p:nvSpPr>
         <p:spPr>
           <a:xfrm>
-            <a:off x="7507041" y="1234440"/>
+            <a:off x="7507041" y="1947672"/>
             <a:ext cx="493776" cy="493776"/>
           </a:xfrm>
           <a:prstGeom prst="ellipse">
@@ -4141,8 +4030,8 @@
         </p:nvSpPr>
         <p:spPr>
           <a:xfrm>
-            <a:off x="7507041" y="1810512"/>
-            <a:ext cx="1761683" cy="2066544"/>
+            <a:off x="7507041" y="2523744"/>
+            <a:ext cx="1761683" cy="1444752"/>
           </a:xfrm>
           <a:prstGeom prst="rect">
             <a:avLst/>
@@ -4184,7 +4073,7 @@
               <a:buNone/>
             </a:pPr>
             <a:r>
-              <a:rPr lang="en-US" sz="1100" dirty="0">
+              <a:rPr lang="en-US" sz="1200" dirty="0">
                 <a:solidFill>
                   <a:srgbClr val="5C6B64"/>
                 </a:solidFill>
@@ -4193,43 +4082,6 @@
             </a:r>
             <a:endParaRPr lang="en-US" sz="1600" dirty="0"/>
           </a:p>
-          <a:p>
-            <a:pPr indent="0" marL="0">
-              <a:lnSpc>
-                <a:spcPct val="95000"/>
-              </a:lnSpc>
-              <a:spcBef>
-                <a:spcPts val="1000"/>
-              </a:spcBef>
-              <a:buNone/>
-            </a:pPr>
-            <a:r>
-              <a:rPr lang="en-US" sz="1000" b="1" dirty="0">
-                <a:solidFill>
-                  <a:srgbClr val="5B8C3A"/>
-                </a:solidFill>
-              </a:rPr>
-              <a:t>WHAT YOU GET</a:t>
-            </a:r>
-            <a:endParaRPr lang="en-US" sz="1600" dirty="0"/>
-          </a:p>
-          <a:p>
-            <a:pPr indent="0" marL="0">
-              <a:lnSpc>
-                <a:spcPct val="95000"/>
-              </a:lnSpc>
-              <a:buNone/>
-            </a:pPr>
-            <a:r>
-              <a:rPr lang="en-US" sz="1100" dirty="0">
-                <a:solidFill>
-                  <a:srgbClr val="14302A"/>
-                </a:solidFill>
-              </a:rPr>
-              <a:t>A full audit trail, and no stale status.</a:t>
-            </a:r>
-            <a:endParaRPr lang="en-US" sz="1600" dirty="0"/>
-          </a:p>
         </p:txBody>
       </p:sp>
       <p:sp>
@@ -4240,7 +4092,7 @@
         </p:nvSpPr>
         <p:spPr>
           <a:xfrm>
-            <a:off x="7470465" y="3913632"/>
+            <a:off x="7470465" y="4005072"/>
             <a:ext cx="1834835" cy="475488"/>
           </a:xfrm>
           <a:prstGeom prst="rect">
@@ -4302,7 +4154,7 @@
         </p:nvSpPr>
         <p:spPr>
           <a:xfrm>
-            <a:off x="9433316" y="1645920"/>
+            <a:off x="9433316" y="2359152"/>
             <a:ext cx="201168" cy="237744"/>
           </a:xfrm>
           <a:prstGeom prst="rightArrow">
@@ -4327,8 +4179,8 @@
         </p:nvSpPr>
         <p:spPr>
           <a:xfrm>
-            <a:off x="9671060" y="1481328"/>
-            <a:ext cx="2017715" cy="2999232"/>
+            <a:off x="9671060" y="2194560"/>
+            <a:ext cx="2017715" cy="2377440"/>
           </a:xfrm>
           <a:prstGeom prst="rect">
             <a:avLst/>
@@ -4352,7 +4204,7 @@
         </p:nvSpPr>
         <p:spPr>
           <a:xfrm>
-            <a:off x="9799076" y="1234440"/>
+            <a:off x="9799076" y="1947672"/>
             <a:ext cx="493776" cy="493776"/>
           </a:xfrm>
           <a:prstGeom prst="ellipse">
@@ -4394,8 +4246,8 @@
         </p:nvSpPr>
         <p:spPr>
           <a:xfrm>
-            <a:off x="9799076" y="1810512"/>
-            <a:ext cx="1761683" cy="2066544"/>
+            <a:off x="9799076" y="2523744"/>
+            <a:ext cx="1761683" cy="1444752"/>
           </a:xfrm>
           <a:prstGeom prst="rect">
             <a:avLst/>
@@ -4437,7 +4289,7 @@
               <a:buNone/>
             </a:pPr>
             <a:r>
-              <a:rPr lang="en-US" sz="1100" dirty="0">
+              <a:rPr lang="en-US" sz="1200" dirty="0">
                 <a:solidFill>
                   <a:srgbClr val="5C6B64"/>
                 </a:solidFill>
@@ -4446,510 +4298,103 @@
             </a:r>
             <a:endParaRPr lang="en-US" sz="1600" dirty="0"/>
           </a:p>
+        </p:txBody>
+      </p:sp>
+      <p:sp>
+        <p:nvSpPr>
+          <p:cNvPr id="27" name="anim-s4-badge"/>
+          <p:cNvSpPr txBox="1"/>
+          <p:nvPr/>
+        </p:nvSpPr>
+        <p:spPr>
+          <a:xfrm>
+            <a:off x="9762500" y="4005072"/>
+            <a:ext cx="1834835" cy="475488"/>
+          </a:xfrm>
+          <a:prstGeom prst="rect">
+            <a:avLst/>
+          </a:prstGeom>
+          <a:solidFill>
+            <a:srgbClr val="5B8C3A"/>
+          </a:solidFill>
+          <a:ln w="12700">
+            <a:solidFill>
+              <a:srgbClr val="446B29"/>
+            </a:solidFill>
+          </a:ln>
+        </p:spPr>
+        <p:txBody>
+          <a:bodyPr wrap="square" lIns="0" tIns="0" rIns="0" bIns="0" rtlCol="0" anchor="ctr"/>
+          <a:lstStyle/>
+          <a:p>
+            <a:pPr algn="ctr" indent="0" marL="0">
+              <a:lnSpc>
+                <a:spcPct val="90000"/>
+              </a:lnSpc>
+              <a:buNone/>
+            </a:pPr>
+            <a:r>
+              <a:rPr lang="en-US" sz="1000" b="1" dirty="0">
+                <a:solidFill>
+                  <a:srgbClr val="FFFFFF"/>
+                </a:solidFill>
+              </a:rPr>
+              <a:t>NVIDIA NIM retrieval</a:t>
+            </a:r>
+            <a:endParaRPr lang="en-US" sz="1000" dirty="0"/>
+          </a:p>
+          <a:p>
+            <a:pPr algn="ctr" indent="0" marL="0">
+              <a:lnSpc>
+                <a:spcPct val="90000"/>
+              </a:lnSpc>
+              <a:buNone/>
+            </a:pPr>
+            <a:r>
+              <a:rPr lang="en-US" sz="1000" b="1" dirty="0">
+                <a:solidFill>
+                  <a:srgbClr val="FFFFFF"/>
+                </a:solidFill>
+              </a:rPr>
+              <a:t>NeMo Guardrails</a:t>
+            </a:r>
+            <a:endParaRPr lang="en-US" sz="1000" dirty="0"/>
+          </a:p>
+        </p:txBody>
+      </p:sp>
+      <p:sp>
+        <p:nvSpPr>
+          <p:cNvPr id="28" name="Text 26"/>
+          <p:cNvSpPr txBox="1"/>
+          <p:nvPr/>
+        </p:nvSpPr>
+        <p:spPr>
+          <a:xfrm>
+            <a:off x="502920" y="5120640"/>
+            <a:ext cx="11185855" cy="237744"/>
+          </a:xfrm>
+          <a:prstGeom prst="rect">
+            <a:avLst/>
+          </a:prstGeom>
+          <a:noFill/>
+          <a:ln/>
+        </p:spPr>
+        <p:txBody>
+          <a:bodyPr wrap="square" lIns="0" tIns="0" rIns="0" bIns="0" rtlCol="0" anchor="ctr"/>
+          <a:lstStyle/>
           <a:p>
             <a:pPr indent="0" marL="0">
-              <a:lnSpc>
-                <a:spcPct val="95000"/>
-              </a:lnSpc>
-              <a:spcBef>
-                <a:spcPts val="1000"/>
-              </a:spcBef>
-              <a:buNone/>
-            </a:pPr>
-            <a:r>
-              <a:rPr lang="en-US" sz="1000" b="1" dirty="0">
-                <a:solidFill>
-                  <a:srgbClr val="5B8C3A"/>
-                </a:solidFill>
-              </a:rPr>
-              <a:t>WHAT YOU GET</a:t>
-            </a:r>
-            <a:endParaRPr lang="en-US" sz="1600" dirty="0"/>
-          </a:p>
-          <a:p>
-            <a:pPr indent="0" marL="0">
-              <a:lnSpc>
-                <a:spcPct val="95000"/>
-              </a:lnSpc>
-              <a:buNone/>
-            </a:pPr>
-            <a:r>
-              <a:rPr lang="en-US" sz="1100" dirty="0">
-                <a:solidFill>
-                  <a:srgbClr val="14302A"/>
-                </a:solidFill>
-              </a:rPr>
-              <a:t>Structured questions answered in about a tenth of a second.</a:t>
-            </a:r>
-            <a:endParaRPr lang="en-US" sz="1600" dirty="0"/>
-          </a:p>
-        </p:txBody>
-      </p:sp>
-      <p:sp>
-        <p:nvSpPr>
-          <p:cNvPr id="27" name="anim-s4-badge"/>
-          <p:cNvSpPr txBox="1"/>
-          <p:nvPr/>
-        </p:nvSpPr>
-        <p:spPr>
-          <a:xfrm>
-            <a:off x="9762500" y="3913632"/>
-            <a:ext cx="1834835" cy="475488"/>
-          </a:xfrm>
-          <a:prstGeom prst="rect">
-            <a:avLst/>
-          </a:prstGeom>
-          <a:solidFill>
-            <a:srgbClr val="5B8C3A"/>
-          </a:solidFill>
-          <a:ln w="12700">
-            <a:solidFill>
-              <a:srgbClr val="446B29"/>
-            </a:solidFill>
-          </a:ln>
-        </p:spPr>
-        <p:txBody>
-          <a:bodyPr wrap="square" lIns="0" tIns="0" rIns="0" bIns="0" rtlCol="0" anchor="ctr"/>
-          <a:lstStyle/>
-          <a:p>
-            <a:pPr algn="ctr" indent="0" marL="0">
-              <a:lnSpc>
-                <a:spcPct val="90000"/>
-              </a:lnSpc>
-              <a:buNone/>
-            </a:pPr>
-            <a:r>
-              <a:rPr lang="en-US" sz="1000" b="1" dirty="0">
-                <a:solidFill>
-                  <a:srgbClr val="FFFFFF"/>
-                </a:solidFill>
-              </a:rPr>
-              <a:t>NVIDIA NIM retrieval</a:t>
-            </a:r>
-            <a:endParaRPr lang="en-US" sz="1000" dirty="0"/>
-          </a:p>
-          <a:p>
-            <a:pPr algn="ctr" indent="0" marL="0">
-              <a:lnSpc>
-                <a:spcPct val="90000"/>
-              </a:lnSpc>
-              <a:buNone/>
-            </a:pPr>
-            <a:r>
-              <a:rPr lang="en-US" sz="1000" b="1" dirty="0">
-                <a:solidFill>
-                  <a:srgbClr val="FFFFFF"/>
-                </a:solidFill>
-              </a:rPr>
-              <a:t>NeMo Guardrails</a:t>
-            </a:r>
-            <a:endParaRPr lang="en-US" sz="1000" dirty="0"/>
-          </a:p>
-        </p:txBody>
-      </p:sp>
-      <p:sp>
-        <p:nvSpPr>
-          <p:cNvPr id="28" name="Shape 26"/>
-          <p:cNvSpPr/>
-          <p:nvPr/>
-        </p:nvSpPr>
-        <p:spPr>
-          <a:xfrm>
-            <a:off x="502920" y="4828032"/>
-            <a:ext cx="11185855" cy="237744"/>
-          </a:xfrm>
-          <a:prstGeom prst="rect">
-            <a:avLst/>
-          </a:prstGeom>
-          <a:solidFill>
-            <a:srgbClr val="14302A"/>
-          </a:solidFill>
-          <a:ln w="12700">
-            <a:solidFill>
-              <a:srgbClr val="14302A"/>
-            </a:solidFill>
-            <a:prstDash val="solid"/>
-          </a:ln>
-        </p:spPr>
-      </p:sp>
-      <p:sp>
-        <p:nvSpPr>
-          <p:cNvPr id="29" name="Text 27"/>
-          <p:cNvSpPr txBox="1"/>
-          <p:nvPr/>
-        </p:nvSpPr>
-        <p:spPr>
-          <a:xfrm>
-            <a:off x="612648" y="4828032"/>
-            <a:ext cx="10966399" cy="237744"/>
-          </a:xfrm>
-          <a:prstGeom prst="rect">
-            <a:avLst/>
-          </a:prstGeom>
-          <a:noFill/>
-          <a:ln/>
-        </p:spPr>
-        <p:txBody>
-          <a:bodyPr wrap="square" lIns="0" tIns="0" rIns="0" bIns="0" rtlCol="0" anchor="ctr"/>
-          <a:lstStyle/>
-          <a:p>
-            <a:pPr algn="l" indent="0" marL="0">
-              <a:buNone/>
-            </a:pPr>
-            <a:r>
-              <a:rPr lang="en-US" sz="1050" b="1" spc="60" kern="0" dirty="0">
-                <a:solidFill>
-                  <a:srgbClr val="FFFFFF"/>
-                </a:solidFill>
-              </a:rPr>
-              <a:t>WHAT THAT MEANS FOR THE BUSINESS</a:t>
-            </a:r>
-            <a:endParaRPr lang="en-US" sz="1050" dirty="0"/>
-          </a:p>
-        </p:txBody>
-      </p:sp>
-      <p:sp>
-        <p:nvSpPr>
-          <p:cNvPr id="30" name="anim-o0-card"/>
-          <p:cNvSpPr/>
-          <p:nvPr/>
-        </p:nvSpPr>
-        <p:spPr>
-          <a:xfrm>
-            <a:off x="502920" y="5138928"/>
-            <a:ext cx="3606698" cy="914400"/>
-          </a:xfrm>
-          <a:prstGeom prst="rect">
-            <a:avLst/>
-          </a:prstGeom>
-          <a:solidFill>
-            <a:srgbClr val="1E4035"/>
-          </a:solidFill>
-          <a:ln w="12700">
-            <a:solidFill>
-              <a:srgbClr val="2E5245"/>
-            </a:solidFill>
-            <a:prstDash val="solid"/>
-          </a:ln>
-        </p:spPr>
-      </p:sp>
-      <p:sp>
-        <p:nvSpPr>
-          <p:cNvPr id="31" name="anim-o0-big"/>
-          <p:cNvSpPr txBox="1"/>
-          <p:nvPr/>
-        </p:nvSpPr>
-        <p:spPr>
-          <a:xfrm>
-            <a:off x="649224" y="5193792"/>
-            <a:ext cx="3332378" cy="420624"/>
-          </a:xfrm>
-          <a:prstGeom prst="rect">
-            <a:avLst/>
-          </a:prstGeom>
-          <a:noFill/>
-          <a:ln/>
-        </p:spPr>
-        <p:txBody>
-          <a:bodyPr wrap="square" lIns="0" tIns="0" rIns="0" bIns="0" rtlCol="0" anchor="ctr"/>
-          <a:lstStyle/>
-          <a:p>
-            <a:pPr indent="0" marL="0">
-              <a:buNone/>
-            </a:pPr>
-            <a:r>
-              <a:rPr lang="en-US" sz="2600" b="1" dirty="0">
-                <a:solidFill>
-                  <a:srgbClr val="76B900"/>
-                </a:solidFill>
-                <a:latin typeface="Arial" pitchFamily="34" charset="0"/>
-                <a:ea typeface="Arial" pitchFamily="34" charset="-122"/>
-                <a:cs typeface="Arial" pitchFamily="34" charset="-120"/>
-              </a:rPr>
-              <a:t>~0.1 s</a:t>
-            </a:r>
-            <a:endParaRPr lang="en-US" sz="2600" dirty="0"/>
-          </a:p>
-        </p:txBody>
-      </p:sp>
-      <p:sp>
-        <p:nvSpPr>
-          <p:cNvPr id="32" name="anim-o0-cap"/>
-          <p:cNvSpPr txBox="1"/>
-          <p:nvPr/>
-        </p:nvSpPr>
-        <p:spPr>
-          <a:xfrm>
-            <a:off x="649224" y="5632704"/>
-            <a:ext cx="3332378" cy="384048"/>
-          </a:xfrm>
-          <a:prstGeom prst="rect">
-            <a:avLst/>
-          </a:prstGeom>
-          <a:noFill/>
-          <a:ln/>
-        </p:spPr>
-        <p:txBody>
-          <a:bodyPr wrap="square" lIns="0" tIns="0" rIns="0" bIns="0" rtlCol="0" anchor="t"/>
-          <a:lstStyle/>
-          <a:p>
-            <a:pPr indent="0" marL="0">
-              <a:lnSpc>
-                <a:spcPct val="95000"/>
-              </a:lnSpc>
-              <a:buNone/>
-            </a:pPr>
-            <a:r>
-              <a:rPr lang="en-US" sz="1100" dirty="0">
-                <a:solidFill>
-                  <a:srgbClr val="DCE8CF"/>
-                </a:solidFill>
-              </a:rPr>
-              <a:t>for a structured answer - computed, no model call</a:t>
+              <a:buNone/>
+            </a:pPr>
+            <a:r>
+              <a:rPr lang="en-US" sz="1100" i="1" dirty="0">
+                <a:solidFill>
+                  <a:srgbClr val="5C6B64"/>
+                </a:solidFill>
+              </a:rPr>
+              <a:t>Speech recognition runs on NVIDIA-hosted Riva; every other model runs on the L40S in the box.</a:t>
             </a:r>
             <a:endParaRPr lang="en-US" sz="1100" dirty="0"/>
-          </a:p>
-        </p:txBody>
-      </p:sp>
-      <p:sp>
-        <p:nvSpPr>
-          <p:cNvPr id="33" name="anim-o1-card"/>
-          <p:cNvSpPr/>
-          <p:nvPr/>
-        </p:nvSpPr>
-        <p:spPr>
-          <a:xfrm>
-            <a:off x="4292498" y="5138928"/>
-            <a:ext cx="3606698" cy="914400"/>
-          </a:xfrm>
-          <a:prstGeom prst="rect">
-            <a:avLst/>
-          </a:prstGeom>
-          <a:solidFill>
-            <a:srgbClr val="1E4035"/>
-          </a:solidFill>
-          <a:ln w="12700">
-            <a:solidFill>
-              <a:srgbClr val="2E5245"/>
-            </a:solidFill>
-            <a:prstDash val="solid"/>
-          </a:ln>
-        </p:spPr>
-      </p:sp>
-      <p:sp>
-        <p:nvSpPr>
-          <p:cNvPr id="34" name="anim-o1-big"/>
-          <p:cNvSpPr txBox="1"/>
-          <p:nvPr/>
-        </p:nvSpPr>
-        <p:spPr>
-          <a:xfrm>
-            <a:off x="4438802" y="5193792"/>
-            <a:ext cx="3332378" cy="420624"/>
-          </a:xfrm>
-          <a:prstGeom prst="rect">
-            <a:avLst/>
-          </a:prstGeom>
-          <a:noFill/>
-          <a:ln/>
-        </p:spPr>
-        <p:txBody>
-          <a:bodyPr wrap="square" lIns="0" tIns="0" rIns="0" bIns="0" rtlCol="0" anchor="ctr"/>
-          <a:lstStyle/>
-          <a:p>
-            <a:pPr indent="0" marL="0">
-              <a:buNone/>
-            </a:pPr>
-            <a:r>
-              <a:rPr lang="en-US" sz="2600" b="1" dirty="0">
-                <a:solidFill>
-                  <a:srgbClr val="76B900"/>
-                </a:solidFill>
-                <a:latin typeface="Arial" pitchFamily="34" charset="0"/>
-                <a:ea typeface="Arial" pitchFamily="34" charset="-122"/>
-                <a:cs typeface="Arial" pitchFamily="34" charset="-120"/>
-              </a:rPr>
-              <a:t>905 / 905</a:t>
-            </a:r>
-            <a:endParaRPr lang="en-US" sz="2600" dirty="0"/>
-          </a:p>
-        </p:txBody>
-      </p:sp>
-      <p:sp>
-        <p:nvSpPr>
-          <p:cNvPr id="35" name="anim-o1-cap"/>
-          <p:cNvSpPr txBox="1"/>
-          <p:nvPr/>
-        </p:nvSpPr>
-        <p:spPr>
-          <a:xfrm>
-            <a:off x="4438802" y="5632704"/>
-            <a:ext cx="3332378" cy="384048"/>
-          </a:xfrm>
-          <a:prstGeom prst="rect">
-            <a:avLst/>
-          </a:prstGeom>
-          <a:noFill/>
-          <a:ln/>
-        </p:spPr>
-        <p:txBody>
-          <a:bodyPr wrap="square" lIns="0" tIns="0" rIns="0" bIns="0" rtlCol="0" anchor="t"/>
-          <a:lstStyle/>
-          <a:p>
-            <a:pPr indent="0" marL="0">
-              <a:lnSpc>
-                <a:spcPct val="95000"/>
-              </a:lnSpc>
-              <a:buNone/>
-            </a:pPr>
-            <a:r>
-              <a:rPr lang="en-US" sz="1100" dirty="0">
-                <a:solidFill>
-                  <a:srgbClr val="DCE8CF"/>
-                </a:solidFill>
-              </a:rPr>
-              <a:t>answer citations resolve to a real record, in our evaluation set</a:t>
-            </a:r>
-            <a:endParaRPr lang="en-US" sz="1100" dirty="0"/>
-          </a:p>
-        </p:txBody>
-      </p:sp>
-      <p:sp>
-        <p:nvSpPr>
-          <p:cNvPr id="36" name="anim-o2-card"/>
-          <p:cNvSpPr/>
-          <p:nvPr/>
-        </p:nvSpPr>
-        <p:spPr>
-          <a:xfrm>
-            <a:off x="8082077" y="5138928"/>
-            <a:ext cx="3606698" cy="914400"/>
-          </a:xfrm>
-          <a:prstGeom prst="rect">
-            <a:avLst/>
-          </a:prstGeom>
-          <a:solidFill>
-            <a:srgbClr val="1E4035"/>
-          </a:solidFill>
-          <a:ln w="12700">
-            <a:solidFill>
-              <a:srgbClr val="2E5245"/>
-            </a:solidFill>
-            <a:prstDash val="solid"/>
-          </a:ln>
-        </p:spPr>
-      </p:sp>
-      <p:sp>
-        <p:nvSpPr>
-          <p:cNvPr id="37" name="anim-o2-big"/>
-          <p:cNvSpPr txBox="1"/>
-          <p:nvPr/>
-        </p:nvSpPr>
-        <p:spPr>
-          <a:xfrm>
-            <a:off x="8228381" y="5193792"/>
-            <a:ext cx="3332378" cy="420624"/>
-          </a:xfrm>
-          <a:prstGeom prst="rect">
-            <a:avLst/>
-          </a:prstGeom>
-          <a:noFill/>
-          <a:ln/>
-        </p:spPr>
-        <p:txBody>
-          <a:bodyPr wrap="square" lIns="0" tIns="0" rIns="0" bIns="0" rtlCol="0" anchor="ctr"/>
-          <a:lstStyle/>
-          <a:p>
-            <a:pPr indent="0" marL="0">
-              <a:buNone/>
-            </a:pPr>
-            <a:r>
-              <a:rPr lang="en-US" sz="2600" b="1" dirty="0">
-                <a:solidFill>
-                  <a:srgbClr val="76B900"/>
-                </a:solidFill>
-                <a:latin typeface="Arial" pitchFamily="34" charset="0"/>
-                <a:ea typeface="Arial" pitchFamily="34" charset="-122"/>
-                <a:cs typeface="Arial" pitchFamily="34" charset="-120"/>
-              </a:rPr>
-              <a:t>1.8 &lt; 3.0 mm</a:t>
-            </a:r>
-            <a:endParaRPr lang="en-US" sz="2600" dirty="0"/>
-          </a:p>
-        </p:txBody>
-      </p:sp>
-      <p:sp>
-        <p:nvSpPr>
-          <p:cNvPr id="38" name="anim-o2-cap"/>
-          <p:cNvSpPr txBox="1"/>
-          <p:nvPr/>
-        </p:nvSpPr>
-        <p:spPr>
-          <a:xfrm>
-            <a:off x="8228381" y="5632704"/>
-            <a:ext cx="3332378" cy="384048"/>
-          </a:xfrm>
-          <a:prstGeom prst="rect">
-            <a:avLst/>
-          </a:prstGeom>
-          <a:noFill/>
-          <a:ln/>
-        </p:spPr>
-        <p:txBody>
-          <a:bodyPr wrap="square" lIns="0" tIns="0" rIns="0" bIns="0" rtlCol="0" anchor="t"/>
-          <a:lstStyle/>
-          <a:p>
-            <a:pPr indent="0" marL="0">
-              <a:lnSpc>
-                <a:spcPct val="95000"/>
-              </a:lnSpc>
-              <a:buNone/>
-            </a:pPr>
-            <a:r>
-              <a:rPr lang="en-US" sz="1100" dirty="0">
-                <a:solidFill>
-                  <a:srgbClr val="DCE8CF"/>
-                </a:solidFill>
-              </a:rPr>
-              <a:t>an out-of-spec measurement flags the vehicle unsafe to release, automatically</a:t>
-            </a:r>
-            <a:endParaRPr lang="en-US" sz="1100" dirty="0"/>
-          </a:p>
-        </p:txBody>
-      </p:sp>
-      <p:sp>
-        <p:nvSpPr>
-          <p:cNvPr id="39" name="Text 37"/>
-          <p:cNvSpPr txBox="1"/>
-          <p:nvPr/>
-        </p:nvSpPr>
-        <p:spPr>
-          <a:xfrm>
-            <a:off x="502920" y="6236208"/>
-            <a:ext cx="11185855" cy="237744"/>
-          </a:xfrm>
-          <a:prstGeom prst="rect">
-            <a:avLst/>
-          </a:prstGeom>
-          <a:noFill/>
-          <a:ln/>
-        </p:spPr>
-        <p:txBody>
-          <a:bodyPr wrap="square" lIns="0" tIns="0" rIns="0" bIns="0" rtlCol="0" anchor="ctr"/>
-          <a:lstStyle/>
-          <a:p>
-            <a:pPr indent="0" marL="0">
-              <a:buNone/>
-            </a:pPr>
-            <a:r>
-              <a:rPr lang="en-US" sz="1000" i="1" dirty="0">
-                <a:solidFill>
-                  <a:srgbClr val="5C6B64"/>
-                </a:solidFill>
-              </a:rPr>
-              <a:t>Speech recognition runs on NVIDIA-hosted Riva; every other model runs on the L40S in the box.</a:t>
-            </a:r>
-            <a:endParaRPr lang="en-US" sz="1000" dirty="0"/>
           </a:p>
         </p:txBody>
       </p:sp>
@@ -4976,7 +4421,7 @@
                       </p:stCondLst>
                       <p:childTnLst>
                         <p:par>
-                          <p:cTn id="103" fill="hold">
+                          <p:cTn id="76" fill="hold">
                             <p:stCondLst>
                               <p:cond delay="0"/>
                             </p:stCondLst>
@@ -5821,321 +5266,6 @@
                                   </p:childTnLst>
                                 </p:cTn>
                               </p:par>
-                              <p:par>
-                                <p:cTn id="76" presetID="10" presetClass="entr" presetSubtype="0" fill="hold" nodeType="withEffect">
-                                  <p:stCondLst>
-                                    <p:cond delay="6700"/>
-                                  </p:stCondLst>
-                                  <p:childTnLst>
-                                    <p:set>
-                                      <p:cBhvr>
-                                        <p:cTn id="77" dur="1" fill="hold">
-                                          <p:stCondLst>
-                                            <p:cond delay="0"/>
-                                          </p:stCondLst>
-                                        </p:cTn>
-                                        <p:tgtEl>
-                                          <p:spTgt spid="30"/>
-                                        </p:tgtEl>
-                                        <p:attrNameLst>
-                                          <p:attrName>style.visibility</p:attrName>
-                                        </p:attrNameLst>
-                                      </p:cBhvr>
-                                      <p:to>
-                                        <p:strVal val="visible"/>
-                                      </p:to>
-                                    </p:set>
-                                    <p:animEffect transition="in" filter="fade">
-                                      <p:cBhvr>
-                                        <p:cTn id="78" dur="500"/>
-                                        <p:tgtEl>
-                                          <p:spTgt spid="30"/>
-                                        </p:tgtEl>
-                                      </p:cBhvr>
-                                    </p:animEffect>
-                                  </p:childTnLst>
-                                </p:cTn>
-                              </p:par>
-                              <p:par>
-                                <p:cTn id="79" presetID="10" presetClass="entr" presetSubtype="0" fill="hold" nodeType="withEffect">
-                                  <p:stCondLst>
-                                    <p:cond delay="6700"/>
-                                  </p:stCondLst>
-                                  <p:childTnLst>
-                                    <p:set>
-                                      <p:cBhvr>
-                                        <p:cTn id="80" dur="1" fill="hold">
-                                          <p:stCondLst>
-                                            <p:cond delay="0"/>
-                                          </p:stCondLst>
-                                        </p:cTn>
-                                        <p:tgtEl>
-                                          <p:spTgt spid="31"/>
-                                        </p:tgtEl>
-                                        <p:attrNameLst>
-                                          <p:attrName>style.visibility</p:attrName>
-                                        </p:attrNameLst>
-                                      </p:cBhvr>
-                                      <p:to>
-                                        <p:strVal val="visible"/>
-                                      </p:to>
-                                    </p:set>
-                                    <p:animEffect transition="in" filter="fade">
-                                      <p:cBhvr>
-                                        <p:cTn id="81" dur="500"/>
-                                        <p:tgtEl>
-                                          <p:spTgt spid="31"/>
-                                        </p:tgtEl>
-                                      </p:cBhvr>
-                                    </p:animEffect>
-                                  </p:childTnLst>
-                                </p:cTn>
-                              </p:par>
-                              <p:par>
-                                <p:cTn id="82" presetID="10" presetClass="entr" presetSubtype="0" fill="hold" nodeType="withEffect">
-                                  <p:stCondLst>
-                                    <p:cond delay="6700"/>
-                                  </p:stCondLst>
-                                  <p:childTnLst>
-                                    <p:set>
-                                      <p:cBhvr>
-                                        <p:cTn id="83" dur="1" fill="hold">
-                                          <p:stCondLst>
-                                            <p:cond delay="0"/>
-                                          </p:stCondLst>
-                                        </p:cTn>
-                                        <p:tgtEl>
-                                          <p:spTgt spid="32"/>
-                                        </p:tgtEl>
-                                        <p:attrNameLst>
-                                          <p:attrName>style.visibility</p:attrName>
-                                        </p:attrNameLst>
-                                      </p:cBhvr>
-                                      <p:to>
-                                        <p:strVal val="visible"/>
-                                      </p:to>
-                                    </p:set>
-                                    <p:animEffect transition="in" filter="fade">
-                                      <p:cBhvr>
-                                        <p:cTn id="84" dur="500"/>
-                                        <p:tgtEl>
-                                          <p:spTgt spid="32"/>
-                                        </p:tgtEl>
-                                      </p:cBhvr>
-                                    </p:animEffect>
-                                  </p:childTnLst>
-                                </p:cTn>
-                              </p:par>
-                              <p:par>
-                                <p:cTn id="85" presetID="10" presetClass="entr" presetSubtype="0" fill="hold" nodeType="withEffect">
-                                  <p:stCondLst>
-                                    <p:cond delay="7150"/>
-                                  </p:stCondLst>
-                                  <p:childTnLst>
-                                    <p:set>
-                                      <p:cBhvr>
-                                        <p:cTn id="86" dur="1" fill="hold">
-                                          <p:stCondLst>
-                                            <p:cond delay="0"/>
-                                          </p:stCondLst>
-                                        </p:cTn>
-                                        <p:tgtEl>
-                                          <p:spTgt spid="33"/>
-                                        </p:tgtEl>
-                                        <p:attrNameLst>
-                                          <p:attrName>style.visibility</p:attrName>
-                                        </p:attrNameLst>
-                                      </p:cBhvr>
-                                      <p:to>
-                                        <p:strVal val="visible"/>
-                                      </p:to>
-                                    </p:set>
-                                    <p:animEffect transition="in" filter="fade">
-                                      <p:cBhvr>
-                                        <p:cTn id="87" dur="500"/>
-                                        <p:tgtEl>
-                                          <p:spTgt spid="33"/>
-                                        </p:tgtEl>
-                                      </p:cBhvr>
-                                    </p:animEffect>
-                                  </p:childTnLst>
-                                </p:cTn>
-                              </p:par>
-                              <p:par>
-                                <p:cTn id="88" presetID="10" presetClass="entr" presetSubtype="0" fill="hold" nodeType="withEffect">
-                                  <p:stCondLst>
-                                    <p:cond delay="7150"/>
-                                  </p:stCondLst>
-                                  <p:childTnLst>
-                                    <p:set>
-                                      <p:cBhvr>
-                                        <p:cTn id="89" dur="1" fill="hold">
-                                          <p:stCondLst>
-                                            <p:cond delay="0"/>
-                                          </p:stCondLst>
-                                        </p:cTn>
-                                        <p:tgtEl>
-                                          <p:spTgt spid="34"/>
-                                        </p:tgtEl>
-                                        <p:attrNameLst>
-                                          <p:attrName>style.visibility</p:attrName>
-                                        </p:attrNameLst>
-                                      </p:cBhvr>
-                                      <p:to>
-                                        <p:strVal val="visible"/>
-                                      </p:to>
-                                    </p:set>
-                                    <p:animEffect transition="in" filter="fade">
-                                      <p:cBhvr>
-                                        <p:cTn id="90" dur="500"/>
-                                        <p:tgtEl>
-                                          <p:spTgt spid="34"/>
-                                        </p:tgtEl>
-                                      </p:cBhvr>
-                                    </p:animEffect>
-                                  </p:childTnLst>
-                                </p:cTn>
-                              </p:par>
-                              <p:par>
-                                <p:cTn id="91" presetID="10" presetClass="entr" presetSubtype="0" fill="hold" nodeType="withEffect">
-                                  <p:stCondLst>
-                                    <p:cond delay="7150"/>
-                                  </p:stCondLst>
-                                  <p:childTnLst>
-                                    <p:set>
-                                      <p:cBhvr>
-                                        <p:cTn id="92" dur="1" fill="hold">
-                                          <p:stCondLst>
-                                            <p:cond delay="0"/>
-                                          </p:stCondLst>
-                                        </p:cTn>
-                                        <p:tgtEl>
-                                          <p:spTgt spid="35"/>
-                                        </p:tgtEl>
-                                        <p:attrNameLst>
-                                          <p:attrName>style.visibility</p:attrName>
-                                        </p:attrNameLst>
-                                      </p:cBhvr>
-                                      <p:to>
-                                        <p:strVal val="visible"/>
-                                      </p:to>
-                                    </p:set>
-                                    <p:animEffect transition="in" filter="fade">
-                                      <p:cBhvr>
-                                        <p:cTn id="93" dur="500"/>
-                                        <p:tgtEl>
-                                          <p:spTgt spid="35"/>
-                                        </p:tgtEl>
-                                      </p:cBhvr>
-                                    </p:animEffect>
-                                  </p:childTnLst>
-                                </p:cTn>
-                              </p:par>
-                              <p:par>
-                                <p:cTn id="94" presetID="10" presetClass="entr" presetSubtype="0" fill="hold" nodeType="withEffect">
-                                  <p:stCondLst>
-                                    <p:cond delay="7600"/>
-                                  </p:stCondLst>
-                                  <p:childTnLst>
-                                    <p:set>
-                                      <p:cBhvr>
-                                        <p:cTn id="95" dur="1" fill="hold">
-                                          <p:stCondLst>
-                                            <p:cond delay="0"/>
-                                          </p:stCondLst>
-                                        </p:cTn>
-                                        <p:tgtEl>
-                                          <p:spTgt spid="36"/>
-                                        </p:tgtEl>
-                                        <p:attrNameLst>
-                                          <p:attrName>style.visibility</p:attrName>
-                                        </p:attrNameLst>
-                                      </p:cBhvr>
-                                      <p:to>
-                                        <p:strVal val="visible"/>
-                                      </p:to>
-                                    </p:set>
-                                    <p:animEffect transition="in" filter="fade">
-                                      <p:cBhvr>
-                                        <p:cTn id="96" dur="500"/>
-                                        <p:tgtEl>
-                                          <p:spTgt spid="36"/>
-                                        </p:tgtEl>
-                                      </p:cBhvr>
-                                    </p:animEffect>
-                                  </p:childTnLst>
-                                </p:cTn>
-                              </p:par>
-                              <p:par>
-                                <p:cTn id="97" presetID="10" presetClass="entr" presetSubtype="0" fill="hold" nodeType="withEffect">
-                                  <p:stCondLst>
-                                    <p:cond delay="7600"/>
-                                  </p:stCondLst>
-                                  <p:childTnLst>
-                                    <p:set>
-                                      <p:cBhvr>
-                                        <p:cTn id="98" dur="1" fill="hold">
-                                          <p:stCondLst>
-                                            <p:cond delay="0"/>
-                                          </p:stCondLst>
-                                        </p:cTn>
-                                        <p:tgtEl>
-                                          <p:spTgt spid="37"/>
-                                        </p:tgtEl>
-                                        <p:attrNameLst>
-                                          <p:attrName>style.visibility</p:attrName>
-                                        </p:attrNameLst>
-                                      </p:cBhvr>
-                                      <p:to>
-                                        <p:strVal val="visible"/>
-                                      </p:to>
-                                    </p:set>
-                                    <p:animEffect transition="in" filter="fade">
-                                      <p:cBhvr>
-                                        <p:cTn id="99" dur="500"/>
-                                        <p:tgtEl>
-                                          <p:spTgt spid="37"/>
-                                        </p:tgtEl>
-                                      </p:cBhvr>
-                                    </p:animEffect>
-                                  </p:childTnLst>
-                                </p:cTn>
-                              </p:par>
-                              <p:par>
-                                <p:cTn id="100" presetID="10" presetClass="entr" presetSubtype="0" fill="hold" nodeType="withEffect">
-                                  <p:stCondLst>
-                                    <p:cond delay="7600"/>
-                                  </p:stCondLst>
-                                  <p:childTnLst>
-                                    <p:set>
-                                      <p:cBhvr>
-                                        <p:cTn id="101" dur="1" fill="hold">
-                                          <p:stCondLst>
-                                            <p:cond delay="0"/>
-                                          </p:stCondLst>
-                                        </p:cTn>
-                                        <p:tgtEl>
-                                          <p:spTgt spid="38"/>
-                                        </p:tgtEl>
-                                        <p:attrNameLst>
-                                          <p:attrName>style.visibility</p:attrName>
-                                        </p:attrNameLst>
-                                      </p:cBhvr>
-                                      <p:to>
-                                        <p:strVal val="visible"/>
-                                      </p:to>
-                                    </p:set>
-                                    <p:animEffect transition="in" filter="fade">
-                                      <p:cBhvr>
-                                        <p:cTn id="102" dur="500"/>
-                                        <p:tgtEl>
-                                          <p:spTgt spid="38"/>
-                                        </p:tgtEl>
-                                      </p:cBhvr>
-                                    </p:animEffect>
-                                  </p:childTnLst>
-                                </p:cTn>
-                              </p:par>
                             </p:childTnLst>
                           </p:cTn>
                         </p:par>
